--- a/slides/modules/m10-gitops-fundamentals.pptx
+++ b/slides/modules/m10-gitops-fundamentals.pptx
@@ -13,6 +13,9 @@
     <p:sldId id="261" r:id="rId13"/>
     <p:sldId id="262" r:id="rId14"/>
     <p:sldId id="263" r:id="rId15"/>
+    <p:sldId id="264" r:id="rId16"/>
+    <p:sldId id="265" r:id="rId17"/>
+    <p:sldId id="266" r:id="rId18"/>
   </p:sldIdLst>
   <p:sldSz cx="12191695" cy="6858000" type="screen4x3"/>
   <p:notesSz cx="6858000" cy="9144000"/>
@@ -534,6 +537,76 @@
 </p:notes>
 </file>
 
+<file path=ppt/notesSlides/notesSlide10.xml><?xml version="1.0" encoding="utf-8"?>
+<p:notes xmlns:a="http://schemas.openxmlformats.org/drawingml/2006/main" xmlns:p="http://schemas.openxmlformats.org/presentationml/2006/main" xmlns:r="http://schemas.openxmlformats.org/officeDocument/2006/relationships">
+  <p:cSld>
+    <p:spTree>
+      <p:nvGrpSpPr>
+        <p:cNvPr id="1" name=""/>
+        <p:cNvGrpSpPr/>
+        <p:nvPr/>
+      </p:nvGrpSpPr>
+      <p:grpSpPr>
+        <a:xfrm>
+          <a:off x="0" y="0"/>
+          <a:ext cx="0" cy="0"/>
+          <a:chOff x="0" y="0"/>
+          <a:chExt cx="0" cy="0"/>
+        </a:xfrm>
+      </p:grpSpPr>
+      <p:sp>
+        <p:nvSpPr>
+          <p:cNvPr id="2" name="Slide Image Placeholder 1"/>
+          <p:cNvSpPr>
+            <a:spLocks noGrp="1"/>
+          </p:cNvSpPr>
+          <p:nvPr>
+            <p:ph type="sldImg" idx="2"/>
+          </p:nvPr>
+        </p:nvSpPr>
+        <p:spPr/>
+      </p:sp>
+      <p:sp>
+        <p:nvSpPr>
+          <p:cNvPr id="3" name="Notes Placeholder 2"/>
+          <p:cNvSpPr>
+            <a:spLocks noGrp="1"/>
+          </p:cNvSpPr>
+          <p:nvPr>
+            <p:ph type="body" idx="3" sz="quarter"/>
+          </p:nvPr>
+        </p:nvSpPr>
+        <p:spPr/>
+        <p:txBody>
+          <a:bodyPr/>
+          <a:lstStyle/>
+          <a:p>
+            <a:r>
+              <a:t>Concept diagram: What you built.</a:t>
+            </a:r>
+          </a:p>
+        </p:txBody>
+      </p:sp>
+      <p:sp>
+        <p:nvSpPr>
+          <p:cNvPr id="4" name="Slide Number Placeholder 3"/>
+          <p:cNvSpPr>
+            <a:spLocks noGrp="1"/>
+          </p:cNvSpPr>
+          <p:nvPr>
+            <p:ph type="sldNum" idx="5" sz="quarter"/>
+          </p:nvPr>
+        </p:nvSpPr>
+        <p:spPr/>
+      </p:sp>
+    </p:spTree>
+  </p:cSld>
+  <p:clrMapOvr>
+    <a:masterClrMapping/>
+  </p:clrMapOvr>
+</p:notes>
+</file>
+
 <file path=ppt/notesSlides/notesSlide2.xml><?xml version="1.0" encoding="utf-8"?>
 <p:notes xmlns:a="http://schemas.openxmlformats.org/drawingml/2006/main" xmlns:p="http://schemas.openxmlformats.org/presentationml/2006/main" xmlns:r="http://schemas.openxmlformats.org/officeDocument/2006/relationships">
   <p:cSld>
@@ -930,6 +1003,146 @@
           <a:p>
             <a:r>
               <a:t>Land the transfer and stay honest. Discussion prompts: whether the true state of your environments lives in a Git commit or in the cluster and people's memories; the last outage that started with an undocumented change to a running environment, and whether you would want self-heal enforcing Git there; and whether moving a change to production means merging a reviewed commit or a person with cluster credentials running apply. Then the credibility close on restraint: GitOps is for declarative state you want continuously reconciled, so don't put fast, ephemeral, imperative work in it (a one-off migration is a Job, not an Application); don't turn on self-heal where humans legitimately hold the wheel, like a break-glass or actively-debugged environment; and never commit a plaintext secret to make GitOps "complete" — source secrets from a manager and let GitOps reconcile the reference, not the value. Scale (many apps, ApplicationSets, progressive delivery) is the next GitOps module.</a:t>
+            </a:r>
+          </a:p>
+        </p:txBody>
+      </p:sp>
+      <p:sp>
+        <p:nvSpPr>
+          <p:cNvPr id="4" name="Slide Number Placeholder 3"/>
+          <p:cNvSpPr>
+            <a:spLocks noGrp="1"/>
+          </p:cNvSpPr>
+          <p:nvPr>
+            <p:ph type="sldNum" idx="5" sz="quarter"/>
+          </p:nvPr>
+        </p:nvSpPr>
+        <p:spPr/>
+      </p:sp>
+    </p:spTree>
+  </p:cSld>
+  <p:clrMapOvr>
+    <a:masterClrMapping/>
+  </p:clrMapOvr>
+</p:notes>
+</file>
+
+<file path=ppt/notesSlides/notesSlide8.xml><?xml version="1.0" encoding="utf-8"?>
+<p:notes xmlns:a="http://schemas.openxmlformats.org/drawingml/2006/main" xmlns:p="http://schemas.openxmlformats.org/presentationml/2006/main" xmlns:r="http://schemas.openxmlformats.org/officeDocument/2006/relationships">
+  <p:cSld>
+    <p:spTree>
+      <p:nvGrpSpPr>
+        <p:cNvPr id="1" name=""/>
+        <p:cNvGrpSpPr/>
+        <p:nvPr/>
+      </p:nvGrpSpPr>
+      <p:grpSpPr>
+        <a:xfrm>
+          <a:off x="0" y="0"/>
+          <a:ext cx="0" cy="0"/>
+          <a:chOff x="0" y="0"/>
+          <a:chExt cx="0" cy="0"/>
+        </a:xfrm>
+      </p:grpSpPr>
+      <p:sp>
+        <p:nvSpPr>
+          <p:cNvPr id="2" name="Slide Image Placeholder 1"/>
+          <p:cNvSpPr>
+            <a:spLocks noGrp="1"/>
+          </p:cNvSpPr>
+          <p:nvPr>
+            <p:ph type="sldImg" idx="2"/>
+          </p:nvPr>
+        </p:nvSpPr>
+        <p:spPr/>
+      </p:sp>
+      <p:sp>
+        <p:nvSpPr>
+          <p:cNvPr id="3" name="Notes Placeholder 2"/>
+          <p:cNvSpPr>
+            <a:spLocks noGrp="1"/>
+          </p:cNvSpPr>
+          <p:nvPr>
+            <p:ph type="body" idx="3" sz="quarter"/>
+          </p:nvPr>
+        </p:nvSpPr>
+        <p:spPr/>
+        <p:txBody>
+          <a:bodyPr/>
+          <a:lstStyle/>
+          <a:p>
+            <a:r>
+              <a:t>Concept diagram: Push vs pull.</a:t>
+            </a:r>
+          </a:p>
+        </p:txBody>
+      </p:sp>
+      <p:sp>
+        <p:nvSpPr>
+          <p:cNvPr id="4" name="Slide Number Placeholder 3"/>
+          <p:cNvSpPr>
+            <a:spLocks noGrp="1"/>
+          </p:cNvSpPr>
+          <p:nvPr>
+            <p:ph type="sldNum" idx="5" sz="quarter"/>
+          </p:nvPr>
+        </p:nvSpPr>
+        <p:spPr/>
+      </p:sp>
+    </p:spTree>
+  </p:cSld>
+  <p:clrMapOvr>
+    <a:masterClrMapping/>
+  </p:clrMapOvr>
+</p:notes>
+</file>
+
+<file path=ppt/notesSlides/notesSlide9.xml><?xml version="1.0" encoding="utf-8"?>
+<p:notes xmlns:a="http://schemas.openxmlformats.org/drawingml/2006/main" xmlns:p="http://schemas.openxmlformats.org/presentationml/2006/main" xmlns:r="http://schemas.openxmlformats.org/officeDocument/2006/relationships">
+  <p:cSld>
+    <p:spTree>
+      <p:nvGrpSpPr>
+        <p:cNvPr id="1" name=""/>
+        <p:cNvGrpSpPr/>
+        <p:nvPr/>
+      </p:nvGrpSpPr>
+      <p:grpSpPr>
+        <a:xfrm>
+          <a:off x="0" y="0"/>
+          <a:ext cx="0" cy="0"/>
+          <a:chOff x="0" y="0"/>
+          <a:chExt cx="0" cy="0"/>
+        </a:xfrm>
+      </p:grpSpPr>
+      <p:sp>
+        <p:nvSpPr>
+          <p:cNvPr id="2" name="Slide Image Placeholder 1"/>
+          <p:cNvSpPr>
+            <a:spLocks noGrp="1"/>
+          </p:cNvSpPr>
+          <p:nvPr>
+            <p:ph type="sldImg" idx="2"/>
+          </p:nvPr>
+        </p:nvSpPr>
+        <p:spPr/>
+      </p:sp>
+      <p:sp>
+        <p:nvSpPr>
+          <p:cNvPr id="3" name="Notes Placeholder 2"/>
+          <p:cNvSpPr>
+            <a:spLocks noGrp="1"/>
+          </p:cNvSpPr>
+          <p:nvPr>
+            <p:ph type="body" idx="3" sz="quarter"/>
+          </p:nvPr>
+        </p:nvSpPr>
+        <p:spPr/>
+        <p:txBody>
+          <a:bodyPr/>
+          <a:lstStyle/>
+          <a:p>
+            <a:r>
+              <a:t>Concept diagram: Reconcile loop.</a:t>
             </a:r>
           </a:p>
         </p:txBody>
@@ -4138,6 +4351,738 @@
 </p:sld>
 </file>
 
+<file path=ppt/slides/slide10.xml><?xml version="1.0" encoding="utf-8"?>
+<p:sld xmlns:a="http://schemas.openxmlformats.org/drawingml/2006/main" xmlns:p="http://schemas.openxmlformats.org/presentationml/2006/main" xmlns:r="http://schemas.openxmlformats.org/officeDocument/2006/relationships">
+  <p:cSld>
+    <p:spTree>
+      <p:nvGrpSpPr>
+        <p:cNvPr id="1" name=""/>
+        <p:cNvGrpSpPr/>
+        <p:nvPr/>
+      </p:nvGrpSpPr>
+      <p:grpSpPr/>
+      <p:pic>
+        <p:nvPicPr>
+          <p:cNvPr id="2" name="Picture 1" descr="redhat_logo.jpg"/>
+          <p:cNvPicPr>
+            <a:picLocks noChangeAspect="1"/>
+          </p:cNvPicPr>
+          <p:nvPr/>
+        </p:nvPicPr>
+        <p:blipFill>
+          <a:blip r:embed="rId2"/>
+          <a:stretch>
+            <a:fillRect/>
+          </a:stretch>
+        </p:blipFill>
+        <p:spPr>
+          <a:xfrm>
+            <a:off x="10326319" y="475488"/>
+            <a:ext cx="1024128" cy="242248"/>
+          </a:xfrm>
+          <a:prstGeom prst="rect">
+            <a:avLst/>
+          </a:prstGeom>
+        </p:spPr>
+      </p:pic>
+      <p:sp>
+        <p:nvSpPr>
+          <p:cNvPr id="3" name="TextBox 2"/>
+          <p:cNvSpPr txBox="1"/>
+          <p:nvPr/>
+        </p:nvSpPr>
+        <p:spPr>
+          <a:xfrm>
+            <a:off x="841248" y="548640"/>
+            <a:ext cx="8595360" cy="274320"/>
+          </a:xfrm>
+          <a:prstGeom prst="rect">
+            <a:avLst/>
+          </a:prstGeom>
+          <a:noFill/>
+        </p:spPr>
+        <p:txBody>
+          <a:bodyPr wrap="square" anchor="t" lIns="0" rIns="0" tIns="0" bIns="0">
+            <a:spAutoFit/>
+          </a:bodyPr>
+          <a:lstStyle/>
+          <a:p>
+            <a:pPr algn="l">
+              <a:lnSpc>
+                <a:spcPct val="106000"/>
+              </a:lnSpc>
+              <a:spcBef>
+                <a:spcPts val="0"/>
+              </a:spcBef>
+              <a:spcAft>
+                <a:spcPts val="0"/>
+              </a:spcAft>
+            </a:pPr>
+            <a:r>
+              <a:rPr sz="1250" b="1" spc="220">
+                <a:solidFill>
+                  <a:srgbClr val="EE0000"/>
+                </a:solidFill>
+                <a:latin typeface="Red Hat Display"/>
+              </a:rPr>
+              <a:t>M10 · GITOPS FUNDAMENTALS</a:t>
+            </a:r>
+          </a:p>
+        </p:txBody>
+      </p:sp>
+      <p:sp>
+        <p:nvSpPr>
+          <p:cNvPr id="4" name="TextBox 3"/>
+          <p:cNvSpPr txBox="1"/>
+          <p:nvPr/>
+        </p:nvSpPr>
+        <p:spPr>
+          <a:xfrm>
+            <a:off x="841248" y="877824"/>
+            <a:ext cx="10515600" cy="548640"/>
+          </a:xfrm>
+          <a:prstGeom prst="rect">
+            <a:avLst/>
+          </a:prstGeom>
+          <a:noFill/>
+        </p:spPr>
+        <p:txBody>
+          <a:bodyPr wrap="none" anchor="t" lIns="0" rIns="0" tIns="0" bIns="0">
+            <a:spAutoFit/>
+          </a:bodyPr>
+          <a:lstStyle/>
+          <a:p>
+            <a:pPr algn="l">
+              <a:lnSpc>
+                <a:spcPct val="100000"/>
+              </a:lnSpc>
+              <a:spcBef>
+                <a:spcPts val="0"/>
+              </a:spcBef>
+              <a:spcAft>
+                <a:spcPts val="0"/>
+              </a:spcAft>
+            </a:pPr>
+            <a:r>
+              <a:rPr sz="2500" b="1">
+                <a:solidFill>
+                  <a:srgbClr val="1A1A1A"/>
+                </a:solidFill>
+                <a:latin typeface="Red Hat Display"/>
+              </a:rPr>
+              <a:t>Reconcile loop</a:t>
+            </a:r>
+          </a:p>
+        </p:txBody>
+      </p:sp>
+      <p:cxnSp>
+        <p:nvCxnSpPr>
+          <p:cNvPr id="5" name="Connector 4"/>
+          <p:cNvCxnSpPr/>
+          <p:nvPr/>
+        </p:nvCxnSpPr>
+        <p:spPr>
+          <a:xfrm>
+            <a:off x="841248" y="1554480"/>
+            <a:ext cx="1371600" cy="0"/>
+          </a:xfrm>
+          <a:prstGeom prst="bentConnector3">
+            <a:avLst/>
+          </a:prstGeom>
+          <a:ln w="31750">
+            <a:solidFill>
+              <a:srgbClr val="EE0000"/>
+            </a:solidFill>
+          </a:ln>
+          <a:effectLst/>
+        </p:spPr>
+        <p:style>
+          <a:lnRef idx="2">
+            <a:schemeClr val="accent1"/>
+          </a:lnRef>
+          <a:fillRef idx="0">
+            <a:schemeClr val="accent1"/>
+          </a:fillRef>
+          <a:effectRef idx="1">
+            <a:schemeClr val="accent1"/>
+          </a:effectRef>
+          <a:fontRef idx="minor">
+            <a:schemeClr val="tx1"/>
+          </a:fontRef>
+        </p:style>
+      </p:cxnSp>
+      <p:sp>
+        <p:nvSpPr>
+          <p:cNvPr id="6" name="Rounded Rectangle 5"/>
+          <p:cNvSpPr/>
+          <p:nvPr/>
+        </p:nvSpPr>
+        <p:spPr>
+          <a:xfrm>
+            <a:off x="841248" y="2331720"/>
+            <a:ext cx="10509199" cy="3794760"/>
+          </a:xfrm>
+          <a:prstGeom prst="roundRect">
+            <a:avLst>
+              <a:gd name="adj" fmla="val 4000"/>
+            </a:avLst>
+          </a:prstGeom>
+          <a:solidFill>
+            <a:srgbClr val="FFFFFF"/>
+          </a:solidFill>
+          <a:ln w="15240">
+            <a:solidFill>
+              <a:srgbClr val="DDE1E6"/>
+            </a:solidFill>
+          </a:ln>
+          <a:effectLst/>
+        </p:spPr>
+        <p:style>
+          <a:lnRef idx="1">
+            <a:schemeClr val="accent1"/>
+          </a:lnRef>
+          <a:fillRef idx="3">
+            <a:schemeClr val="accent1"/>
+          </a:fillRef>
+          <a:effectRef idx="2">
+            <a:schemeClr val="accent1"/>
+          </a:effectRef>
+          <a:fontRef idx="minor">
+            <a:schemeClr val="lt1"/>
+          </a:fontRef>
+        </p:style>
+        <p:txBody>
+          <a:bodyPr rtlCol="0" anchor="ctr"/>
+          <a:lstStyle/>
+          <a:p>
+            <a:pPr algn="ctr"/>
+          </a:p>
+        </p:txBody>
+      </p:sp>
+      <p:pic>
+        <p:nvPicPr>
+          <p:cNvPr id="7" name="Picture 6" descr="02-reconcile-loop.png"/>
+          <p:cNvPicPr>
+            <a:picLocks noChangeAspect="1"/>
+          </p:cNvPicPr>
+          <p:nvPr/>
+        </p:nvPicPr>
+        <p:blipFill>
+          <a:blip r:embed="rId3"/>
+          <a:stretch>
+            <a:fillRect/>
+          </a:stretch>
+        </p:blipFill>
+        <p:spPr>
+          <a:xfrm>
+            <a:off x="1042416" y="3224730"/>
+            <a:ext cx="10106863" cy="2008739"/>
+          </a:xfrm>
+          <a:prstGeom prst="rect">
+            <a:avLst/>
+          </a:prstGeom>
+        </p:spPr>
+      </p:pic>
+      <p:cxnSp>
+        <p:nvCxnSpPr>
+          <p:cNvPr id="8" name="Connector 7"/>
+          <p:cNvCxnSpPr/>
+          <p:nvPr/>
+        </p:nvCxnSpPr>
+        <p:spPr>
+          <a:xfrm>
+            <a:off x="841248" y="6437376"/>
+            <a:ext cx="10509199" cy="0"/>
+          </a:xfrm>
+          <a:prstGeom prst="bentConnector3">
+            <a:avLst/>
+          </a:prstGeom>
+          <a:ln w="12700">
+            <a:solidFill>
+              <a:srgbClr val="DDE1E6"/>
+            </a:solidFill>
+          </a:ln>
+          <a:effectLst/>
+        </p:spPr>
+        <p:style>
+          <a:lnRef idx="2">
+            <a:schemeClr val="accent1"/>
+          </a:lnRef>
+          <a:fillRef idx="0">
+            <a:schemeClr val="accent1"/>
+          </a:fillRef>
+          <a:effectRef idx="1">
+            <a:schemeClr val="accent1"/>
+          </a:effectRef>
+          <a:fontRef idx="minor">
+            <a:schemeClr val="tx1"/>
+          </a:fontRef>
+        </p:style>
+      </p:cxnSp>
+      <p:sp>
+        <p:nvSpPr>
+          <p:cNvPr id="9" name="TextBox 8"/>
+          <p:cNvSpPr txBox="1"/>
+          <p:nvPr/>
+        </p:nvSpPr>
+        <p:spPr>
+          <a:xfrm>
+            <a:off x="841248" y="6473952"/>
+            <a:ext cx="7315200" cy="274320"/>
+          </a:xfrm>
+          <a:prstGeom prst="rect">
+            <a:avLst/>
+          </a:prstGeom>
+          <a:noFill/>
+        </p:spPr>
+        <p:txBody>
+          <a:bodyPr wrap="square" anchor="t" lIns="0" rIns="0" tIns="0" bIns="0">
+            <a:spAutoFit/>
+          </a:bodyPr>
+          <a:lstStyle/>
+          <a:p>
+            <a:pPr algn="l">
+              <a:lnSpc>
+                <a:spcPct val="106000"/>
+              </a:lnSpc>
+              <a:spcBef>
+                <a:spcPts val="0"/>
+              </a:spcBef>
+              <a:spcAft>
+                <a:spcPts val="0"/>
+              </a:spcAft>
+            </a:pPr>
+            <a:r>
+              <a:rPr sz="950" b="0">
+                <a:solidFill>
+                  <a:srgbClr val="8A9099"/>
+                </a:solidFill>
+                <a:latin typeface="Red Hat Text"/>
+              </a:rPr>
+              <a:t>CONFIDENTIAL</a:t>
+            </a:r>
+          </a:p>
+        </p:txBody>
+      </p:sp>
+      <p:sp>
+        <p:nvSpPr>
+          <p:cNvPr id="10" name="TextBox 9"/>
+          <p:cNvSpPr txBox="1"/>
+          <p:nvPr/>
+        </p:nvSpPr>
+        <p:spPr>
+          <a:xfrm>
+            <a:off x="10801807" y="6473952"/>
+            <a:ext cx="548640" cy="274320"/>
+          </a:xfrm>
+          <a:prstGeom prst="rect">
+            <a:avLst/>
+          </a:prstGeom>
+          <a:noFill/>
+        </p:spPr>
+        <p:txBody>
+          <a:bodyPr wrap="square" anchor="t" lIns="0" rIns="0" tIns="0" bIns="0">
+            <a:spAutoFit/>
+          </a:bodyPr>
+          <a:lstStyle/>
+          <a:p>
+            <a:pPr algn="r">
+              <a:lnSpc>
+                <a:spcPct val="106000"/>
+              </a:lnSpc>
+              <a:spcBef>
+                <a:spcPts val="0"/>
+              </a:spcBef>
+              <a:spcAft>
+                <a:spcPts val="0"/>
+              </a:spcAft>
+            </a:pPr>
+            <a:r>
+              <a:rPr sz="950" b="0">
+                <a:solidFill>
+                  <a:srgbClr val="8A9099"/>
+                </a:solidFill>
+                <a:latin typeface="Red Hat Text"/>
+              </a:rPr>
+              <a:t>9</a:t>
+            </a:r>
+          </a:p>
+        </p:txBody>
+      </p:sp>
+    </p:spTree>
+  </p:cSld>
+  <p:clrMapOvr>
+    <a:masterClrMapping/>
+  </p:clrMapOvr>
+</p:sld>
+</file>
+
+<file path=ppt/slides/slide11.xml><?xml version="1.0" encoding="utf-8"?>
+<p:sld xmlns:a="http://schemas.openxmlformats.org/drawingml/2006/main" xmlns:p="http://schemas.openxmlformats.org/presentationml/2006/main" xmlns:r="http://schemas.openxmlformats.org/officeDocument/2006/relationships">
+  <p:cSld>
+    <p:spTree>
+      <p:nvGrpSpPr>
+        <p:cNvPr id="1" name=""/>
+        <p:cNvGrpSpPr/>
+        <p:nvPr/>
+      </p:nvGrpSpPr>
+      <p:grpSpPr/>
+      <p:pic>
+        <p:nvPicPr>
+          <p:cNvPr id="2" name="Picture 1" descr="redhat_logo.jpg"/>
+          <p:cNvPicPr>
+            <a:picLocks noChangeAspect="1"/>
+          </p:cNvPicPr>
+          <p:nvPr/>
+        </p:nvPicPr>
+        <p:blipFill>
+          <a:blip r:embed="rId2"/>
+          <a:stretch>
+            <a:fillRect/>
+          </a:stretch>
+        </p:blipFill>
+        <p:spPr>
+          <a:xfrm>
+            <a:off x="10326319" y="475488"/>
+            <a:ext cx="1024128" cy="242248"/>
+          </a:xfrm>
+          <a:prstGeom prst="rect">
+            <a:avLst/>
+          </a:prstGeom>
+        </p:spPr>
+      </p:pic>
+      <p:sp>
+        <p:nvSpPr>
+          <p:cNvPr id="3" name="TextBox 2"/>
+          <p:cNvSpPr txBox="1"/>
+          <p:nvPr/>
+        </p:nvSpPr>
+        <p:spPr>
+          <a:xfrm>
+            <a:off x="841248" y="548640"/>
+            <a:ext cx="8595360" cy="274320"/>
+          </a:xfrm>
+          <a:prstGeom prst="rect">
+            <a:avLst/>
+          </a:prstGeom>
+          <a:noFill/>
+        </p:spPr>
+        <p:txBody>
+          <a:bodyPr wrap="square" anchor="t" lIns="0" rIns="0" tIns="0" bIns="0">
+            <a:spAutoFit/>
+          </a:bodyPr>
+          <a:lstStyle/>
+          <a:p>
+            <a:pPr algn="l">
+              <a:lnSpc>
+                <a:spcPct val="106000"/>
+              </a:lnSpc>
+              <a:spcBef>
+                <a:spcPts val="0"/>
+              </a:spcBef>
+              <a:spcAft>
+                <a:spcPts val="0"/>
+              </a:spcAft>
+            </a:pPr>
+            <a:r>
+              <a:rPr sz="1250" b="1" spc="220">
+                <a:solidFill>
+                  <a:srgbClr val="EE0000"/>
+                </a:solidFill>
+                <a:latin typeface="Red Hat Display"/>
+              </a:rPr>
+              <a:t>M10 · GITOPS FUNDAMENTALS</a:t>
+            </a:r>
+          </a:p>
+        </p:txBody>
+      </p:sp>
+      <p:sp>
+        <p:nvSpPr>
+          <p:cNvPr id="4" name="TextBox 3"/>
+          <p:cNvSpPr txBox="1"/>
+          <p:nvPr/>
+        </p:nvSpPr>
+        <p:spPr>
+          <a:xfrm>
+            <a:off x="841248" y="877824"/>
+            <a:ext cx="10515600" cy="548640"/>
+          </a:xfrm>
+          <a:prstGeom prst="rect">
+            <a:avLst/>
+          </a:prstGeom>
+          <a:noFill/>
+        </p:spPr>
+        <p:txBody>
+          <a:bodyPr wrap="none" anchor="t" lIns="0" rIns="0" tIns="0" bIns="0">
+            <a:spAutoFit/>
+          </a:bodyPr>
+          <a:lstStyle/>
+          <a:p>
+            <a:pPr algn="l">
+              <a:lnSpc>
+                <a:spcPct val="100000"/>
+              </a:lnSpc>
+              <a:spcBef>
+                <a:spcPts val="0"/>
+              </a:spcBef>
+              <a:spcAft>
+                <a:spcPts val="0"/>
+              </a:spcAft>
+            </a:pPr>
+            <a:r>
+              <a:rPr sz="2500" b="1">
+                <a:solidFill>
+                  <a:srgbClr val="1A1A1A"/>
+                </a:solidFill>
+                <a:latin typeface="Red Hat Display"/>
+              </a:rPr>
+              <a:t>What you built</a:t>
+            </a:r>
+          </a:p>
+        </p:txBody>
+      </p:sp>
+      <p:cxnSp>
+        <p:nvCxnSpPr>
+          <p:cNvPr id="5" name="Connector 4"/>
+          <p:cNvCxnSpPr/>
+          <p:nvPr/>
+        </p:nvCxnSpPr>
+        <p:spPr>
+          <a:xfrm>
+            <a:off x="841248" y="1554480"/>
+            <a:ext cx="1371600" cy="0"/>
+          </a:xfrm>
+          <a:prstGeom prst="bentConnector3">
+            <a:avLst/>
+          </a:prstGeom>
+          <a:ln w="31750">
+            <a:solidFill>
+              <a:srgbClr val="EE0000"/>
+            </a:solidFill>
+          </a:ln>
+          <a:effectLst/>
+        </p:spPr>
+        <p:style>
+          <a:lnRef idx="2">
+            <a:schemeClr val="accent1"/>
+          </a:lnRef>
+          <a:fillRef idx="0">
+            <a:schemeClr val="accent1"/>
+          </a:fillRef>
+          <a:effectRef idx="1">
+            <a:schemeClr val="accent1"/>
+          </a:effectRef>
+          <a:fontRef idx="minor">
+            <a:schemeClr val="tx1"/>
+          </a:fontRef>
+        </p:style>
+      </p:cxnSp>
+      <p:sp>
+        <p:nvSpPr>
+          <p:cNvPr id="6" name="Rounded Rectangle 5"/>
+          <p:cNvSpPr/>
+          <p:nvPr/>
+        </p:nvSpPr>
+        <p:spPr>
+          <a:xfrm>
+            <a:off x="841248" y="2331720"/>
+            <a:ext cx="10509199" cy="3794760"/>
+          </a:xfrm>
+          <a:prstGeom prst="roundRect">
+            <a:avLst>
+              <a:gd name="adj" fmla="val 4000"/>
+            </a:avLst>
+          </a:prstGeom>
+          <a:solidFill>
+            <a:srgbClr val="FFFFFF"/>
+          </a:solidFill>
+          <a:ln w="15240">
+            <a:solidFill>
+              <a:srgbClr val="DDE1E6"/>
+            </a:solidFill>
+          </a:ln>
+          <a:effectLst/>
+        </p:spPr>
+        <p:style>
+          <a:lnRef idx="1">
+            <a:schemeClr val="accent1"/>
+          </a:lnRef>
+          <a:fillRef idx="3">
+            <a:schemeClr val="accent1"/>
+          </a:fillRef>
+          <a:effectRef idx="2">
+            <a:schemeClr val="accent1"/>
+          </a:effectRef>
+          <a:fontRef idx="minor">
+            <a:schemeClr val="lt1"/>
+          </a:fontRef>
+        </p:style>
+        <p:txBody>
+          <a:bodyPr rtlCol="0" anchor="ctr"/>
+          <a:lstStyle/>
+          <a:p>
+            <a:pPr algn="ctr"/>
+          </a:p>
+        </p:txBody>
+      </p:sp>
+      <p:pic>
+        <p:nvPicPr>
+          <p:cNvPr id="7" name="Picture 6" descr="03-what-you-built.png"/>
+          <p:cNvPicPr>
+            <a:picLocks noChangeAspect="1"/>
+          </p:cNvPicPr>
+          <p:nvPr/>
+        </p:nvPicPr>
+        <p:blipFill>
+          <a:blip r:embed="rId3"/>
+          <a:stretch>
+            <a:fillRect/>
+          </a:stretch>
+        </p:blipFill>
+        <p:spPr>
+          <a:xfrm>
+            <a:off x="1042416" y="3515302"/>
+            <a:ext cx="10106863" cy="1427594"/>
+          </a:xfrm>
+          <a:prstGeom prst="rect">
+            <a:avLst/>
+          </a:prstGeom>
+        </p:spPr>
+      </p:pic>
+      <p:cxnSp>
+        <p:nvCxnSpPr>
+          <p:cNvPr id="8" name="Connector 7"/>
+          <p:cNvCxnSpPr/>
+          <p:nvPr/>
+        </p:nvCxnSpPr>
+        <p:spPr>
+          <a:xfrm>
+            <a:off x="841248" y="6437376"/>
+            <a:ext cx="10509199" cy="0"/>
+          </a:xfrm>
+          <a:prstGeom prst="bentConnector3">
+            <a:avLst/>
+          </a:prstGeom>
+          <a:ln w="12700">
+            <a:solidFill>
+              <a:srgbClr val="DDE1E6"/>
+            </a:solidFill>
+          </a:ln>
+          <a:effectLst/>
+        </p:spPr>
+        <p:style>
+          <a:lnRef idx="2">
+            <a:schemeClr val="accent1"/>
+          </a:lnRef>
+          <a:fillRef idx="0">
+            <a:schemeClr val="accent1"/>
+          </a:fillRef>
+          <a:effectRef idx="1">
+            <a:schemeClr val="accent1"/>
+          </a:effectRef>
+          <a:fontRef idx="minor">
+            <a:schemeClr val="tx1"/>
+          </a:fontRef>
+        </p:style>
+      </p:cxnSp>
+      <p:sp>
+        <p:nvSpPr>
+          <p:cNvPr id="9" name="TextBox 8"/>
+          <p:cNvSpPr txBox="1"/>
+          <p:nvPr/>
+        </p:nvSpPr>
+        <p:spPr>
+          <a:xfrm>
+            <a:off x="841248" y="6473952"/>
+            <a:ext cx="7315200" cy="274320"/>
+          </a:xfrm>
+          <a:prstGeom prst="rect">
+            <a:avLst/>
+          </a:prstGeom>
+          <a:noFill/>
+        </p:spPr>
+        <p:txBody>
+          <a:bodyPr wrap="square" anchor="t" lIns="0" rIns="0" tIns="0" bIns="0">
+            <a:spAutoFit/>
+          </a:bodyPr>
+          <a:lstStyle/>
+          <a:p>
+            <a:pPr algn="l">
+              <a:lnSpc>
+                <a:spcPct val="106000"/>
+              </a:lnSpc>
+              <a:spcBef>
+                <a:spcPts val="0"/>
+              </a:spcBef>
+              <a:spcAft>
+                <a:spcPts val="0"/>
+              </a:spcAft>
+            </a:pPr>
+            <a:r>
+              <a:rPr sz="950" b="0">
+                <a:solidFill>
+                  <a:srgbClr val="8A9099"/>
+                </a:solidFill>
+                <a:latin typeface="Red Hat Text"/>
+              </a:rPr>
+              <a:t>CONFIDENTIAL</a:t>
+            </a:r>
+          </a:p>
+        </p:txBody>
+      </p:sp>
+      <p:sp>
+        <p:nvSpPr>
+          <p:cNvPr id="10" name="TextBox 9"/>
+          <p:cNvSpPr txBox="1"/>
+          <p:nvPr/>
+        </p:nvSpPr>
+        <p:spPr>
+          <a:xfrm>
+            <a:off x="10801807" y="6473952"/>
+            <a:ext cx="548640" cy="274320"/>
+          </a:xfrm>
+          <a:prstGeom prst="rect">
+            <a:avLst/>
+          </a:prstGeom>
+          <a:noFill/>
+        </p:spPr>
+        <p:txBody>
+          <a:bodyPr wrap="square" anchor="t" lIns="0" rIns="0" tIns="0" bIns="0">
+            <a:spAutoFit/>
+          </a:bodyPr>
+          <a:lstStyle/>
+          <a:p>
+            <a:pPr algn="r">
+              <a:lnSpc>
+                <a:spcPct val="106000"/>
+              </a:lnSpc>
+              <a:spcBef>
+                <a:spcPts val="0"/>
+              </a:spcBef>
+              <a:spcAft>
+                <a:spcPts val="0"/>
+              </a:spcAft>
+            </a:pPr>
+            <a:r>
+              <a:rPr sz="950" b="0">
+                <a:solidFill>
+                  <a:srgbClr val="8A9099"/>
+                </a:solidFill>
+                <a:latin typeface="Red Hat Text"/>
+              </a:rPr>
+              <a:t>10</a:t>
+            </a:r>
+          </a:p>
+        </p:txBody>
+      </p:sp>
+    </p:spTree>
+  </p:cSld>
+  <p:clrMapOvr>
+    <a:masterClrMapping/>
+  </p:clrMapOvr>
+</p:sld>
+</file>
+
 <file path=ppt/slides/slide2.xml><?xml version="1.0" encoding="utf-8"?>
 <p:sld xmlns:a="http://schemas.openxmlformats.org/drawingml/2006/main" xmlns:p="http://schemas.openxmlformats.org/presentationml/2006/main" xmlns:r="http://schemas.openxmlformats.org/officeDocument/2006/relationships">
   <p:cSld>
@@ -4307,11 +5252,11 @@
         <p:spPr>
           <a:xfrm>
             <a:off x="841248" y="2395728"/>
-            <a:ext cx="5715000" cy="530352"/>
+            <a:ext cx="5138928" cy="786384"/>
           </a:xfrm>
           <a:prstGeom prst="roundRect">
             <a:avLst>
-              <a:gd name="adj" fmla="val 6000"/>
+              <a:gd name="adj" fmla="val 7000"/>
             </a:avLst>
           </a:prstGeom>
           <a:solidFill>
@@ -4346,9 +5291,55 @@
           </a:p>
         </p:txBody>
       </p:sp>
+      <p:sp>
+        <p:nvSpPr>
+          <p:cNvPr id="7" name="Rounded Rectangle 6"/>
+          <p:cNvSpPr/>
+          <p:nvPr/>
+        </p:nvSpPr>
+        <p:spPr>
+          <a:xfrm>
+            <a:off x="987552" y="2532888"/>
+            <a:ext cx="512064" cy="512064"/>
+          </a:xfrm>
+          <a:prstGeom prst="roundRect">
+            <a:avLst>
+              <a:gd name="adj" fmla="val 26000"/>
+            </a:avLst>
+          </a:prstGeom>
+          <a:solidFill>
+            <a:srgbClr val="EE0000"/>
+          </a:solidFill>
+          <a:ln>
+            <a:noFill/>
+          </a:ln>
+          <a:effectLst/>
+        </p:spPr>
+        <p:style>
+          <a:lnRef idx="1">
+            <a:schemeClr val="accent1"/>
+          </a:lnRef>
+          <a:fillRef idx="3">
+            <a:schemeClr val="accent1"/>
+          </a:fillRef>
+          <a:effectRef idx="2">
+            <a:schemeClr val="accent1"/>
+          </a:effectRef>
+          <a:fontRef idx="minor">
+            <a:schemeClr val="lt1"/>
+          </a:fontRef>
+        </p:style>
+        <p:txBody>
+          <a:bodyPr rtlCol="0" anchor="ctr"/>
+          <a:lstStyle/>
+          <a:p>
+            <a:pPr algn="ctr"/>
+          </a:p>
+        </p:txBody>
+      </p:sp>
       <p:pic>
         <p:nvPicPr>
-          <p:cNvPr id="7" name="Picture 6" descr="check_steel.png"/>
+          <p:cNvPr id="8" name="Picture 7" descr="check_white.png"/>
           <p:cNvPicPr>
             <a:picLocks noChangeAspect="1"/>
           </p:cNvPicPr>
@@ -4362,8 +5353,8 @@
         </p:blipFill>
         <p:spPr>
           <a:xfrm>
-            <a:off x="987552" y="2542032"/>
-            <a:ext cx="237744" cy="237744"/>
+            <a:off x="1110447" y="2655783"/>
+            <a:ext cx="266273" cy="266273"/>
           </a:xfrm>
           <a:prstGeom prst="rect">
             <a:avLst/>
@@ -4372,14 +5363,14 @@
       </p:pic>
       <p:sp>
         <p:nvSpPr>
-          <p:cNvPr id="8" name="TextBox 7"/>
+          <p:cNvPr id="9" name="TextBox 8"/>
           <p:cNvSpPr txBox="1"/>
           <p:nvPr/>
         </p:nvSpPr>
         <p:spPr>
           <a:xfrm>
-            <a:off x="1353312" y="2395728"/>
-            <a:ext cx="5029200" cy="530352"/>
+            <a:off x="1627632" y="2395728"/>
+            <a:ext cx="4206240" cy="786384"/>
           </a:xfrm>
           <a:prstGeom prst="rect">
             <a:avLst/>
@@ -4404,7 +5395,7 @@
               </a:spcAft>
             </a:pPr>
             <a:r>
-              <a:rPr sz="1200" b="0">
+              <a:rPr sz="1150" b="0">
                 <a:solidFill>
                   <a:srgbClr val="1A1A1A"/>
                 </a:solidFill>
@@ -4417,18 +5408,18 @@
       </p:sp>
       <p:sp>
         <p:nvSpPr>
-          <p:cNvPr id="9" name="Rounded Rectangle 8"/>
+          <p:cNvPr id="10" name="Rounded Rectangle 9"/>
           <p:cNvSpPr/>
           <p:nvPr/>
         </p:nvSpPr>
         <p:spPr>
           <a:xfrm>
-            <a:off x="841248" y="2999232"/>
-            <a:ext cx="5715000" cy="530352"/>
+            <a:off x="6254496" y="2395728"/>
+            <a:ext cx="5138928" cy="786384"/>
           </a:xfrm>
           <a:prstGeom prst="roundRect">
             <a:avLst>
-              <a:gd name="adj" fmla="val 6000"/>
+              <a:gd name="adj" fmla="val 7000"/>
             </a:avLst>
           </a:prstGeom>
           <a:solidFill>
@@ -4463,9 +5454,55 @@
           </a:p>
         </p:txBody>
       </p:sp>
+      <p:sp>
+        <p:nvSpPr>
+          <p:cNvPr id="11" name="Rounded Rectangle 10"/>
+          <p:cNvSpPr/>
+          <p:nvPr/>
+        </p:nvSpPr>
+        <p:spPr>
+          <a:xfrm>
+            <a:off x="6400800" y="2532888"/>
+            <a:ext cx="512064" cy="512064"/>
+          </a:xfrm>
+          <a:prstGeom prst="roundRect">
+            <a:avLst>
+              <a:gd name="adj" fmla="val 26000"/>
+            </a:avLst>
+          </a:prstGeom>
+          <a:solidFill>
+            <a:srgbClr val="EE0000"/>
+          </a:solidFill>
+          <a:ln>
+            <a:noFill/>
+          </a:ln>
+          <a:effectLst/>
+        </p:spPr>
+        <p:style>
+          <a:lnRef idx="1">
+            <a:schemeClr val="accent1"/>
+          </a:lnRef>
+          <a:fillRef idx="3">
+            <a:schemeClr val="accent1"/>
+          </a:fillRef>
+          <a:effectRef idx="2">
+            <a:schemeClr val="accent1"/>
+          </a:effectRef>
+          <a:fontRef idx="minor">
+            <a:schemeClr val="lt1"/>
+          </a:fontRef>
+        </p:style>
+        <p:txBody>
+          <a:bodyPr rtlCol="0" anchor="ctr"/>
+          <a:lstStyle/>
+          <a:p>
+            <a:pPr algn="ctr"/>
+          </a:p>
+        </p:txBody>
+      </p:sp>
       <p:pic>
         <p:nvPicPr>
-          <p:cNvPr id="10" name="Picture 9" descr="check_steel.png"/>
+          <p:cNvPr id="12" name="Picture 11" descr="check_white.png"/>
           <p:cNvPicPr>
             <a:picLocks noChangeAspect="1"/>
           </p:cNvPicPr>
@@ -4479,8 +5516,8 @@
         </p:blipFill>
         <p:spPr>
           <a:xfrm>
-            <a:off x="987552" y="3145536"/>
-            <a:ext cx="237744" cy="237744"/>
+            <a:off x="6523695" y="2655783"/>
+            <a:ext cx="266273" cy="266273"/>
           </a:xfrm>
           <a:prstGeom prst="rect">
             <a:avLst/>
@@ -4489,14 +5526,14 @@
       </p:pic>
       <p:sp>
         <p:nvSpPr>
-          <p:cNvPr id="11" name="TextBox 10"/>
+          <p:cNvPr id="13" name="TextBox 12"/>
           <p:cNvSpPr txBox="1"/>
           <p:nvPr/>
         </p:nvSpPr>
         <p:spPr>
           <a:xfrm>
-            <a:off x="1353312" y="2999232"/>
-            <a:ext cx="5029200" cy="530352"/>
+            <a:off x="7040880" y="2395728"/>
+            <a:ext cx="4206240" cy="786384"/>
           </a:xfrm>
           <a:prstGeom prst="rect">
             <a:avLst/>
@@ -4521,7 +5558,7 @@
               </a:spcAft>
             </a:pPr>
             <a:r>
-              <a:rPr sz="1200" b="0">
+              <a:rPr sz="1150" b="0">
                 <a:solidFill>
                   <a:srgbClr val="1A1A1A"/>
                 </a:solidFill>
@@ -4534,18 +5571,18 @@
       </p:sp>
       <p:sp>
         <p:nvSpPr>
-          <p:cNvPr id="12" name="Rounded Rectangle 11"/>
+          <p:cNvPr id="14" name="Rounded Rectangle 13"/>
           <p:cNvSpPr/>
           <p:nvPr/>
         </p:nvSpPr>
         <p:spPr>
           <a:xfrm>
-            <a:off x="841248" y="3602736"/>
-            <a:ext cx="5715000" cy="530352"/>
+            <a:off x="841248" y="3328416"/>
+            <a:ext cx="5138928" cy="786384"/>
           </a:xfrm>
           <a:prstGeom prst="roundRect">
             <a:avLst>
-              <a:gd name="adj" fmla="val 6000"/>
+              <a:gd name="adj" fmla="val 7000"/>
             </a:avLst>
           </a:prstGeom>
           <a:solidFill>
@@ -4580,9 +5617,55 @@
           </a:p>
         </p:txBody>
       </p:sp>
+      <p:sp>
+        <p:nvSpPr>
+          <p:cNvPr id="15" name="Rounded Rectangle 14"/>
+          <p:cNvSpPr/>
+          <p:nvPr/>
+        </p:nvSpPr>
+        <p:spPr>
+          <a:xfrm>
+            <a:off x="987552" y="3465576"/>
+            <a:ext cx="512064" cy="512064"/>
+          </a:xfrm>
+          <a:prstGeom prst="roundRect">
+            <a:avLst>
+              <a:gd name="adj" fmla="val 26000"/>
+            </a:avLst>
+          </a:prstGeom>
+          <a:solidFill>
+            <a:srgbClr val="EE0000"/>
+          </a:solidFill>
+          <a:ln>
+            <a:noFill/>
+          </a:ln>
+          <a:effectLst/>
+        </p:spPr>
+        <p:style>
+          <a:lnRef idx="1">
+            <a:schemeClr val="accent1"/>
+          </a:lnRef>
+          <a:fillRef idx="3">
+            <a:schemeClr val="accent1"/>
+          </a:fillRef>
+          <a:effectRef idx="2">
+            <a:schemeClr val="accent1"/>
+          </a:effectRef>
+          <a:fontRef idx="minor">
+            <a:schemeClr val="lt1"/>
+          </a:fontRef>
+        </p:style>
+        <p:txBody>
+          <a:bodyPr rtlCol="0" anchor="ctr"/>
+          <a:lstStyle/>
+          <a:p>
+            <a:pPr algn="ctr"/>
+          </a:p>
+        </p:txBody>
+      </p:sp>
       <p:pic>
         <p:nvPicPr>
-          <p:cNvPr id="13" name="Picture 12" descr="check_steel.png"/>
+          <p:cNvPr id="16" name="Picture 15" descr="check_white.png"/>
           <p:cNvPicPr>
             <a:picLocks noChangeAspect="1"/>
           </p:cNvPicPr>
@@ -4596,8 +5679,8 @@
         </p:blipFill>
         <p:spPr>
           <a:xfrm>
-            <a:off x="987552" y="3749040"/>
-            <a:ext cx="237744" cy="237744"/>
+            <a:off x="1110447" y="3588471"/>
+            <a:ext cx="266273" cy="266273"/>
           </a:xfrm>
           <a:prstGeom prst="rect">
             <a:avLst/>
@@ -4606,14 +5689,14 @@
       </p:pic>
       <p:sp>
         <p:nvSpPr>
-          <p:cNvPr id="14" name="TextBox 13"/>
+          <p:cNvPr id="17" name="TextBox 16"/>
           <p:cNvSpPr txBox="1"/>
           <p:nvPr/>
         </p:nvSpPr>
         <p:spPr>
           <a:xfrm>
-            <a:off x="1353312" y="3602736"/>
-            <a:ext cx="5029200" cy="530352"/>
+            <a:off x="1627632" y="3328416"/>
+            <a:ext cx="4206240" cy="786384"/>
           </a:xfrm>
           <a:prstGeom prst="rect">
             <a:avLst/>
@@ -4638,7 +5721,7 @@
               </a:spcAft>
             </a:pPr>
             <a:r>
-              <a:rPr sz="1200" b="0">
+              <a:rPr sz="1150" b="0">
                 <a:solidFill>
                   <a:srgbClr val="1A1A1A"/>
                 </a:solidFill>
@@ -4651,18 +5734,18 @@
       </p:sp>
       <p:sp>
         <p:nvSpPr>
-          <p:cNvPr id="15" name="Rounded Rectangle 14"/>
+          <p:cNvPr id="18" name="Rounded Rectangle 17"/>
           <p:cNvSpPr/>
           <p:nvPr/>
         </p:nvSpPr>
         <p:spPr>
           <a:xfrm>
-            <a:off x="841248" y="4206240"/>
-            <a:ext cx="5715000" cy="530352"/>
+            <a:off x="6254496" y="3328416"/>
+            <a:ext cx="5138928" cy="786384"/>
           </a:xfrm>
           <a:prstGeom prst="roundRect">
             <a:avLst>
-              <a:gd name="adj" fmla="val 6000"/>
+              <a:gd name="adj" fmla="val 7000"/>
             </a:avLst>
           </a:prstGeom>
           <a:solidFill>
@@ -4697,9 +5780,55 @@
           </a:p>
         </p:txBody>
       </p:sp>
+      <p:sp>
+        <p:nvSpPr>
+          <p:cNvPr id="19" name="Rounded Rectangle 18"/>
+          <p:cNvSpPr/>
+          <p:nvPr/>
+        </p:nvSpPr>
+        <p:spPr>
+          <a:xfrm>
+            <a:off x="6400800" y="3465576"/>
+            <a:ext cx="512064" cy="512064"/>
+          </a:xfrm>
+          <a:prstGeom prst="roundRect">
+            <a:avLst>
+              <a:gd name="adj" fmla="val 26000"/>
+            </a:avLst>
+          </a:prstGeom>
+          <a:solidFill>
+            <a:srgbClr val="EE0000"/>
+          </a:solidFill>
+          <a:ln>
+            <a:noFill/>
+          </a:ln>
+          <a:effectLst/>
+        </p:spPr>
+        <p:style>
+          <a:lnRef idx="1">
+            <a:schemeClr val="accent1"/>
+          </a:lnRef>
+          <a:fillRef idx="3">
+            <a:schemeClr val="accent1"/>
+          </a:fillRef>
+          <a:effectRef idx="2">
+            <a:schemeClr val="accent1"/>
+          </a:effectRef>
+          <a:fontRef idx="minor">
+            <a:schemeClr val="lt1"/>
+          </a:fontRef>
+        </p:style>
+        <p:txBody>
+          <a:bodyPr rtlCol="0" anchor="ctr"/>
+          <a:lstStyle/>
+          <a:p>
+            <a:pPr algn="ctr"/>
+          </a:p>
+        </p:txBody>
+      </p:sp>
       <p:pic>
         <p:nvPicPr>
-          <p:cNvPr id="16" name="Picture 15" descr="check_steel.png"/>
+          <p:cNvPr id="20" name="Picture 19" descr="check_white.png"/>
           <p:cNvPicPr>
             <a:picLocks noChangeAspect="1"/>
           </p:cNvPicPr>
@@ -4713,8 +5842,8 @@
         </p:blipFill>
         <p:spPr>
           <a:xfrm>
-            <a:off x="987552" y="4352544"/>
-            <a:ext cx="237744" cy="237744"/>
+            <a:off x="6523695" y="3588471"/>
+            <a:ext cx="266273" cy="266273"/>
           </a:xfrm>
           <a:prstGeom prst="rect">
             <a:avLst/>
@@ -4723,14 +5852,14 @@
       </p:pic>
       <p:sp>
         <p:nvSpPr>
-          <p:cNvPr id="17" name="TextBox 16"/>
+          <p:cNvPr id="21" name="TextBox 20"/>
           <p:cNvSpPr txBox="1"/>
           <p:nvPr/>
         </p:nvSpPr>
         <p:spPr>
           <a:xfrm>
-            <a:off x="1353312" y="4206240"/>
-            <a:ext cx="5029200" cy="530352"/>
+            <a:off x="7040880" y="3328416"/>
+            <a:ext cx="4206240" cy="786384"/>
           </a:xfrm>
           <a:prstGeom prst="rect">
             <a:avLst/>
@@ -4755,7 +5884,7 @@
               </a:spcAft>
             </a:pPr>
             <a:r>
-              <a:rPr sz="1200" b="0">
+              <a:rPr sz="1150" b="0">
                 <a:solidFill>
                   <a:srgbClr val="1A1A1A"/>
                 </a:solidFill>
@@ -4768,18 +5897,18 @@
       </p:sp>
       <p:sp>
         <p:nvSpPr>
-          <p:cNvPr id="18" name="Rounded Rectangle 17"/>
+          <p:cNvPr id="22" name="Rounded Rectangle 21"/>
           <p:cNvSpPr/>
           <p:nvPr/>
         </p:nvSpPr>
         <p:spPr>
           <a:xfrm>
-            <a:off x="841248" y="4809744"/>
-            <a:ext cx="5715000" cy="530352"/>
+            <a:off x="841248" y="4261104"/>
+            <a:ext cx="5138928" cy="786384"/>
           </a:xfrm>
           <a:prstGeom prst="roundRect">
             <a:avLst>
-              <a:gd name="adj" fmla="val 6000"/>
+              <a:gd name="adj" fmla="val 7000"/>
             </a:avLst>
           </a:prstGeom>
           <a:solidFill>
@@ -4814,9 +5943,55 @@
           </a:p>
         </p:txBody>
       </p:sp>
+      <p:sp>
+        <p:nvSpPr>
+          <p:cNvPr id="23" name="Rounded Rectangle 22"/>
+          <p:cNvSpPr/>
+          <p:nvPr/>
+        </p:nvSpPr>
+        <p:spPr>
+          <a:xfrm>
+            <a:off x="987552" y="4398264"/>
+            <a:ext cx="512064" cy="512064"/>
+          </a:xfrm>
+          <a:prstGeom prst="roundRect">
+            <a:avLst>
+              <a:gd name="adj" fmla="val 26000"/>
+            </a:avLst>
+          </a:prstGeom>
+          <a:solidFill>
+            <a:srgbClr val="EE0000"/>
+          </a:solidFill>
+          <a:ln>
+            <a:noFill/>
+          </a:ln>
+          <a:effectLst/>
+        </p:spPr>
+        <p:style>
+          <a:lnRef idx="1">
+            <a:schemeClr val="accent1"/>
+          </a:lnRef>
+          <a:fillRef idx="3">
+            <a:schemeClr val="accent1"/>
+          </a:fillRef>
+          <a:effectRef idx="2">
+            <a:schemeClr val="accent1"/>
+          </a:effectRef>
+          <a:fontRef idx="minor">
+            <a:schemeClr val="lt1"/>
+          </a:fontRef>
+        </p:style>
+        <p:txBody>
+          <a:bodyPr rtlCol="0" anchor="ctr"/>
+          <a:lstStyle/>
+          <a:p>
+            <a:pPr algn="ctr"/>
+          </a:p>
+        </p:txBody>
+      </p:sp>
       <p:pic>
         <p:nvPicPr>
-          <p:cNvPr id="19" name="Picture 18" descr="check_steel.png"/>
+          <p:cNvPr id="24" name="Picture 23" descr="check_white.png"/>
           <p:cNvPicPr>
             <a:picLocks noChangeAspect="1"/>
           </p:cNvPicPr>
@@ -4830,8 +6005,8 @@
         </p:blipFill>
         <p:spPr>
           <a:xfrm>
-            <a:off x="987552" y="4956048"/>
-            <a:ext cx="237744" cy="237744"/>
+            <a:off x="1110447" y="4521159"/>
+            <a:ext cx="266273" cy="266273"/>
           </a:xfrm>
           <a:prstGeom prst="rect">
             <a:avLst/>
@@ -4840,14 +6015,14 @@
       </p:pic>
       <p:sp>
         <p:nvSpPr>
-          <p:cNvPr id="20" name="TextBox 19"/>
+          <p:cNvPr id="25" name="TextBox 24"/>
           <p:cNvSpPr txBox="1"/>
           <p:nvPr/>
         </p:nvSpPr>
         <p:spPr>
           <a:xfrm>
-            <a:off x="1353312" y="4809744"/>
-            <a:ext cx="5029200" cy="530352"/>
+            <a:off x="1627632" y="4261104"/>
+            <a:ext cx="4206240" cy="786384"/>
           </a:xfrm>
           <a:prstGeom prst="rect">
             <a:avLst/>
@@ -4872,221 +6047,13 @@
               </a:spcAft>
             </a:pPr>
             <a:r>
-              <a:rPr sz="1200" b="0">
+              <a:rPr sz="1150" b="0">
                 <a:solidFill>
                   <a:srgbClr val="1A1A1A"/>
                 </a:solidFill>
                 <a:latin typeface="Red Hat Text"/>
               </a:rPr>
               <a:t>Nobody can say what is actually running</a:t>
-            </a:r>
-          </a:p>
-        </p:txBody>
-      </p:sp>
-      <p:sp>
-        <p:nvSpPr>
-          <p:cNvPr id="21" name="Rounded Rectangle 20"/>
-          <p:cNvSpPr/>
-          <p:nvPr/>
-        </p:nvSpPr>
-        <p:spPr>
-          <a:xfrm>
-            <a:off x="6812280" y="2395728"/>
-            <a:ext cx="4538167" cy="2944368"/>
-          </a:xfrm>
-          <a:prstGeom prst="roundRect">
-            <a:avLst>
-              <a:gd name="adj" fmla="val 4000"/>
-            </a:avLst>
-          </a:prstGeom>
-          <a:solidFill>
-            <a:srgbClr val="FFFFFF"/>
-          </a:solidFill>
-          <a:ln w="15240">
-            <a:solidFill>
-              <a:srgbClr val="DDE1E6"/>
-            </a:solidFill>
-          </a:ln>
-          <a:effectLst/>
-        </p:spPr>
-        <p:style>
-          <a:lnRef idx="1">
-            <a:schemeClr val="accent1"/>
-          </a:lnRef>
-          <a:fillRef idx="3">
-            <a:schemeClr val="accent1"/>
-          </a:fillRef>
-          <a:effectRef idx="2">
-            <a:schemeClr val="accent1"/>
-          </a:effectRef>
-          <a:fontRef idx="minor">
-            <a:schemeClr val="lt1"/>
-          </a:fontRef>
-        </p:style>
-        <p:txBody>
-          <a:bodyPr rtlCol="0" anchor="ctr"/>
-          <a:lstStyle/>
-          <a:p>
-            <a:pPr algn="ctr"/>
-          </a:p>
-        </p:txBody>
-      </p:sp>
-      <p:sp>
-        <p:nvSpPr>
-          <p:cNvPr id="22" name="Rounded Rectangle 21"/>
-          <p:cNvSpPr/>
-          <p:nvPr/>
-        </p:nvSpPr>
-        <p:spPr>
-          <a:xfrm>
-            <a:off x="7013448" y="2596896"/>
-            <a:ext cx="1298448" cy="310896"/>
-          </a:xfrm>
-          <a:prstGeom prst="roundRect">
-            <a:avLst>
-              <a:gd name="adj" fmla="val 50000"/>
-            </a:avLst>
-          </a:prstGeom>
-          <a:solidFill>
-            <a:srgbClr val="FCECEC"/>
-          </a:solidFill>
-          <a:ln>
-            <a:noFill/>
-          </a:ln>
-          <a:effectLst/>
-        </p:spPr>
-        <p:style>
-          <a:lnRef idx="1">
-            <a:schemeClr val="accent1"/>
-          </a:lnRef>
-          <a:fillRef idx="3">
-            <a:schemeClr val="accent1"/>
-          </a:fillRef>
-          <a:effectRef idx="2">
-            <a:schemeClr val="accent1"/>
-          </a:effectRef>
-          <a:fontRef idx="minor">
-            <a:schemeClr val="lt1"/>
-          </a:fontRef>
-        </p:style>
-        <p:txBody>
-          <a:bodyPr rtlCol="0" anchor="ctr"/>
-          <a:lstStyle/>
-          <a:p>
-            <a:pPr algn="ctr"/>
-          </a:p>
-        </p:txBody>
-      </p:sp>
-      <p:sp>
-        <p:nvSpPr>
-          <p:cNvPr id="23" name="TextBox 22"/>
-          <p:cNvSpPr txBox="1"/>
-          <p:nvPr/>
-        </p:nvSpPr>
-        <p:spPr>
-          <a:xfrm>
-            <a:off x="7013448" y="2596896"/>
-            <a:ext cx="1298448" cy="310896"/>
-          </a:xfrm>
-          <a:prstGeom prst="rect">
-            <a:avLst/>
-          </a:prstGeom>
-          <a:noFill/>
-        </p:spPr>
-        <p:txBody>
-          <a:bodyPr wrap="none" anchor="ctr" lIns="0" rIns="0" tIns="0" bIns="0">
-            <a:spAutoFit/>
-          </a:bodyPr>
-          <a:lstStyle/>
-          <a:p>
-            <a:pPr algn="ctr">
-              <a:lnSpc>
-                <a:spcPct val="106000"/>
-              </a:lnSpc>
-              <a:spcBef>
-                <a:spcPts val="0"/>
-              </a:spcBef>
-              <a:spcAft>
-                <a:spcPts val="0"/>
-              </a:spcAft>
-            </a:pPr>
-            <a:r>
-              <a:rPr sz="850" b="1">
-                <a:solidFill>
-                  <a:srgbClr val="B80000"/>
-                </a:solidFill>
-                <a:latin typeface="Red Hat Display"/>
-              </a:rPr>
-              <a:t>MEDIA PASS</a:t>
-            </a:r>
-          </a:p>
-        </p:txBody>
-      </p:sp>
-      <p:pic>
-        <p:nvPicPr>
-          <p:cNvPr id="24" name="Picture 23" descr="eye_slate.png"/>
-          <p:cNvPicPr>
-            <a:picLocks noChangeAspect="1"/>
-          </p:cNvPicPr>
-          <p:nvPr/>
-        </p:nvPicPr>
-        <p:blipFill>
-          <a:blip r:embed="rId4"/>
-          <a:stretch>
-            <a:fillRect/>
-          </a:stretch>
-        </p:blipFill>
-        <p:spPr>
-          <a:xfrm>
-            <a:off x="8843619" y="3108960"/>
-            <a:ext cx="475488" cy="475488"/>
-          </a:xfrm>
-          <a:prstGeom prst="rect">
-            <a:avLst/>
-          </a:prstGeom>
-        </p:spPr>
-      </p:pic>
-      <p:sp>
-        <p:nvSpPr>
-          <p:cNvPr id="25" name="TextBox 24"/>
-          <p:cNvSpPr txBox="1"/>
-          <p:nvPr/>
-        </p:nvSpPr>
-        <p:spPr>
-          <a:xfrm>
-            <a:off x="7050024" y="3721608"/>
-            <a:ext cx="4062679" cy="1481328"/>
-          </a:xfrm>
-          <a:prstGeom prst="rect">
-            <a:avLst/>
-          </a:prstGeom>
-          <a:noFill/>
-        </p:spPr>
-        <p:txBody>
-          <a:bodyPr wrap="square" anchor="t" lIns="0" rIns="0" tIns="0" bIns="0">
-            <a:spAutoFit/>
-          </a:bodyPr>
-          <a:lstStyle/>
-          <a:p>
-            <a:pPr algn="l">
-              <a:lnSpc>
-                <a:spcPct val="120000"/>
-              </a:lnSpc>
-              <a:spcBef>
-                <a:spcPts val="0"/>
-              </a:spcBef>
-              <a:spcAft>
-                <a:spcPts val="0"/>
-              </a:spcAft>
-            </a:pPr>
-            <a:r>
-              <a:rPr sz="950" b="0">
-                <a:solidFill>
-                  <a:srgbClr val="8A9099"/>
-                </a:solidFill>
-                <a:latin typeface="Red Hat Text"/>
-              </a:rPr>
-              <a:t>A "Git repo (base + overlays)" box and a "live cluster" box that have visibly diverged (red mismatch), with a question mark over the cluster.</a:t>
             </a:r>
           </a:p>
         </p:txBody>
@@ -5439,11 +6406,11 @@
         <p:spPr>
           <a:xfrm>
             <a:off x="841248" y="2670048"/>
-            <a:ext cx="5715000" cy="530352"/>
+            <a:ext cx="5138928" cy="786384"/>
           </a:xfrm>
           <a:prstGeom prst="roundRect">
             <a:avLst>
-              <a:gd name="adj" fmla="val 6000"/>
+              <a:gd name="adj" fmla="val 7000"/>
             </a:avLst>
           </a:prstGeom>
           <a:solidFill>
@@ -5478,9 +6445,55 @@
           </a:p>
         </p:txBody>
       </p:sp>
+      <p:sp>
+        <p:nvSpPr>
+          <p:cNvPr id="8" name="Rounded Rectangle 7"/>
+          <p:cNvSpPr/>
+          <p:nvPr/>
+        </p:nvSpPr>
+        <p:spPr>
+          <a:xfrm>
+            <a:off x="987552" y="2807208"/>
+            <a:ext cx="512064" cy="512064"/>
+          </a:xfrm>
+          <a:prstGeom prst="roundRect">
+            <a:avLst>
+              <a:gd name="adj" fmla="val 26000"/>
+            </a:avLst>
+          </a:prstGeom>
+          <a:solidFill>
+            <a:srgbClr val="EE0000"/>
+          </a:solidFill>
+          <a:ln>
+            <a:noFill/>
+          </a:ln>
+          <a:effectLst/>
+        </p:spPr>
+        <p:style>
+          <a:lnRef idx="1">
+            <a:schemeClr val="accent1"/>
+          </a:lnRef>
+          <a:fillRef idx="3">
+            <a:schemeClr val="accent1"/>
+          </a:fillRef>
+          <a:effectRef idx="2">
+            <a:schemeClr val="accent1"/>
+          </a:effectRef>
+          <a:fontRef idx="minor">
+            <a:schemeClr val="lt1"/>
+          </a:fontRef>
+        </p:style>
+        <p:txBody>
+          <a:bodyPr rtlCol="0" anchor="ctr"/>
+          <a:lstStyle/>
+          <a:p>
+            <a:pPr algn="ctr"/>
+          </a:p>
+        </p:txBody>
+      </p:sp>
       <p:pic>
         <p:nvPicPr>
-          <p:cNvPr id="8" name="Picture 7" descr="check_steel.png"/>
+          <p:cNvPr id="9" name="Picture 8" descr="check_white.png"/>
           <p:cNvPicPr>
             <a:picLocks noChangeAspect="1"/>
           </p:cNvPicPr>
@@ -5494,8 +6507,8 @@
         </p:blipFill>
         <p:spPr>
           <a:xfrm>
-            <a:off x="987552" y="2816352"/>
-            <a:ext cx="237744" cy="237744"/>
+            <a:off x="1110447" y="2930103"/>
+            <a:ext cx="266273" cy="266273"/>
           </a:xfrm>
           <a:prstGeom prst="rect">
             <a:avLst/>
@@ -5504,14 +6517,14 @@
       </p:pic>
       <p:sp>
         <p:nvSpPr>
-          <p:cNvPr id="9" name="TextBox 8"/>
+          <p:cNvPr id="10" name="TextBox 9"/>
           <p:cNvSpPr txBox="1"/>
           <p:nvPr/>
         </p:nvSpPr>
         <p:spPr>
           <a:xfrm>
-            <a:off x="1353312" y="2670048"/>
-            <a:ext cx="5029200" cy="530352"/>
+            <a:off x="1627632" y="2670048"/>
+            <a:ext cx="4206240" cy="786384"/>
           </a:xfrm>
           <a:prstGeom prst="rect">
             <a:avLst/>
@@ -5536,7 +6549,7 @@
               </a:spcAft>
             </a:pPr>
             <a:r>
-              <a:rPr sz="1200" b="0">
+              <a:rPr sz="1150" b="0">
                 <a:solidFill>
                   <a:srgbClr val="1A1A1A"/>
                 </a:solidFill>
@@ -5549,18 +6562,18 @@
       </p:sp>
       <p:sp>
         <p:nvSpPr>
-          <p:cNvPr id="10" name="Rounded Rectangle 9"/>
+          <p:cNvPr id="11" name="Rounded Rectangle 10"/>
           <p:cNvSpPr/>
           <p:nvPr/>
         </p:nvSpPr>
         <p:spPr>
           <a:xfrm>
-            <a:off x="841248" y="3273552"/>
-            <a:ext cx="5715000" cy="530352"/>
+            <a:off x="6254496" y="2670048"/>
+            <a:ext cx="5138928" cy="786384"/>
           </a:xfrm>
           <a:prstGeom prst="roundRect">
             <a:avLst>
-              <a:gd name="adj" fmla="val 6000"/>
+              <a:gd name="adj" fmla="val 7000"/>
             </a:avLst>
           </a:prstGeom>
           <a:solidFill>
@@ -5595,9 +6608,55 @@
           </a:p>
         </p:txBody>
       </p:sp>
+      <p:sp>
+        <p:nvSpPr>
+          <p:cNvPr id="12" name="Rounded Rectangle 11"/>
+          <p:cNvSpPr/>
+          <p:nvPr/>
+        </p:nvSpPr>
+        <p:spPr>
+          <a:xfrm>
+            <a:off x="6400800" y="2807208"/>
+            <a:ext cx="512064" cy="512064"/>
+          </a:xfrm>
+          <a:prstGeom prst="roundRect">
+            <a:avLst>
+              <a:gd name="adj" fmla="val 26000"/>
+            </a:avLst>
+          </a:prstGeom>
+          <a:solidFill>
+            <a:srgbClr val="EE0000"/>
+          </a:solidFill>
+          <a:ln>
+            <a:noFill/>
+          </a:ln>
+          <a:effectLst/>
+        </p:spPr>
+        <p:style>
+          <a:lnRef idx="1">
+            <a:schemeClr val="accent1"/>
+          </a:lnRef>
+          <a:fillRef idx="3">
+            <a:schemeClr val="accent1"/>
+          </a:fillRef>
+          <a:effectRef idx="2">
+            <a:schemeClr val="accent1"/>
+          </a:effectRef>
+          <a:fontRef idx="minor">
+            <a:schemeClr val="lt1"/>
+          </a:fontRef>
+        </p:style>
+        <p:txBody>
+          <a:bodyPr rtlCol="0" anchor="ctr"/>
+          <a:lstStyle/>
+          <a:p>
+            <a:pPr algn="ctr"/>
+          </a:p>
+        </p:txBody>
+      </p:sp>
       <p:pic>
         <p:nvPicPr>
-          <p:cNvPr id="11" name="Picture 10" descr="check_steel.png"/>
+          <p:cNvPr id="13" name="Picture 12" descr="check_white.png"/>
           <p:cNvPicPr>
             <a:picLocks noChangeAspect="1"/>
           </p:cNvPicPr>
@@ -5611,8 +6670,8 @@
         </p:blipFill>
         <p:spPr>
           <a:xfrm>
-            <a:off x="987552" y="3419856"/>
-            <a:ext cx="237744" cy="237744"/>
+            <a:off x="6523695" y="2930103"/>
+            <a:ext cx="266273" cy="266273"/>
           </a:xfrm>
           <a:prstGeom prst="rect">
             <a:avLst/>
@@ -5621,14 +6680,14 @@
       </p:pic>
       <p:sp>
         <p:nvSpPr>
-          <p:cNvPr id="12" name="TextBox 11"/>
+          <p:cNvPr id="14" name="TextBox 13"/>
           <p:cNvSpPr txBox="1"/>
           <p:nvPr/>
         </p:nvSpPr>
         <p:spPr>
           <a:xfrm>
-            <a:off x="1353312" y="3273552"/>
-            <a:ext cx="5029200" cy="530352"/>
+            <a:off x="7040880" y="2670048"/>
+            <a:ext cx="4206240" cy="786384"/>
           </a:xfrm>
           <a:prstGeom prst="rect">
             <a:avLst/>
@@ -5653,7 +6712,7 @@
               </a:spcAft>
             </a:pPr>
             <a:r>
-              <a:rPr sz="1200" b="0">
+              <a:rPr sz="1150" b="0">
                 <a:solidFill>
                   <a:srgbClr val="1A1A1A"/>
                 </a:solidFill>
@@ -5666,18 +6725,18 @@
       </p:sp>
       <p:sp>
         <p:nvSpPr>
-          <p:cNvPr id="13" name="Rounded Rectangle 12"/>
+          <p:cNvPr id="15" name="Rounded Rectangle 14"/>
           <p:cNvSpPr/>
           <p:nvPr/>
         </p:nvSpPr>
         <p:spPr>
           <a:xfrm>
-            <a:off x="841248" y="3877056"/>
-            <a:ext cx="5715000" cy="530352"/>
+            <a:off x="841248" y="3602736"/>
+            <a:ext cx="5138928" cy="786384"/>
           </a:xfrm>
           <a:prstGeom prst="roundRect">
             <a:avLst>
-              <a:gd name="adj" fmla="val 6000"/>
+              <a:gd name="adj" fmla="val 7000"/>
             </a:avLst>
           </a:prstGeom>
           <a:solidFill>
@@ -5712,9 +6771,55 @@
           </a:p>
         </p:txBody>
       </p:sp>
+      <p:sp>
+        <p:nvSpPr>
+          <p:cNvPr id="16" name="Rounded Rectangle 15"/>
+          <p:cNvSpPr/>
+          <p:nvPr/>
+        </p:nvSpPr>
+        <p:spPr>
+          <a:xfrm>
+            <a:off x="987552" y="3739896"/>
+            <a:ext cx="512064" cy="512064"/>
+          </a:xfrm>
+          <a:prstGeom prst="roundRect">
+            <a:avLst>
+              <a:gd name="adj" fmla="val 26000"/>
+            </a:avLst>
+          </a:prstGeom>
+          <a:solidFill>
+            <a:srgbClr val="EE0000"/>
+          </a:solidFill>
+          <a:ln>
+            <a:noFill/>
+          </a:ln>
+          <a:effectLst/>
+        </p:spPr>
+        <p:style>
+          <a:lnRef idx="1">
+            <a:schemeClr val="accent1"/>
+          </a:lnRef>
+          <a:fillRef idx="3">
+            <a:schemeClr val="accent1"/>
+          </a:fillRef>
+          <a:effectRef idx="2">
+            <a:schemeClr val="accent1"/>
+          </a:effectRef>
+          <a:fontRef idx="minor">
+            <a:schemeClr val="lt1"/>
+          </a:fontRef>
+        </p:style>
+        <p:txBody>
+          <a:bodyPr rtlCol="0" anchor="ctr"/>
+          <a:lstStyle/>
+          <a:p>
+            <a:pPr algn="ctr"/>
+          </a:p>
+        </p:txBody>
+      </p:sp>
       <p:pic>
         <p:nvPicPr>
-          <p:cNvPr id="14" name="Picture 13" descr="check_steel.png"/>
+          <p:cNvPr id="17" name="Picture 16" descr="check_white.png"/>
           <p:cNvPicPr>
             <a:picLocks noChangeAspect="1"/>
           </p:cNvPicPr>
@@ -5728,8 +6833,8 @@
         </p:blipFill>
         <p:spPr>
           <a:xfrm>
-            <a:off x="987552" y="4023360"/>
-            <a:ext cx="237744" cy="237744"/>
+            <a:off x="1110447" y="3862791"/>
+            <a:ext cx="266273" cy="266273"/>
           </a:xfrm>
           <a:prstGeom prst="rect">
             <a:avLst/>
@@ -5738,14 +6843,14 @@
       </p:pic>
       <p:sp>
         <p:nvSpPr>
-          <p:cNvPr id="15" name="TextBox 14"/>
+          <p:cNvPr id="18" name="TextBox 17"/>
           <p:cNvSpPr txBox="1"/>
           <p:nvPr/>
         </p:nvSpPr>
         <p:spPr>
           <a:xfrm>
-            <a:off x="1353312" y="3877056"/>
-            <a:ext cx="5029200" cy="530352"/>
+            <a:off x="1627632" y="3602736"/>
+            <a:ext cx="4206240" cy="786384"/>
           </a:xfrm>
           <a:prstGeom prst="rect">
             <a:avLst/>
@@ -5770,7 +6875,7 @@
               </a:spcAft>
             </a:pPr>
             <a:r>
-              <a:rPr sz="1200" b="0">
+              <a:rPr sz="1150" b="0">
                 <a:solidFill>
                   <a:srgbClr val="1A1A1A"/>
                 </a:solidFill>
@@ -5783,18 +6888,18 @@
       </p:sp>
       <p:sp>
         <p:nvSpPr>
-          <p:cNvPr id="16" name="Rounded Rectangle 15"/>
+          <p:cNvPr id="19" name="Rounded Rectangle 18"/>
           <p:cNvSpPr/>
           <p:nvPr/>
         </p:nvSpPr>
         <p:spPr>
           <a:xfrm>
-            <a:off x="841248" y="4480560"/>
-            <a:ext cx="5715000" cy="530352"/>
+            <a:off x="6254496" y="3602736"/>
+            <a:ext cx="5138928" cy="786384"/>
           </a:xfrm>
           <a:prstGeom prst="roundRect">
             <a:avLst>
-              <a:gd name="adj" fmla="val 6000"/>
+              <a:gd name="adj" fmla="val 7000"/>
             </a:avLst>
           </a:prstGeom>
           <a:solidFill>
@@ -5829,9 +6934,55 @@
           </a:p>
         </p:txBody>
       </p:sp>
+      <p:sp>
+        <p:nvSpPr>
+          <p:cNvPr id="20" name="Rounded Rectangle 19"/>
+          <p:cNvSpPr/>
+          <p:nvPr/>
+        </p:nvSpPr>
+        <p:spPr>
+          <a:xfrm>
+            <a:off x="6400800" y="3739896"/>
+            <a:ext cx="512064" cy="512064"/>
+          </a:xfrm>
+          <a:prstGeom prst="roundRect">
+            <a:avLst>
+              <a:gd name="adj" fmla="val 26000"/>
+            </a:avLst>
+          </a:prstGeom>
+          <a:solidFill>
+            <a:srgbClr val="EE0000"/>
+          </a:solidFill>
+          <a:ln>
+            <a:noFill/>
+          </a:ln>
+          <a:effectLst/>
+        </p:spPr>
+        <p:style>
+          <a:lnRef idx="1">
+            <a:schemeClr val="accent1"/>
+          </a:lnRef>
+          <a:fillRef idx="3">
+            <a:schemeClr val="accent1"/>
+          </a:fillRef>
+          <a:effectRef idx="2">
+            <a:schemeClr val="accent1"/>
+          </a:effectRef>
+          <a:fontRef idx="minor">
+            <a:schemeClr val="lt1"/>
+          </a:fontRef>
+        </p:style>
+        <p:txBody>
+          <a:bodyPr rtlCol="0" anchor="ctr"/>
+          <a:lstStyle/>
+          <a:p>
+            <a:pPr algn="ctr"/>
+          </a:p>
+        </p:txBody>
+      </p:sp>
       <p:pic>
         <p:nvPicPr>
-          <p:cNvPr id="17" name="Picture 16" descr="check_steel.png"/>
+          <p:cNvPr id="21" name="Picture 20" descr="check_white.png"/>
           <p:cNvPicPr>
             <a:picLocks noChangeAspect="1"/>
           </p:cNvPicPr>
@@ -5845,8 +6996,8 @@
         </p:blipFill>
         <p:spPr>
           <a:xfrm>
-            <a:off x="987552" y="4626864"/>
-            <a:ext cx="237744" cy="237744"/>
+            <a:off x="6523695" y="3862791"/>
+            <a:ext cx="266273" cy="266273"/>
           </a:xfrm>
           <a:prstGeom prst="rect">
             <a:avLst/>
@@ -5855,14 +7006,14 @@
       </p:pic>
       <p:sp>
         <p:nvSpPr>
-          <p:cNvPr id="18" name="TextBox 17"/>
+          <p:cNvPr id="22" name="TextBox 21"/>
           <p:cNvSpPr txBox="1"/>
           <p:nvPr/>
         </p:nvSpPr>
         <p:spPr>
           <a:xfrm>
-            <a:off x="1353312" y="4480560"/>
-            <a:ext cx="5029200" cy="530352"/>
+            <a:off x="7040880" y="3602736"/>
+            <a:ext cx="4206240" cy="786384"/>
           </a:xfrm>
           <a:prstGeom prst="rect">
             <a:avLst/>
@@ -5887,7 +7038,7 @@
               </a:spcAft>
             </a:pPr>
             <a:r>
-              <a:rPr sz="1200" b="0">
+              <a:rPr sz="1150" b="0">
                 <a:solidFill>
                   <a:srgbClr val="1A1A1A"/>
                 </a:solidFill>
@@ -5900,18 +7051,18 @@
       </p:sp>
       <p:sp>
         <p:nvSpPr>
-          <p:cNvPr id="19" name="Rounded Rectangle 18"/>
+          <p:cNvPr id="23" name="Rounded Rectangle 22"/>
           <p:cNvSpPr/>
           <p:nvPr/>
         </p:nvSpPr>
         <p:spPr>
           <a:xfrm>
-            <a:off x="841248" y="5084064"/>
-            <a:ext cx="5715000" cy="530352"/>
+            <a:off x="841248" y="4535424"/>
+            <a:ext cx="5138928" cy="786384"/>
           </a:xfrm>
           <a:prstGeom prst="roundRect">
             <a:avLst>
-              <a:gd name="adj" fmla="val 6000"/>
+              <a:gd name="adj" fmla="val 7000"/>
             </a:avLst>
           </a:prstGeom>
           <a:solidFill>
@@ -5946,9 +7097,55 @@
           </a:p>
         </p:txBody>
       </p:sp>
+      <p:sp>
+        <p:nvSpPr>
+          <p:cNvPr id="24" name="Rounded Rectangle 23"/>
+          <p:cNvSpPr/>
+          <p:nvPr/>
+        </p:nvSpPr>
+        <p:spPr>
+          <a:xfrm>
+            <a:off x="987552" y="4672584"/>
+            <a:ext cx="512064" cy="512064"/>
+          </a:xfrm>
+          <a:prstGeom prst="roundRect">
+            <a:avLst>
+              <a:gd name="adj" fmla="val 26000"/>
+            </a:avLst>
+          </a:prstGeom>
+          <a:solidFill>
+            <a:srgbClr val="EE0000"/>
+          </a:solidFill>
+          <a:ln>
+            <a:noFill/>
+          </a:ln>
+          <a:effectLst/>
+        </p:spPr>
+        <p:style>
+          <a:lnRef idx="1">
+            <a:schemeClr val="accent1"/>
+          </a:lnRef>
+          <a:fillRef idx="3">
+            <a:schemeClr val="accent1"/>
+          </a:fillRef>
+          <a:effectRef idx="2">
+            <a:schemeClr val="accent1"/>
+          </a:effectRef>
+          <a:fontRef idx="minor">
+            <a:schemeClr val="lt1"/>
+          </a:fontRef>
+        </p:style>
+        <p:txBody>
+          <a:bodyPr rtlCol="0" anchor="ctr"/>
+          <a:lstStyle/>
+          <a:p>
+            <a:pPr algn="ctr"/>
+          </a:p>
+        </p:txBody>
+      </p:sp>
       <p:pic>
         <p:nvPicPr>
-          <p:cNvPr id="20" name="Picture 19" descr="check_steel.png"/>
+          <p:cNvPr id="25" name="Picture 24" descr="check_white.png"/>
           <p:cNvPicPr>
             <a:picLocks noChangeAspect="1"/>
           </p:cNvPicPr>
@@ -5962,8 +7159,8 @@
         </p:blipFill>
         <p:spPr>
           <a:xfrm>
-            <a:off x="987552" y="5230368"/>
-            <a:ext cx="237744" cy="237744"/>
+            <a:off x="1110447" y="4795479"/>
+            <a:ext cx="266273" cy="266273"/>
           </a:xfrm>
           <a:prstGeom prst="rect">
             <a:avLst/>
@@ -5972,14 +7169,14 @@
       </p:pic>
       <p:sp>
         <p:nvSpPr>
-          <p:cNvPr id="21" name="TextBox 20"/>
+          <p:cNvPr id="26" name="TextBox 25"/>
           <p:cNvSpPr txBox="1"/>
           <p:nvPr/>
         </p:nvSpPr>
         <p:spPr>
           <a:xfrm>
-            <a:off x="1353312" y="5084064"/>
-            <a:ext cx="5029200" cy="530352"/>
+            <a:off x="1627632" y="4535424"/>
+            <a:ext cx="4206240" cy="786384"/>
           </a:xfrm>
           <a:prstGeom prst="rect">
             <a:avLst/>
@@ -6004,221 +7201,13 @@
               </a:spcAft>
             </a:pPr>
             <a:r>
-              <a:rPr sz="1200" b="0">
+              <a:rPr sz="1150" b="0">
                 <a:solidFill>
                   <a:srgbClr val="1A1A1A"/>
                 </a:solidFill>
                 <a:latin typeface="Red Hat Text"/>
               </a:rPr>
               <a:t>Pull is what "GitOps" means</a:t>
-            </a:r>
-          </a:p>
-        </p:txBody>
-      </p:sp>
-      <p:sp>
-        <p:nvSpPr>
-          <p:cNvPr id="22" name="Rounded Rectangle 21"/>
-          <p:cNvSpPr/>
-          <p:nvPr/>
-        </p:nvSpPr>
-        <p:spPr>
-          <a:xfrm>
-            <a:off x="6812280" y="2670048"/>
-            <a:ext cx="4538167" cy="2944368"/>
-          </a:xfrm>
-          <a:prstGeom prst="roundRect">
-            <a:avLst>
-              <a:gd name="adj" fmla="val 4000"/>
-            </a:avLst>
-          </a:prstGeom>
-          <a:solidFill>
-            <a:srgbClr val="FFFFFF"/>
-          </a:solidFill>
-          <a:ln w="15240">
-            <a:solidFill>
-              <a:srgbClr val="DDE1E6"/>
-            </a:solidFill>
-          </a:ln>
-          <a:effectLst/>
-        </p:spPr>
-        <p:style>
-          <a:lnRef idx="1">
-            <a:schemeClr val="accent1"/>
-          </a:lnRef>
-          <a:fillRef idx="3">
-            <a:schemeClr val="accent1"/>
-          </a:fillRef>
-          <a:effectRef idx="2">
-            <a:schemeClr val="accent1"/>
-          </a:effectRef>
-          <a:fontRef idx="minor">
-            <a:schemeClr val="lt1"/>
-          </a:fontRef>
-        </p:style>
-        <p:txBody>
-          <a:bodyPr rtlCol="0" anchor="ctr"/>
-          <a:lstStyle/>
-          <a:p>
-            <a:pPr algn="ctr"/>
-          </a:p>
-        </p:txBody>
-      </p:sp>
-      <p:sp>
-        <p:nvSpPr>
-          <p:cNvPr id="23" name="Rounded Rectangle 22"/>
-          <p:cNvSpPr/>
-          <p:nvPr/>
-        </p:nvSpPr>
-        <p:spPr>
-          <a:xfrm>
-            <a:off x="7013448" y="2871216"/>
-            <a:ext cx="1298448" cy="310896"/>
-          </a:xfrm>
-          <a:prstGeom prst="roundRect">
-            <a:avLst>
-              <a:gd name="adj" fmla="val 50000"/>
-            </a:avLst>
-          </a:prstGeom>
-          <a:solidFill>
-            <a:srgbClr val="FCECEC"/>
-          </a:solidFill>
-          <a:ln>
-            <a:noFill/>
-          </a:ln>
-          <a:effectLst/>
-        </p:spPr>
-        <p:style>
-          <a:lnRef idx="1">
-            <a:schemeClr val="accent1"/>
-          </a:lnRef>
-          <a:fillRef idx="3">
-            <a:schemeClr val="accent1"/>
-          </a:fillRef>
-          <a:effectRef idx="2">
-            <a:schemeClr val="accent1"/>
-          </a:effectRef>
-          <a:fontRef idx="minor">
-            <a:schemeClr val="lt1"/>
-          </a:fontRef>
-        </p:style>
-        <p:txBody>
-          <a:bodyPr rtlCol="0" anchor="ctr"/>
-          <a:lstStyle/>
-          <a:p>
-            <a:pPr algn="ctr"/>
-          </a:p>
-        </p:txBody>
-      </p:sp>
-      <p:sp>
-        <p:nvSpPr>
-          <p:cNvPr id="24" name="TextBox 23"/>
-          <p:cNvSpPr txBox="1"/>
-          <p:nvPr/>
-        </p:nvSpPr>
-        <p:spPr>
-          <a:xfrm>
-            <a:off x="7013448" y="2871216"/>
-            <a:ext cx="1298448" cy="310896"/>
-          </a:xfrm>
-          <a:prstGeom prst="rect">
-            <a:avLst/>
-          </a:prstGeom>
-          <a:noFill/>
-        </p:spPr>
-        <p:txBody>
-          <a:bodyPr wrap="none" anchor="ctr" lIns="0" rIns="0" tIns="0" bIns="0">
-            <a:spAutoFit/>
-          </a:bodyPr>
-          <a:lstStyle/>
-          <a:p>
-            <a:pPr algn="ctr">
-              <a:lnSpc>
-                <a:spcPct val="106000"/>
-              </a:lnSpc>
-              <a:spcBef>
-                <a:spcPts val="0"/>
-              </a:spcBef>
-              <a:spcAft>
-                <a:spcPts val="0"/>
-              </a:spcAft>
-            </a:pPr>
-            <a:r>
-              <a:rPr sz="850" b="1">
-                <a:solidFill>
-                  <a:srgbClr val="B80000"/>
-                </a:solidFill>
-                <a:latin typeface="Red Hat Display"/>
-              </a:rPr>
-              <a:t>MEDIA PASS</a:t>
-            </a:r>
-          </a:p>
-        </p:txBody>
-      </p:sp>
-      <p:pic>
-        <p:nvPicPr>
-          <p:cNvPr id="25" name="Picture 24" descr="eye_slate.png"/>
-          <p:cNvPicPr>
-            <a:picLocks noChangeAspect="1"/>
-          </p:cNvPicPr>
-          <p:nvPr/>
-        </p:nvPicPr>
-        <p:blipFill>
-          <a:blip r:embed="rId4"/>
-          <a:stretch>
-            <a:fillRect/>
-          </a:stretch>
-        </p:blipFill>
-        <p:spPr>
-          <a:xfrm>
-            <a:off x="8843619" y="3383280"/>
-            <a:ext cx="475488" cy="475488"/>
-          </a:xfrm>
-          <a:prstGeom prst="rect">
-            <a:avLst/>
-          </a:prstGeom>
-        </p:spPr>
-      </p:pic>
-      <p:sp>
-        <p:nvSpPr>
-          <p:cNvPr id="26" name="TextBox 25"/>
-          <p:cNvSpPr txBox="1"/>
-          <p:nvPr/>
-        </p:nvSpPr>
-        <p:spPr>
-          <a:xfrm>
-            <a:off x="7050024" y="3995928"/>
-            <a:ext cx="4062679" cy="1481328"/>
-          </a:xfrm>
-          <a:prstGeom prst="rect">
-            <a:avLst/>
-          </a:prstGeom>
-          <a:noFill/>
-        </p:spPr>
-        <p:txBody>
-          <a:bodyPr wrap="square" anchor="t" lIns="0" rIns="0" tIns="0" bIns="0">
-            <a:spAutoFit/>
-          </a:bodyPr>
-          <a:lstStyle/>
-          <a:p>
-            <a:pPr algn="l">
-              <a:lnSpc>
-                <a:spcPct val="120000"/>
-              </a:lnSpc>
-              <a:spcBef>
-                <a:spcPts val="0"/>
-              </a:spcBef>
-              <a:spcAft>
-                <a:spcPts val="0"/>
-              </a:spcAft>
-            </a:pPr>
-            <a:r>
-              <a:rPr sz="950" b="0">
-                <a:solidFill>
-                  <a:srgbClr val="8A9099"/>
-                </a:solidFill>
-                <a:latin typeface="Red Hat Text"/>
-              </a:rPr>
-              <a:t>Concept diagram gitops-fundamentals-01-push-vs-pull — CI pushing into a namespace (blue) vs a controller in the cluster pulling from Git and reconciling (green).</a:t>
             </a:r>
           </a:p>
         </p:txBody>
@@ -6526,11 +7515,11 @@
         <p:spPr>
           <a:xfrm>
             <a:off x="841248" y="2395728"/>
-            <a:ext cx="5715000" cy="530352"/>
+            <a:ext cx="5138928" cy="786384"/>
           </a:xfrm>
           <a:prstGeom prst="roundRect">
             <a:avLst>
-              <a:gd name="adj" fmla="val 6000"/>
+              <a:gd name="adj" fmla="val 7000"/>
             </a:avLst>
           </a:prstGeom>
           <a:solidFill>
@@ -6565,9 +7554,55 @@
           </a:p>
         </p:txBody>
       </p:sp>
+      <p:sp>
+        <p:nvSpPr>
+          <p:cNvPr id="7" name="Rounded Rectangle 6"/>
+          <p:cNvSpPr/>
+          <p:nvPr/>
+        </p:nvSpPr>
+        <p:spPr>
+          <a:xfrm>
+            <a:off x="987552" y="2532888"/>
+            <a:ext cx="512064" cy="512064"/>
+          </a:xfrm>
+          <a:prstGeom prst="roundRect">
+            <a:avLst>
+              <a:gd name="adj" fmla="val 26000"/>
+            </a:avLst>
+          </a:prstGeom>
+          <a:solidFill>
+            <a:srgbClr val="EE0000"/>
+          </a:solidFill>
+          <a:ln>
+            <a:noFill/>
+          </a:ln>
+          <a:effectLst/>
+        </p:spPr>
+        <p:style>
+          <a:lnRef idx="1">
+            <a:schemeClr val="accent1"/>
+          </a:lnRef>
+          <a:fillRef idx="3">
+            <a:schemeClr val="accent1"/>
+          </a:fillRef>
+          <a:effectRef idx="2">
+            <a:schemeClr val="accent1"/>
+          </a:effectRef>
+          <a:fontRef idx="minor">
+            <a:schemeClr val="lt1"/>
+          </a:fontRef>
+        </p:style>
+        <p:txBody>
+          <a:bodyPr rtlCol="0" anchor="ctr"/>
+          <a:lstStyle/>
+          <a:p>
+            <a:pPr algn="ctr"/>
+          </a:p>
+        </p:txBody>
+      </p:sp>
       <p:pic>
         <p:nvPicPr>
-          <p:cNvPr id="7" name="Picture 6" descr="check_steel.png"/>
+          <p:cNvPr id="8" name="Picture 7" descr="check_white.png"/>
           <p:cNvPicPr>
             <a:picLocks noChangeAspect="1"/>
           </p:cNvPicPr>
@@ -6581,8 +7616,8 @@
         </p:blipFill>
         <p:spPr>
           <a:xfrm>
-            <a:off x="987552" y="2542032"/>
-            <a:ext cx="237744" cy="237744"/>
+            <a:off x="1110447" y="2655783"/>
+            <a:ext cx="266273" cy="266273"/>
           </a:xfrm>
           <a:prstGeom prst="rect">
             <a:avLst/>
@@ -6591,14 +7626,14 @@
       </p:pic>
       <p:sp>
         <p:nvSpPr>
-          <p:cNvPr id="8" name="TextBox 7"/>
+          <p:cNvPr id="9" name="TextBox 8"/>
           <p:cNvSpPr txBox="1"/>
           <p:nvPr/>
         </p:nvSpPr>
         <p:spPr>
           <a:xfrm>
-            <a:off x="1353312" y="2395728"/>
-            <a:ext cx="5029200" cy="530352"/>
+            <a:off x="1627632" y="2395728"/>
+            <a:ext cx="4206240" cy="786384"/>
           </a:xfrm>
           <a:prstGeom prst="rect">
             <a:avLst/>
@@ -6623,7 +7658,7 @@
               </a:spcAft>
             </a:pPr>
             <a:r>
-              <a:rPr sz="1200" b="0">
+              <a:rPr sz="1150" b="0">
                 <a:solidFill>
                   <a:srgbClr val="1A1A1A"/>
                 </a:solidFill>
@@ -6636,18 +7671,18 @@
       </p:sp>
       <p:sp>
         <p:nvSpPr>
-          <p:cNvPr id="9" name="Rounded Rectangle 8"/>
+          <p:cNvPr id="10" name="Rounded Rectangle 9"/>
           <p:cNvSpPr/>
           <p:nvPr/>
         </p:nvSpPr>
         <p:spPr>
           <a:xfrm>
-            <a:off x="841248" y="2999232"/>
-            <a:ext cx="5715000" cy="530352"/>
+            <a:off x="6254496" y="2395728"/>
+            <a:ext cx="5138928" cy="786384"/>
           </a:xfrm>
           <a:prstGeom prst="roundRect">
             <a:avLst>
-              <a:gd name="adj" fmla="val 6000"/>
+              <a:gd name="adj" fmla="val 7000"/>
             </a:avLst>
           </a:prstGeom>
           <a:solidFill>
@@ -6682,9 +7717,55 @@
           </a:p>
         </p:txBody>
       </p:sp>
+      <p:sp>
+        <p:nvSpPr>
+          <p:cNvPr id="11" name="Rounded Rectangle 10"/>
+          <p:cNvSpPr/>
+          <p:nvPr/>
+        </p:nvSpPr>
+        <p:spPr>
+          <a:xfrm>
+            <a:off x="6400800" y="2532888"/>
+            <a:ext cx="512064" cy="512064"/>
+          </a:xfrm>
+          <a:prstGeom prst="roundRect">
+            <a:avLst>
+              <a:gd name="adj" fmla="val 26000"/>
+            </a:avLst>
+          </a:prstGeom>
+          <a:solidFill>
+            <a:srgbClr val="EE0000"/>
+          </a:solidFill>
+          <a:ln>
+            <a:noFill/>
+          </a:ln>
+          <a:effectLst/>
+        </p:spPr>
+        <p:style>
+          <a:lnRef idx="1">
+            <a:schemeClr val="accent1"/>
+          </a:lnRef>
+          <a:fillRef idx="3">
+            <a:schemeClr val="accent1"/>
+          </a:fillRef>
+          <a:effectRef idx="2">
+            <a:schemeClr val="accent1"/>
+          </a:effectRef>
+          <a:fontRef idx="minor">
+            <a:schemeClr val="lt1"/>
+          </a:fontRef>
+        </p:style>
+        <p:txBody>
+          <a:bodyPr rtlCol="0" anchor="ctr"/>
+          <a:lstStyle/>
+          <a:p>
+            <a:pPr algn="ctr"/>
+          </a:p>
+        </p:txBody>
+      </p:sp>
       <p:pic>
         <p:nvPicPr>
-          <p:cNvPr id="10" name="Picture 9" descr="check_steel.png"/>
+          <p:cNvPr id="12" name="Picture 11" descr="check_white.png"/>
           <p:cNvPicPr>
             <a:picLocks noChangeAspect="1"/>
           </p:cNvPicPr>
@@ -6698,8 +7779,8 @@
         </p:blipFill>
         <p:spPr>
           <a:xfrm>
-            <a:off x="987552" y="3145536"/>
-            <a:ext cx="237744" cy="237744"/>
+            <a:off x="6523695" y="2655783"/>
+            <a:ext cx="266273" cy="266273"/>
           </a:xfrm>
           <a:prstGeom prst="rect">
             <a:avLst/>
@@ -6708,14 +7789,14 @@
       </p:pic>
       <p:sp>
         <p:nvSpPr>
-          <p:cNvPr id="11" name="TextBox 10"/>
+          <p:cNvPr id="13" name="TextBox 12"/>
           <p:cNvSpPr txBox="1"/>
           <p:nvPr/>
         </p:nvSpPr>
         <p:spPr>
           <a:xfrm>
-            <a:off x="1353312" y="2999232"/>
-            <a:ext cx="5029200" cy="530352"/>
+            <a:off x="7040880" y="2395728"/>
+            <a:ext cx="4206240" cy="786384"/>
           </a:xfrm>
           <a:prstGeom prst="rect">
             <a:avLst/>
@@ -6740,7 +7821,7 @@
               </a:spcAft>
             </a:pPr>
             <a:r>
-              <a:rPr sz="1200" b="0">
+              <a:rPr sz="1150" b="0">
                 <a:solidFill>
                   <a:srgbClr val="1A1A1A"/>
                 </a:solidFill>
@@ -6753,18 +7834,18 @@
       </p:sp>
       <p:sp>
         <p:nvSpPr>
-          <p:cNvPr id="12" name="Rounded Rectangle 11"/>
+          <p:cNvPr id="14" name="Rounded Rectangle 13"/>
           <p:cNvSpPr/>
           <p:nvPr/>
         </p:nvSpPr>
         <p:spPr>
           <a:xfrm>
-            <a:off x="841248" y="3602736"/>
-            <a:ext cx="5715000" cy="530352"/>
+            <a:off x="841248" y="3328416"/>
+            <a:ext cx="5138928" cy="786384"/>
           </a:xfrm>
           <a:prstGeom prst="roundRect">
             <a:avLst>
-              <a:gd name="adj" fmla="val 6000"/>
+              <a:gd name="adj" fmla="val 7000"/>
             </a:avLst>
           </a:prstGeom>
           <a:solidFill>
@@ -6799,9 +7880,55 @@
           </a:p>
         </p:txBody>
       </p:sp>
+      <p:sp>
+        <p:nvSpPr>
+          <p:cNvPr id="15" name="Rounded Rectangle 14"/>
+          <p:cNvSpPr/>
+          <p:nvPr/>
+        </p:nvSpPr>
+        <p:spPr>
+          <a:xfrm>
+            <a:off x="987552" y="3465576"/>
+            <a:ext cx="512064" cy="512064"/>
+          </a:xfrm>
+          <a:prstGeom prst="roundRect">
+            <a:avLst>
+              <a:gd name="adj" fmla="val 26000"/>
+            </a:avLst>
+          </a:prstGeom>
+          <a:solidFill>
+            <a:srgbClr val="EE0000"/>
+          </a:solidFill>
+          <a:ln>
+            <a:noFill/>
+          </a:ln>
+          <a:effectLst/>
+        </p:spPr>
+        <p:style>
+          <a:lnRef idx="1">
+            <a:schemeClr val="accent1"/>
+          </a:lnRef>
+          <a:fillRef idx="3">
+            <a:schemeClr val="accent1"/>
+          </a:fillRef>
+          <a:effectRef idx="2">
+            <a:schemeClr val="accent1"/>
+          </a:effectRef>
+          <a:fontRef idx="minor">
+            <a:schemeClr val="lt1"/>
+          </a:fontRef>
+        </p:style>
+        <p:txBody>
+          <a:bodyPr rtlCol="0" anchor="ctr"/>
+          <a:lstStyle/>
+          <a:p>
+            <a:pPr algn="ctr"/>
+          </a:p>
+        </p:txBody>
+      </p:sp>
       <p:pic>
         <p:nvPicPr>
-          <p:cNvPr id="13" name="Picture 12" descr="check_steel.png"/>
+          <p:cNvPr id="16" name="Picture 15" descr="check_white.png"/>
           <p:cNvPicPr>
             <a:picLocks noChangeAspect="1"/>
           </p:cNvPicPr>
@@ -6815,8 +7942,8 @@
         </p:blipFill>
         <p:spPr>
           <a:xfrm>
-            <a:off x="987552" y="3749040"/>
-            <a:ext cx="237744" cy="237744"/>
+            <a:off x="1110447" y="3588471"/>
+            <a:ext cx="266273" cy="266273"/>
           </a:xfrm>
           <a:prstGeom prst="rect">
             <a:avLst/>
@@ -6825,14 +7952,14 @@
       </p:pic>
       <p:sp>
         <p:nvSpPr>
-          <p:cNvPr id="14" name="TextBox 13"/>
+          <p:cNvPr id="17" name="TextBox 16"/>
           <p:cNvSpPr txBox="1"/>
           <p:nvPr/>
         </p:nvSpPr>
         <p:spPr>
           <a:xfrm>
-            <a:off x="1353312" y="3602736"/>
-            <a:ext cx="5029200" cy="530352"/>
+            <a:off x="1627632" y="3328416"/>
+            <a:ext cx="4206240" cy="786384"/>
           </a:xfrm>
           <a:prstGeom prst="rect">
             <a:avLst/>
@@ -6857,7 +7984,7 @@
               </a:spcAft>
             </a:pPr>
             <a:r>
-              <a:rPr sz="1200" b="0">
+              <a:rPr sz="1150" b="0">
                 <a:solidFill>
                   <a:srgbClr val="1A1A1A"/>
                 </a:solidFill>
@@ -6870,18 +7997,18 @@
       </p:sp>
       <p:sp>
         <p:nvSpPr>
-          <p:cNvPr id="15" name="Rounded Rectangle 14"/>
+          <p:cNvPr id="18" name="Rounded Rectangle 17"/>
           <p:cNvSpPr/>
           <p:nvPr/>
         </p:nvSpPr>
         <p:spPr>
           <a:xfrm>
-            <a:off x="841248" y="4206240"/>
-            <a:ext cx="5715000" cy="530352"/>
+            <a:off x="6254496" y="3328416"/>
+            <a:ext cx="5138928" cy="786384"/>
           </a:xfrm>
           <a:prstGeom prst="roundRect">
             <a:avLst>
-              <a:gd name="adj" fmla="val 6000"/>
+              <a:gd name="adj" fmla="val 7000"/>
             </a:avLst>
           </a:prstGeom>
           <a:solidFill>
@@ -6916,9 +8043,55 @@
           </a:p>
         </p:txBody>
       </p:sp>
+      <p:sp>
+        <p:nvSpPr>
+          <p:cNvPr id="19" name="Rounded Rectangle 18"/>
+          <p:cNvSpPr/>
+          <p:nvPr/>
+        </p:nvSpPr>
+        <p:spPr>
+          <a:xfrm>
+            <a:off x="6400800" y="3465576"/>
+            <a:ext cx="512064" cy="512064"/>
+          </a:xfrm>
+          <a:prstGeom prst="roundRect">
+            <a:avLst>
+              <a:gd name="adj" fmla="val 26000"/>
+            </a:avLst>
+          </a:prstGeom>
+          <a:solidFill>
+            <a:srgbClr val="EE0000"/>
+          </a:solidFill>
+          <a:ln>
+            <a:noFill/>
+          </a:ln>
+          <a:effectLst/>
+        </p:spPr>
+        <p:style>
+          <a:lnRef idx="1">
+            <a:schemeClr val="accent1"/>
+          </a:lnRef>
+          <a:fillRef idx="3">
+            <a:schemeClr val="accent1"/>
+          </a:fillRef>
+          <a:effectRef idx="2">
+            <a:schemeClr val="accent1"/>
+          </a:effectRef>
+          <a:fontRef idx="minor">
+            <a:schemeClr val="lt1"/>
+          </a:fontRef>
+        </p:style>
+        <p:txBody>
+          <a:bodyPr rtlCol="0" anchor="ctr"/>
+          <a:lstStyle/>
+          <a:p>
+            <a:pPr algn="ctr"/>
+          </a:p>
+        </p:txBody>
+      </p:sp>
       <p:pic>
         <p:nvPicPr>
-          <p:cNvPr id="16" name="Picture 15" descr="check_steel.png"/>
+          <p:cNvPr id="20" name="Picture 19" descr="check_white.png"/>
           <p:cNvPicPr>
             <a:picLocks noChangeAspect="1"/>
           </p:cNvPicPr>
@@ -6932,8 +8105,8 @@
         </p:blipFill>
         <p:spPr>
           <a:xfrm>
-            <a:off x="987552" y="4352544"/>
-            <a:ext cx="237744" cy="237744"/>
+            <a:off x="6523695" y="3588471"/>
+            <a:ext cx="266273" cy="266273"/>
           </a:xfrm>
           <a:prstGeom prst="rect">
             <a:avLst/>
@@ -6942,14 +8115,14 @@
       </p:pic>
       <p:sp>
         <p:nvSpPr>
-          <p:cNvPr id="17" name="TextBox 16"/>
+          <p:cNvPr id="21" name="TextBox 20"/>
           <p:cNvSpPr txBox="1"/>
           <p:nvPr/>
         </p:nvSpPr>
         <p:spPr>
           <a:xfrm>
-            <a:off x="1353312" y="4206240"/>
-            <a:ext cx="5029200" cy="530352"/>
+            <a:off x="7040880" y="3328416"/>
+            <a:ext cx="4206240" cy="786384"/>
           </a:xfrm>
           <a:prstGeom prst="rect">
             <a:avLst/>
@@ -6974,7 +8147,7 @@
               </a:spcAft>
             </a:pPr>
             <a:r>
-              <a:rPr sz="1200" b="0">
+              <a:rPr sz="1150" b="0">
                 <a:solidFill>
                   <a:srgbClr val="1A1A1A"/>
                 </a:solidFill>
@@ -6987,18 +8160,18 @@
       </p:sp>
       <p:sp>
         <p:nvSpPr>
-          <p:cNvPr id="18" name="Rounded Rectangle 17"/>
+          <p:cNvPr id="22" name="Rounded Rectangle 21"/>
           <p:cNvSpPr/>
           <p:nvPr/>
         </p:nvSpPr>
         <p:spPr>
           <a:xfrm>
-            <a:off x="841248" y="4809744"/>
-            <a:ext cx="5715000" cy="530352"/>
+            <a:off x="841248" y="4261104"/>
+            <a:ext cx="5138928" cy="786384"/>
           </a:xfrm>
           <a:prstGeom prst="roundRect">
             <a:avLst>
-              <a:gd name="adj" fmla="val 6000"/>
+              <a:gd name="adj" fmla="val 7000"/>
             </a:avLst>
           </a:prstGeom>
           <a:solidFill>
@@ -7033,9 +8206,55 @@
           </a:p>
         </p:txBody>
       </p:sp>
+      <p:sp>
+        <p:nvSpPr>
+          <p:cNvPr id="23" name="Rounded Rectangle 22"/>
+          <p:cNvSpPr/>
+          <p:nvPr/>
+        </p:nvSpPr>
+        <p:spPr>
+          <a:xfrm>
+            <a:off x="987552" y="4398264"/>
+            <a:ext cx="512064" cy="512064"/>
+          </a:xfrm>
+          <a:prstGeom prst="roundRect">
+            <a:avLst>
+              <a:gd name="adj" fmla="val 26000"/>
+            </a:avLst>
+          </a:prstGeom>
+          <a:solidFill>
+            <a:srgbClr val="EE0000"/>
+          </a:solidFill>
+          <a:ln>
+            <a:noFill/>
+          </a:ln>
+          <a:effectLst/>
+        </p:spPr>
+        <p:style>
+          <a:lnRef idx="1">
+            <a:schemeClr val="accent1"/>
+          </a:lnRef>
+          <a:fillRef idx="3">
+            <a:schemeClr val="accent1"/>
+          </a:fillRef>
+          <a:effectRef idx="2">
+            <a:schemeClr val="accent1"/>
+          </a:effectRef>
+          <a:fontRef idx="minor">
+            <a:schemeClr val="lt1"/>
+          </a:fontRef>
+        </p:style>
+        <p:txBody>
+          <a:bodyPr rtlCol="0" anchor="ctr"/>
+          <a:lstStyle/>
+          <a:p>
+            <a:pPr algn="ctr"/>
+          </a:p>
+        </p:txBody>
+      </p:sp>
       <p:pic>
         <p:nvPicPr>
-          <p:cNvPr id="19" name="Picture 18" descr="check_steel.png"/>
+          <p:cNvPr id="24" name="Picture 23" descr="check_white.png"/>
           <p:cNvPicPr>
             <a:picLocks noChangeAspect="1"/>
           </p:cNvPicPr>
@@ -7049,8 +8268,8 @@
         </p:blipFill>
         <p:spPr>
           <a:xfrm>
-            <a:off x="987552" y="4956048"/>
-            <a:ext cx="237744" cy="237744"/>
+            <a:off x="1110447" y="4521159"/>
+            <a:ext cx="266273" cy="266273"/>
           </a:xfrm>
           <a:prstGeom prst="rect">
             <a:avLst/>
@@ -7059,14 +8278,14 @@
       </p:pic>
       <p:sp>
         <p:nvSpPr>
-          <p:cNvPr id="20" name="TextBox 19"/>
+          <p:cNvPr id="25" name="TextBox 24"/>
           <p:cNvSpPr txBox="1"/>
           <p:nvPr/>
         </p:nvSpPr>
         <p:spPr>
           <a:xfrm>
-            <a:off x="1353312" y="4809744"/>
-            <a:ext cx="5029200" cy="530352"/>
+            <a:off x="1627632" y="4261104"/>
+            <a:ext cx="4206240" cy="786384"/>
           </a:xfrm>
           <a:prstGeom prst="rect">
             <a:avLst/>
@@ -7091,221 +8310,13 @@
               </a:spcAft>
             </a:pPr>
             <a:r>
-              <a:rPr sz="1200" b="0">
+              <a:rPr sz="1150" b="0">
                 <a:solidFill>
                   <a:srgbClr val="1A1A1A"/>
                 </a:solidFill>
                 <a:latin typeface="Red Hat Text"/>
               </a:rPr>
               <a:t>Application CR binds one source to one destination</a:t>
-            </a:r>
-          </a:p>
-        </p:txBody>
-      </p:sp>
-      <p:sp>
-        <p:nvSpPr>
-          <p:cNvPr id="21" name="Rounded Rectangle 20"/>
-          <p:cNvSpPr/>
-          <p:nvPr/>
-        </p:nvSpPr>
-        <p:spPr>
-          <a:xfrm>
-            <a:off x="6812280" y="2395728"/>
-            <a:ext cx="4538167" cy="2944368"/>
-          </a:xfrm>
-          <a:prstGeom prst="roundRect">
-            <a:avLst>
-              <a:gd name="adj" fmla="val 4000"/>
-            </a:avLst>
-          </a:prstGeom>
-          <a:solidFill>
-            <a:srgbClr val="FFFFFF"/>
-          </a:solidFill>
-          <a:ln w="15240">
-            <a:solidFill>
-              <a:srgbClr val="DDE1E6"/>
-            </a:solidFill>
-          </a:ln>
-          <a:effectLst/>
-        </p:spPr>
-        <p:style>
-          <a:lnRef idx="1">
-            <a:schemeClr val="accent1"/>
-          </a:lnRef>
-          <a:fillRef idx="3">
-            <a:schemeClr val="accent1"/>
-          </a:fillRef>
-          <a:effectRef idx="2">
-            <a:schemeClr val="accent1"/>
-          </a:effectRef>
-          <a:fontRef idx="minor">
-            <a:schemeClr val="lt1"/>
-          </a:fontRef>
-        </p:style>
-        <p:txBody>
-          <a:bodyPr rtlCol="0" anchor="ctr"/>
-          <a:lstStyle/>
-          <a:p>
-            <a:pPr algn="ctr"/>
-          </a:p>
-        </p:txBody>
-      </p:sp>
-      <p:sp>
-        <p:nvSpPr>
-          <p:cNvPr id="22" name="Rounded Rectangle 21"/>
-          <p:cNvSpPr/>
-          <p:nvPr/>
-        </p:nvSpPr>
-        <p:spPr>
-          <a:xfrm>
-            <a:off x="7013448" y="2596896"/>
-            <a:ext cx="1298448" cy="310896"/>
-          </a:xfrm>
-          <a:prstGeom prst="roundRect">
-            <a:avLst>
-              <a:gd name="adj" fmla="val 50000"/>
-            </a:avLst>
-          </a:prstGeom>
-          <a:solidFill>
-            <a:srgbClr val="FCECEC"/>
-          </a:solidFill>
-          <a:ln>
-            <a:noFill/>
-          </a:ln>
-          <a:effectLst/>
-        </p:spPr>
-        <p:style>
-          <a:lnRef idx="1">
-            <a:schemeClr val="accent1"/>
-          </a:lnRef>
-          <a:fillRef idx="3">
-            <a:schemeClr val="accent1"/>
-          </a:fillRef>
-          <a:effectRef idx="2">
-            <a:schemeClr val="accent1"/>
-          </a:effectRef>
-          <a:fontRef idx="minor">
-            <a:schemeClr val="lt1"/>
-          </a:fontRef>
-        </p:style>
-        <p:txBody>
-          <a:bodyPr rtlCol="0" anchor="ctr"/>
-          <a:lstStyle/>
-          <a:p>
-            <a:pPr algn="ctr"/>
-          </a:p>
-        </p:txBody>
-      </p:sp>
-      <p:sp>
-        <p:nvSpPr>
-          <p:cNvPr id="23" name="TextBox 22"/>
-          <p:cNvSpPr txBox="1"/>
-          <p:nvPr/>
-        </p:nvSpPr>
-        <p:spPr>
-          <a:xfrm>
-            <a:off x="7013448" y="2596896"/>
-            <a:ext cx="1298448" cy="310896"/>
-          </a:xfrm>
-          <a:prstGeom prst="rect">
-            <a:avLst/>
-          </a:prstGeom>
-          <a:noFill/>
-        </p:spPr>
-        <p:txBody>
-          <a:bodyPr wrap="none" anchor="ctr" lIns="0" rIns="0" tIns="0" bIns="0">
-            <a:spAutoFit/>
-          </a:bodyPr>
-          <a:lstStyle/>
-          <a:p>
-            <a:pPr algn="ctr">
-              <a:lnSpc>
-                <a:spcPct val="106000"/>
-              </a:lnSpc>
-              <a:spcBef>
-                <a:spcPts val="0"/>
-              </a:spcBef>
-              <a:spcAft>
-                <a:spcPts val="0"/>
-              </a:spcAft>
-            </a:pPr>
-            <a:r>
-              <a:rPr sz="850" b="1">
-                <a:solidFill>
-                  <a:srgbClr val="B80000"/>
-                </a:solidFill>
-                <a:latin typeface="Red Hat Display"/>
-              </a:rPr>
-              <a:t>MEDIA PASS</a:t>
-            </a:r>
-          </a:p>
-        </p:txBody>
-      </p:sp>
-      <p:pic>
-        <p:nvPicPr>
-          <p:cNvPr id="24" name="Picture 23" descr="eye_slate.png"/>
-          <p:cNvPicPr>
-            <a:picLocks noChangeAspect="1"/>
-          </p:cNvPicPr>
-          <p:nvPr/>
-        </p:nvPicPr>
-        <p:blipFill>
-          <a:blip r:embed="rId4"/>
-          <a:stretch>
-            <a:fillRect/>
-          </a:stretch>
-        </p:blipFill>
-        <p:spPr>
-          <a:xfrm>
-            <a:off x="8843619" y="3108960"/>
-            <a:ext cx="475488" cy="475488"/>
-          </a:xfrm>
-          <a:prstGeom prst="rect">
-            <a:avLst/>
-          </a:prstGeom>
-        </p:spPr>
-      </p:pic>
-      <p:sp>
-        <p:nvSpPr>
-          <p:cNvPr id="25" name="TextBox 24"/>
-          <p:cNvSpPr txBox="1"/>
-          <p:nvPr/>
-        </p:nvSpPr>
-        <p:spPr>
-          <a:xfrm>
-            <a:off x="7050024" y="3721608"/>
-            <a:ext cx="4062679" cy="1481328"/>
-          </a:xfrm>
-          <a:prstGeom prst="rect">
-            <a:avLst/>
-          </a:prstGeom>
-          <a:noFill/>
-        </p:spPr>
-        <p:txBody>
-          <a:bodyPr wrap="square" anchor="t" lIns="0" rIns="0" tIns="0" bIns="0">
-            <a:spAutoFit/>
-          </a:bodyPr>
-          <a:lstStyle/>
-          <a:p>
-            <a:pPr algn="l">
-              <a:lnSpc>
-                <a:spcPct val="120000"/>
-              </a:lnSpc>
-              <a:spcBef>
-                <a:spcPts val="0"/>
-              </a:spcBef>
-              <a:spcAft>
-                <a:spcPts val="0"/>
-              </a:spcAft>
-            </a:pPr>
-            <a:r>
-              <a:rPr sz="950" b="0">
-                <a:solidFill>
-                  <a:srgbClr val="8A9099"/>
-                </a:solidFill>
-                <a:latin typeface="Red Hat Text"/>
-              </a:rPr>
-              <a:t>Concept diagram gitops-fundamentals-02-reconcile-loop — Git (desired) → Application → reconcile diff → Synced/Healthy or OutOfSync → Sync back to live.</a:t>
             </a:r>
           </a:p>
         </p:txBody>
@@ -7613,11 +8624,11 @@
         <p:spPr>
           <a:xfrm>
             <a:off x="841248" y="2395728"/>
-            <a:ext cx="5715000" cy="530352"/>
+            <a:ext cx="5138928" cy="786384"/>
           </a:xfrm>
           <a:prstGeom prst="roundRect">
             <a:avLst>
-              <a:gd name="adj" fmla="val 6000"/>
+              <a:gd name="adj" fmla="val 7000"/>
             </a:avLst>
           </a:prstGeom>
           <a:solidFill>
@@ -7652,9 +8663,55 @@
           </a:p>
         </p:txBody>
       </p:sp>
+      <p:sp>
+        <p:nvSpPr>
+          <p:cNvPr id="7" name="Rounded Rectangle 6"/>
+          <p:cNvSpPr/>
+          <p:nvPr/>
+        </p:nvSpPr>
+        <p:spPr>
+          <a:xfrm>
+            <a:off x="987552" y="2532888"/>
+            <a:ext cx="512064" cy="512064"/>
+          </a:xfrm>
+          <a:prstGeom prst="roundRect">
+            <a:avLst>
+              <a:gd name="adj" fmla="val 26000"/>
+            </a:avLst>
+          </a:prstGeom>
+          <a:solidFill>
+            <a:srgbClr val="EE0000"/>
+          </a:solidFill>
+          <a:ln>
+            <a:noFill/>
+          </a:ln>
+          <a:effectLst/>
+        </p:spPr>
+        <p:style>
+          <a:lnRef idx="1">
+            <a:schemeClr val="accent1"/>
+          </a:lnRef>
+          <a:fillRef idx="3">
+            <a:schemeClr val="accent1"/>
+          </a:fillRef>
+          <a:effectRef idx="2">
+            <a:schemeClr val="accent1"/>
+          </a:effectRef>
+          <a:fontRef idx="minor">
+            <a:schemeClr val="lt1"/>
+          </a:fontRef>
+        </p:style>
+        <p:txBody>
+          <a:bodyPr rtlCol="0" anchor="ctr"/>
+          <a:lstStyle/>
+          <a:p>
+            <a:pPr algn="ctr"/>
+          </a:p>
+        </p:txBody>
+      </p:sp>
       <p:pic>
         <p:nvPicPr>
-          <p:cNvPr id="7" name="Picture 6" descr="check_steel.png"/>
+          <p:cNvPr id="8" name="Picture 7" descr="check_white.png"/>
           <p:cNvPicPr>
             <a:picLocks noChangeAspect="1"/>
           </p:cNvPicPr>
@@ -7668,8 +8725,8 @@
         </p:blipFill>
         <p:spPr>
           <a:xfrm>
-            <a:off x="987552" y="2542032"/>
-            <a:ext cx="237744" cy="237744"/>
+            <a:off x="1110447" y="2655783"/>
+            <a:ext cx="266273" cy="266273"/>
           </a:xfrm>
           <a:prstGeom prst="rect">
             <a:avLst/>
@@ -7678,14 +8735,14 @@
       </p:pic>
       <p:sp>
         <p:nvSpPr>
-          <p:cNvPr id="8" name="TextBox 7"/>
+          <p:cNvPr id="9" name="TextBox 8"/>
           <p:cNvSpPr txBox="1"/>
           <p:nvPr/>
         </p:nvSpPr>
         <p:spPr>
           <a:xfrm>
-            <a:off x="1353312" y="2395728"/>
-            <a:ext cx="5029200" cy="530352"/>
+            <a:off x="1627632" y="2395728"/>
+            <a:ext cx="4206240" cy="786384"/>
           </a:xfrm>
           <a:prstGeom prst="rect">
             <a:avLst/>
@@ -7710,7 +8767,7 @@
               </a:spcAft>
             </a:pPr>
             <a:r>
-              <a:rPr sz="1200" b="0">
+              <a:rPr sz="1150" b="0">
                 <a:solidFill>
                   <a:srgbClr val="1A1A1A"/>
                 </a:solidFill>
@@ -7723,18 +8780,18 @@
       </p:sp>
       <p:sp>
         <p:nvSpPr>
-          <p:cNvPr id="9" name="Rounded Rectangle 8"/>
+          <p:cNvPr id="10" name="Rounded Rectangle 9"/>
           <p:cNvSpPr/>
           <p:nvPr/>
         </p:nvSpPr>
         <p:spPr>
           <a:xfrm>
-            <a:off x="841248" y="2999232"/>
-            <a:ext cx="5715000" cy="530352"/>
+            <a:off x="6254496" y="2395728"/>
+            <a:ext cx="5138928" cy="786384"/>
           </a:xfrm>
           <a:prstGeom prst="roundRect">
             <a:avLst>
-              <a:gd name="adj" fmla="val 6000"/>
+              <a:gd name="adj" fmla="val 7000"/>
             </a:avLst>
           </a:prstGeom>
           <a:solidFill>
@@ -7769,9 +8826,55 @@
           </a:p>
         </p:txBody>
       </p:sp>
+      <p:sp>
+        <p:nvSpPr>
+          <p:cNvPr id="11" name="Rounded Rectangle 10"/>
+          <p:cNvSpPr/>
+          <p:nvPr/>
+        </p:nvSpPr>
+        <p:spPr>
+          <a:xfrm>
+            <a:off x="6400800" y="2532888"/>
+            <a:ext cx="512064" cy="512064"/>
+          </a:xfrm>
+          <a:prstGeom prst="roundRect">
+            <a:avLst>
+              <a:gd name="adj" fmla="val 26000"/>
+            </a:avLst>
+          </a:prstGeom>
+          <a:solidFill>
+            <a:srgbClr val="EE0000"/>
+          </a:solidFill>
+          <a:ln>
+            <a:noFill/>
+          </a:ln>
+          <a:effectLst/>
+        </p:spPr>
+        <p:style>
+          <a:lnRef idx="1">
+            <a:schemeClr val="accent1"/>
+          </a:lnRef>
+          <a:fillRef idx="3">
+            <a:schemeClr val="accent1"/>
+          </a:fillRef>
+          <a:effectRef idx="2">
+            <a:schemeClr val="accent1"/>
+          </a:effectRef>
+          <a:fontRef idx="minor">
+            <a:schemeClr val="lt1"/>
+          </a:fontRef>
+        </p:style>
+        <p:txBody>
+          <a:bodyPr rtlCol="0" anchor="ctr"/>
+          <a:lstStyle/>
+          <a:p>
+            <a:pPr algn="ctr"/>
+          </a:p>
+        </p:txBody>
+      </p:sp>
       <p:pic>
         <p:nvPicPr>
-          <p:cNvPr id="10" name="Picture 9" descr="check_steel.png"/>
+          <p:cNvPr id="12" name="Picture 11" descr="check_white.png"/>
           <p:cNvPicPr>
             <a:picLocks noChangeAspect="1"/>
           </p:cNvPicPr>
@@ -7785,8 +8888,8 @@
         </p:blipFill>
         <p:spPr>
           <a:xfrm>
-            <a:off x="987552" y="3145536"/>
-            <a:ext cx="237744" cy="237744"/>
+            <a:off x="6523695" y="2655783"/>
+            <a:ext cx="266273" cy="266273"/>
           </a:xfrm>
           <a:prstGeom prst="rect">
             <a:avLst/>
@@ -7795,14 +8898,14 @@
       </p:pic>
       <p:sp>
         <p:nvSpPr>
-          <p:cNvPr id="11" name="TextBox 10"/>
+          <p:cNvPr id="13" name="TextBox 12"/>
           <p:cNvSpPr txBox="1"/>
           <p:nvPr/>
         </p:nvSpPr>
         <p:spPr>
           <a:xfrm>
-            <a:off x="1353312" y="2999232"/>
-            <a:ext cx="5029200" cy="530352"/>
+            <a:off x="7040880" y="2395728"/>
+            <a:ext cx="4206240" cy="786384"/>
           </a:xfrm>
           <a:prstGeom prst="rect">
             <a:avLst/>
@@ -7827,7 +8930,7 @@
               </a:spcAft>
             </a:pPr>
             <a:r>
-              <a:rPr sz="1200" b="0">
+              <a:rPr sz="1150" b="0">
                 <a:solidFill>
                   <a:srgbClr val="1A1A1A"/>
                 </a:solidFill>
@@ -7840,18 +8943,18 @@
       </p:sp>
       <p:sp>
         <p:nvSpPr>
-          <p:cNvPr id="12" name="Rounded Rectangle 11"/>
+          <p:cNvPr id="14" name="Rounded Rectangle 13"/>
           <p:cNvSpPr/>
           <p:nvPr/>
         </p:nvSpPr>
         <p:spPr>
           <a:xfrm>
-            <a:off x="841248" y="3602736"/>
-            <a:ext cx="5715000" cy="530352"/>
+            <a:off x="841248" y="3328416"/>
+            <a:ext cx="5138928" cy="786384"/>
           </a:xfrm>
           <a:prstGeom prst="roundRect">
             <a:avLst>
-              <a:gd name="adj" fmla="val 6000"/>
+              <a:gd name="adj" fmla="val 7000"/>
             </a:avLst>
           </a:prstGeom>
           <a:solidFill>
@@ -7886,9 +8989,55 @@
           </a:p>
         </p:txBody>
       </p:sp>
+      <p:sp>
+        <p:nvSpPr>
+          <p:cNvPr id="15" name="Rounded Rectangle 14"/>
+          <p:cNvSpPr/>
+          <p:nvPr/>
+        </p:nvSpPr>
+        <p:spPr>
+          <a:xfrm>
+            <a:off x="987552" y="3465576"/>
+            <a:ext cx="512064" cy="512064"/>
+          </a:xfrm>
+          <a:prstGeom prst="roundRect">
+            <a:avLst>
+              <a:gd name="adj" fmla="val 26000"/>
+            </a:avLst>
+          </a:prstGeom>
+          <a:solidFill>
+            <a:srgbClr val="EE0000"/>
+          </a:solidFill>
+          <a:ln>
+            <a:noFill/>
+          </a:ln>
+          <a:effectLst/>
+        </p:spPr>
+        <p:style>
+          <a:lnRef idx="1">
+            <a:schemeClr val="accent1"/>
+          </a:lnRef>
+          <a:fillRef idx="3">
+            <a:schemeClr val="accent1"/>
+          </a:fillRef>
+          <a:effectRef idx="2">
+            <a:schemeClr val="accent1"/>
+          </a:effectRef>
+          <a:fontRef idx="minor">
+            <a:schemeClr val="lt1"/>
+          </a:fontRef>
+        </p:style>
+        <p:txBody>
+          <a:bodyPr rtlCol="0" anchor="ctr"/>
+          <a:lstStyle/>
+          <a:p>
+            <a:pPr algn="ctr"/>
+          </a:p>
+        </p:txBody>
+      </p:sp>
       <p:pic>
         <p:nvPicPr>
-          <p:cNvPr id="13" name="Picture 12" descr="check_steel.png"/>
+          <p:cNvPr id="16" name="Picture 15" descr="check_white.png"/>
           <p:cNvPicPr>
             <a:picLocks noChangeAspect="1"/>
           </p:cNvPicPr>
@@ -7902,8 +9051,8 @@
         </p:blipFill>
         <p:spPr>
           <a:xfrm>
-            <a:off x="987552" y="3749040"/>
-            <a:ext cx="237744" cy="237744"/>
+            <a:off x="1110447" y="3588471"/>
+            <a:ext cx="266273" cy="266273"/>
           </a:xfrm>
           <a:prstGeom prst="rect">
             <a:avLst/>
@@ -7912,14 +9061,14 @@
       </p:pic>
       <p:sp>
         <p:nvSpPr>
-          <p:cNvPr id="14" name="TextBox 13"/>
+          <p:cNvPr id="17" name="TextBox 16"/>
           <p:cNvSpPr txBox="1"/>
           <p:nvPr/>
         </p:nvSpPr>
         <p:spPr>
           <a:xfrm>
-            <a:off x="1353312" y="3602736"/>
-            <a:ext cx="5029200" cy="530352"/>
+            <a:off x="1627632" y="3328416"/>
+            <a:ext cx="4206240" cy="786384"/>
           </a:xfrm>
           <a:prstGeom prst="rect">
             <a:avLst/>
@@ -7944,7 +9093,7 @@
               </a:spcAft>
             </a:pPr>
             <a:r>
-              <a:rPr sz="1200" b="0">
+              <a:rPr sz="1150" b="0">
                 <a:solidFill>
                   <a:srgbClr val="1A1A1A"/>
                 </a:solidFill>
@@ -7957,18 +9106,18 @@
       </p:sp>
       <p:sp>
         <p:nvSpPr>
-          <p:cNvPr id="15" name="Rounded Rectangle 14"/>
+          <p:cNvPr id="18" name="Rounded Rectangle 17"/>
           <p:cNvSpPr/>
           <p:nvPr/>
         </p:nvSpPr>
         <p:spPr>
           <a:xfrm>
-            <a:off x="841248" y="4206240"/>
-            <a:ext cx="5715000" cy="530352"/>
+            <a:off x="6254496" y="3328416"/>
+            <a:ext cx="5138928" cy="786384"/>
           </a:xfrm>
           <a:prstGeom prst="roundRect">
             <a:avLst>
-              <a:gd name="adj" fmla="val 6000"/>
+              <a:gd name="adj" fmla="val 7000"/>
             </a:avLst>
           </a:prstGeom>
           <a:solidFill>
@@ -8003,9 +9152,55 @@
           </a:p>
         </p:txBody>
       </p:sp>
+      <p:sp>
+        <p:nvSpPr>
+          <p:cNvPr id="19" name="Rounded Rectangle 18"/>
+          <p:cNvSpPr/>
+          <p:nvPr/>
+        </p:nvSpPr>
+        <p:spPr>
+          <a:xfrm>
+            <a:off x="6400800" y="3465576"/>
+            <a:ext cx="512064" cy="512064"/>
+          </a:xfrm>
+          <a:prstGeom prst="roundRect">
+            <a:avLst>
+              <a:gd name="adj" fmla="val 26000"/>
+            </a:avLst>
+          </a:prstGeom>
+          <a:solidFill>
+            <a:srgbClr val="EE0000"/>
+          </a:solidFill>
+          <a:ln>
+            <a:noFill/>
+          </a:ln>
+          <a:effectLst/>
+        </p:spPr>
+        <p:style>
+          <a:lnRef idx="1">
+            <a:schemeClr val="accent1"/>
+          </a:lnRef>
+          <a:fillRef idx="3">
+            <a:schemeClr val="accent1"/>
+          </a:fillRef>
+          <a:effectRef idx="2">
+            <a:schemeClr val="accent1"/>
+          </a:effectRef>
+          <a:fontRef idx="minor">
+            <a:schemeClr val="lt1"/>
+          </a:fontRef>
+        </p:style>
+        <p:txBody>
+          <a:bodyPr rtlCol="0" anchor="ctr"/>
+          <a:lstStyle/>
+          <a:p>
+            <a:pPr algn="ctr"/>
+          </a:p>
+        </p:txBody>
+      </p:sp>
       <p:pic>
         <p:nvPicPr>
-          <p:cNvPr id="16" name="Picture 15" descr="check_steel.png"/>
+          <p:cNvPr id="20" name="Picture 19" descr="check_white.png"/>
           <p:cNvPicPr>
             <a:picLocks noChangeAspect="1"/>
           </p:cNvPicPr>
@@ -8019,8 +9214,8 @@
         </p:blipFill>
         <p:spPr>
           <a:xfrm>
-            <a:off x="987552" y="4352544"/>
-            <a:ext cx="237744" cy="237744"/>
+            <a:off x="6523695" y="3588471"/>
+            <a:ext cx="266273" cy="266273"/>
           </a:xfrm>
           <a:prstGeom prst="rect">
             <a:avLst/>
@@ -8029,14 +9224,14 @@
       </p:pic>
       <p:sp>
         <p:nvSpPr>
-          <p:cNvPr id="17" name="TextBox 16"/>
+          <p:cNvPr id="21" name="TextBox 20"/>
           <p:cNvSpPr txBox="1"/>
           <p:nvPr/>
         </p:nvSpPr>
         <p:spPr>
           <a:xfrm>
-            <a:off x="1353312" y="4206240"/>
-            <a:ext cx="5029200" cy="530352"/>
+            <a:off x="7040880" y="3328416"/>
+            <a:ext cx="4206240" cy="786384"/>
           </a:xfrm>
           <a:prstGeom prst="rect">
             <a:avLst/>
@@ -8061,7 +9256,7 @@
               </a:spcAft>
             </a:pPr>
             <a:r>
-              <a:rPr sz="1200" b="0">
+              <a:rPr sz="1150" b="0">
                 <a:solidFill>
                   <a:srgbClr val="1A1A1A"/>
                 </a:solidFill>
@@ -8074,18 +9269,18 @@
       </p:sp>
       <p:sp>
         <p:nvSpPr>
-          <p:cNvPr id="18" name="Rounded Rectangle 17"/>
+          <p:cNvPr id="22" name="Rounded Rectangle 21"/>
           <p:cNvSpPr/>
           <p:nvPr/>
         </p:nvSpPr>
         <p:spPr>
           <a:xfrm>
-            <a:off x="841248" y="4809744"/>
-            <a:ext cx="5715000" cy="530352"/>
+            <a:off x="841248" y="4261104"/>
+            <a:ext cx="5138928" cy="786384"/>
           </a:xfrm>
           <a:prstGeom prst="roundRect">
             <a:avLst>
-              <a:gd name="adj" fmla="val 6000"/>
+              <a:gd name="adj" fmla="val 7000"/>
             </a:avLst>
           </a:prstGeom>
           <a:solidFill>
@@ -8120,9 +9315,55 @@
           </a:p>
         </p:txBody>
       </p:sp>
+      <p:sp>
+        <p:nvSpPr>
+          <p:cNvPr id="23" name="Rounded Rectangle 22"/>
+          <p:cNvSpPr/>
+          <p:nvPr/>
+        </p:nvSpPr>
+        <p:spPr>
+          <a:xfrm>
+            <a:off x="987552" y="4398264"/>
+            <a:ext cx="512064" cy="512064"/>
+          </a:xfrm>
+          <a:prstGeom prst="roundRect">
+            <a:avLst>
+              <a:gd name="adj" fmla="val 26000"/>
+            </a:avLst>
+          </a:prstGeom>
+          <a:solidFill>
+            <a:srgbClr val="EE0000"/>
+          </a:solidFill>
+          <a:ln>
+            <a:noFill/>
+          </a:ln>
+          <a:effectLst/>
+        </p:spPr>
+        <p:style>
+          <a:lnRef idx="1">
+            <a:schemeClr val="accent1"/>
+          </a:lnRef>
+          <a:fillRef idx="3">
+            <a:schemeClr val="accent1"/>
+          </a:fillRef>
+          <a:effectRef idx="2">
+            <a:schemeClr val="accent1"/>
+          </a:effectRef>
+          <a:fontRef idx="minor">
+            <a:schemeClr val="lt1"/>
+          </a:fontRef>
+        </p:style>
+        <p:txBody>
+          <a:bodyPr rtlCol="0" anchor="ctr"/>
+          <a:lstStyle/>
+          <a:p>
+            <a:pPr algn="ctr"/>
+          </a:p>
+        </p:txBody>
+      </p:sp>
       <p:pic>
         <p:nvPicPr>
-          <p:cNvPr id="19" name="Picture 18" descr="check_steel.png"/>
+          <p:cNvPr id="24" name="Picture 23" descr="check_white.png"/>
           <p:cNvPicPr>
             <a:picLocks noChangeAspect="1"/>
           </p:cNvPicPr>
@@ -8136,8 +9377,8 @@
         </p:blipFill>
         <p:spPr>
           <a:xfrm>
-            <a:off x="987552" y="4956048"/>
-            <a:ext cx="237744" cy="237744"/>
+            <a:off x="1110447" y="4521159"/>
+            <a:ext cx="266273" cy="266273"/>
           </a:xfrm>
           <a:prstGeom prst="rect">
             <a:avLst/>
@@ -8146,14 +9387,14 @@
       </p:pic>
       <p:sp>
         <p:nvSpPr>
-          <p:cNvPr id="20" name="TextBox 19"/>
+          <p:cNvPr id="25" name="TextBox 24"/>
           <p:cNvSpPr txBox="1"/>
           <p:nvPr/>
         </p:nvSpPr>
         <p:spPr>
           <a:xfrm>
-            <a:off x="1353312" y="4809744"/>
-            <a:ext cx="5029200" cy="530352"/>
+            <a:off x="1627632" y="4261104"/>
+            <a:ext cx="4206240" cy="786384"/>
           </a:xfrm>
           <a:prstGeom prst="rect">
             <a:avLst/>
@@ -8178,221 +9419,13 @@
               </a:spcAft>
             </a:pPr>
             <a:r>
-              <a:rPr sz="1200" b="0">
+              <a:rPr sz="1150" b="0">
                 <a:solidFill>
                   <a:srgbClr val="1A1A1A"/>
                 </a:solidFill>
                 <a:latin typeface="Red Hat Text"/>
               </a:rPr>
               <a:t>You cannot out-edit Git</a:t>
-            </a:r>
-          </a:p>
-        </p:txBody>
-      </p:sp>
-      <p:sp>
-        <p:nvSpPr>
-          <p:cNvPr id="21" name="Rounded Rectangle 20"/>
-          <p:cNvSpPr/>
-          <p:nvPr/>
-        </p:nvSpPr>
-        <p:spPr>
-          <a:xfrm>
-            <a:off x="6812280" y="2395728"/>
-            <a:ext cx="4538167" cy="2944368"/>
-          </a:xfrm>
-          <a:prstGeom prst="roundRect">
-            <a:avLst>
-              <a:gd name="adj" fmla="val 4000"/>
-            </a:avLst>
-          </a:prstGeom>
-          <a:solidFill>
-            <a:srgbClr val="FFFFFF"/>
-          </a:solidFill>
-          <a:ln w="15240">
-            <a:solidFill>
-              <a:srgbClr val="DDE1E6"/>
-            </a:solidFill>
-          </a:ln>
-          <a:effectLst/>
-        </p:spPr>
-        <p:style>
-          <a:lnRef idx="1">
-            <a:schemeClr val="accent1"/>
-          </a:lnRef>
-          <a:fillRef idx="3">
-            <a:schemeClr val="accent1"/>
-          </a:fillRef>
-          <a:effectRef idx="2">
-            <a:schemeClr val="accent1"/>
-          </a:effectRef>
-          <a:fontRef idx="minor">
-            <a:schemeClr val="lt1"/>
-          </a:fontRef>
-        </p:style>
-        <p:txBody>
-          <a:bodyPr rtlCol="0" anchor="ctr"/>
-          <a:lstStyle/>
-          <a:p>
-            <a:pPr algn="ctr"/>
-          </a:p>
-        </p:txBody>
-      </p:sp>
-      <p:sp>
-        <p:nvSpPr>
-          <p:cNvPr id="22" name="Rounded Rectangle 21"/>
-          <p:cNvSpPr/>
-          <p:nvPr/>
-        </p:nvSpPr>
-        <p:spPr>
-          <a:xfrm>
-            <a:off x="7013448" y="2596896"/>
-            <a:ext cx="1298448" cy="310896"/>
-          </a:xfrm>
-          <a:prstGeom prst="roundRect">
-            <a:avLst>
-              <a:gd name="adj" fmla="val 50000"/>
-            </a:avLst>
-          </a:prstGeom>
-          <a:solidFill>
-            <a:srgbClr val="FCECEC"/>
-          </a:solidFill>
-          <a:ln>
-            <a:noFill/>
-          </a:ln>
-          <a:effectLst/>
-        </p:spPr>
-        <p:style>
-          <a:lnRef idx="1">
-            <a:schemeClr val="accent1"/>
-          </a:lnRef>
-          <a:fillRef idx="3">
-            <a:schemeClr val="accent1"/>
-          </a:fillRef>
-          <a:effectRef idx="2">
-            <a:schemeClr val="accent1"/>
-          </a:effectRef>
-          <a:fontRef idx="minor">
-            <a:schemeClr val="lt1"/>
-          </a:fontRef>
-        </p:style>
-        <p:txBody>
-          <a:bodyPr rtlCol="0" anchor="ctr"/>
-          <a:lstStyle/>
-          <a:p>
-            <a:pPr algn="ctr"/>
-          </a:p>
-        </p:txBody>
-      </p:sp>
-      <p:sp>
-        <p:nvSpPr>
-          <p:cNvPr id="23" name="TextBox 22"/>
-          <p:cNvSpPr txBox="1"/>
-          <p:nvPr/>
-        </p:nvSpPr>
-        <p:spPr>
-          <a:xfrm>
-            <a:off x="7013448" y="2596896"/>
-            <a:ext cx="1298448" cy="310896"/>
-          </a:xfrm>
-          <a:prstGeom prst="rect">
-            <a:avLst/>
-          </a:prstGeom>
-          <a:noFill/>
-        </p:spPr>
-        <p:txBody>
-          <a:bodyPr wrap="none" anchor="ctr" lIns="0" rIns="0" tIns="0" bIns="0">
-            <a:spAutoFit/>
-          </a:bodyPr>
-          <a:lstStyle/>
-          <a:p>
-            <a:pPr algn="ctr">
-              <a:lnSpc>
-                <a:spcPct val="106000"/>
-              </a:lnSpc>
-              <a:spcBef>
-                <a:spcPts val="0"/>
-              </a:spcBef>
-              <a:spcAft>
-                <a:spcPts val="0"/>
-              </a:spcAft>
-            </a:pPr>
-            <a:r>
-              <a:rPr sz="850" b="1">
-                <a:solidFill>
-                  <a:srgbClr val="B80000"/>
-                </a:solidFill>
-                <a:latin typeface="Red Hat Display"/>
-              </a:rPr>
-              <a:t>MEDIA PASS</a:t>
-            </a:r>
-          </a:p>
-        </p:txBody>
-      </p:sp>
-      <p:pic>
-        <p:nvPicPr>
-          <p:cNvPr id="24" name="Picture 23" descr="eye_slate.png"/>
-          <p:cNvPicPr>
-            <a:picLocks noChangeAspect="1"/>
-          </p:cNvPicPr>
-          <p:nvPr/>
-        </p:nvPicPr>
-        <p:blipFill>
-          <a:blip r:embed="rId4"/>
-          <a:stretch>
-            <a:fillRect/>
-          </a:stretch>
-        </p:blipFill>
-        <p:spPr>
-          <a:xfrm>
-            <a:off x="8843619" y="3108960"/>
-            <a:ext cx="475488" cy="475488"/>
-          </a:xfrm>
-          <a:prstGeom prst="rect">
-            <a:avLst/>
-          </a:prstGeom>
-        </p:spPr>
-      </p:pic>
-      <p:sp>
-        <p:nvSpPr>
-          <p:cNvPr id="25" name="TextBox 24"/>
-          <p:cNvSpPr txBox="1"/>
-          <p:nvPr/>
-        </p:nvSpPr>
-        <p:spPr>
-          <a:xfrm>
-            <a:off x="7050024" y="3721608"/>
-            <a:ext cx="4062679" cy="1481328"/>
-          </a:xfrm>
-          <a:prstGeom prst="rect">
-            <a:avLst/>
-          </a:prstGeom>
-          <a:noFill/>
-        </p:spPr>
-        <p:txBody>
-          <a:bodyPr wrap="square" anchor="t" lIns="0" rIns="0" tIns="0" bIns="0">
-            <a:spAutoFit/>
-          </a:bodyPr>
-          <a:lstStyle/>
-          <a:p>
-            <a:pPr algn="l">
-              <a:lnSpc>
-                <a:spcPct val="120000"/>
-              </a:lnSpc>
-              <a:spcBef>
-                <a:spcPts val="0"/>
-              </a:spcBef>
-              <a:spcAft>
-                <a:spcPts val="0"/>
-              </a:spcAft>
-            </a:pPr>
-            <a:r>
-              <a:rPr sz="950" b="0">
-                <a:solidFill>
-                  <a:srgbClr val="8A9099"/>
-                </a:solidFill>
-                <a:latin typeface="Red Hat Text"/>
-              </a:rPr>
-              <a:t>A three-step strip — (1) live scaled to 3, (2) Argo OutOfSync diff 3-vs-1, (3) reverted to 1 — with a small clock showing "~seconds" over the self-heal arrow.</a:t>
             </a:r>
           </a:p>
         </p:txBody>
@@ -8700,11 +9733,11 @@
         <p:spPr>
           <a:xfrm>
             <a:off x="841248" y="2395728"/>
-            <a:ext cx="5715000" cy="530352"/>
+            <a:ext cx="5138928" cy="786384"/>
           </a:xfrm>
           <a:prstGeom prst="roundRect">
             <a:avLst>
-              <a:gd name="adj" fmla="val 6000"/>
+              <a:gd name="adj" fmla="val 7000"/>
             </a:avLst>
           </a:prstGeom>
           <a:solidFill>
@@ -8739,9 +9772,55 @@
           </a:p>
         </p:txBody>
       </p:sp>
+      <p:sp>
+        <p:nvSpPr>
+          <p:cNvPr id="7" name="Rounded Rectangle 6"/>
+          <p:cNvSpPr/>
+          <p:nvPr/>
+        </p:nvSpPr>
+        <p:spPr>
+          <a:xfrm>
+            <a:off x="987552" y="2532888"/>
+            <a:ext cx="512064" cy="512064"/>
+          </a:xfrm>
+          <a:prstGeom prst="roundRect">
+            <a:avLst>
+              <a:gd name="adj" fmla="val 26000"/>
+            </a:avLst>
+          </a:prstGeom>
+          <a:solidFill>
+            <a:srgbClr val="EE0000"/>
+          </a:solidFill>
+          <a:ln>
+            <a:noFill/>
+          </a:ln>
+          <a:effectLst/>
+        </p:spPr>
+        <p:style>
+          <a:lnRef idx="1">
+            <a:schemeClr val="accent1"/>
+          </a:lnRef>
+          <a:fillRef idx="3">
+            <a:schemeClr val="accent1"/>
+          </a:fillRef>
+          <a:effectRef idx="2">
+            <a:schemeClr val="accent1"/>
+          </a:effectRef>
+          <a:fontRef idx="minor">
+            <a:schemeClr val="lt1"/>
+          </a:fontRef>
+        </p:style>
+        <p:txBody>
+          <a:bodyPr rtlCol="0" anchor="ctr"/>
+          <a:lstStyle/>
+          <a:p>
+            <a:pPr algn="ctr"/>
+          </a:p>
+        </p:txBody>
+      </p:sp>
       <p:pic>
         <p:nvPicPr>
-          <p:cNvPr id="7" name="Picture 6" descr="check_steel.png"/>
+          <p:cNvPr id="8" name="Picture 7" descr="check_white.png"/>
           <p:cNvPicPr>
             <a:picLocks noChangeAspect="1"/>
           </p:cNvPicPr>
@@ -8755,8 +9834,8 @@
         </p:blipFill>
         <p:spPr>
           <a:xfrm>
-            <a:off x="987552" y="2542032"/>
-            <a:ext cx="237744" cy="237744"/>
+            <a:off x="1110447" y="2655783"/>
+            <a:ext cx="266273" cy="266273"/>
           </a:xfrm>
           <a:prstGeom prst="rect">
             <a:avLst/>
@@ -8765,14 +9844,14 @@
       </p:pic>
       <p:sp>
         <p:nvSpPr>
-          <p:cNvPr id="8" name="TextBox 7"/>
+          <p:cNvPr id="9" name="TextBox 8"/>
           <p:cNvSpPr txBox="1"/>
           <p:nvPr/>
         </p:nvSpPr>
         <p:spPr>
           <a:xfrm>
-            <a:off x="1353312" y="2395728"/>
-            <a:ext cx="5029200" cy="530352"/>
+            <a:off x="1627632" y="2395728"/>
+            <a:ext cx="4206240" cy="786384"/>
           </a:xfrm>
           <a:prstGeom prst="rect">
             <a:avLst/>
@@ -8797,7 +9876,7 @@
               </a:spcAft>
             </a:pPr>
             <a:r>
-              <a:rPr sz="1200" b="0">
+              <a:rPr sz="1150" b="0">
                 <a:solidFill>
                   <a:srgbClr val="1A1A1A"/>
                 </a:solidFill>
@@ -8810,18 +9889,18 @@
       </p:sp>
       <p:sp>
         <p:nvSpPr>
-          <p:cNvPr id="9" name="Rounded Rectangle 8"/>
+          <p:cNvPr id="10" name="Rounded Rectangle 9"/>
           <p:cNvSpPr/>
           <p:nvPr/>
         </p:nvSpPr>
         <p:spPr>
           <a:xfrm>
-            <a:off x="841248" y="2999232"/>
-            <a:ext cx="5715000" cy="530352"/>
+            <a:off x="6254496" y="2395728"/>
+            <a:ext cx="5138928" cy="786384"/>
           </a:xfrm>
           <a:prstGeom prst="roundRect">
             <a:avLst>
-              <a:gd name="adj" fmla="val 6000"/>
+              <a:gd name="adj" fmla="val 7000"/>
             </a:avLst>
           </a:prstGeom>
           <a:solidFill>
@@ -8856,9 +9935,55 @@
           </a:p>
         </p:txBody>
       </p:sp>
+      <p:sp>
+        <p:nvSpPr>
+          <p:cNvPr id="11" name="Rounded Rectangle 10"/>
+          <p:cNvSpPr/>
+          <p:nvPr/>
+        </p:nvSpPr>
+        <p:spPr>
+          <a:xfrm>
+            <a:off x="6400800" y="2532888"/>
+            <a:ext cx="512064" cy="512064"/>
+          </a:xfrm>
+          <a:prstGeom prst="roundRect">
+            <a:avLst>
+              <a:gd name="adj" fmla="val 26000"/>
+            </a:avLst>
+          </a:prstGeom>
+          <a:solidFill>
+            <a:srgbClr val="EE0000"/>
+          </a:solidFill>
+          <a:ln>
+            <a:noFill/>
+          </a:ln>
+          <a:effectLst/>
+        </p:spPr>
+        <p:style>
+          <a:lnRef idx="1">
+            <a:schemeClr val="accent1"/>
+          </a:lnRef>
+          <a:fillRef idx="3">
+            <a:schemeClr val="accent1"/>
+          </a:fillRef>
+          <a:effectRef idx="2">
+            <a:schemeClr val="accent1"/>
+          </a:effectRef>
+          <a:fontRef idx="minor">
+            <a:schemeClr val="lt1"/>
+          </a:fontRef>
+        </p:style>
+        <p:txBody>
+          <a:bodyPr rtlCol="0" anchor="ctr"/>
+          <a:lstStyle/>
+          <a:p>
+            <a:pPr algn="ctr"/>
+          </a:p>
+        </p:txBody>
+      </p:sp>
       <p:pic>
         <p:nvPicPr>
-          <p:cNvPr id="10" name="Picture 9" descr="check_steel.png"/>
+          <p:cNvPr id="12" name="Picture 11" descr="check_white.png"/>
           <p:cNvPicPr>
             <a:picLocks noChangeAspect="1"/>
           </p:cNvPicPr>
@@ -8872,8 +9997,8 @@
         </p:blipFill>
         <p:spPr>
           <a:xfrm>
-            <a:off x="987552" y="3145536"/>
-            <a:ext cx="237744" cy="237744"/>
+            <a:off x="6523695" y="2655783"/>
+            <a:ext cx="266273" cy="266273"/>
           </a:xfrm>
           <a:prstGeom prst="rect">
             <a:avLst/>
@@ -8882,14 +10007,14 @@
       </p:pic>
       <p:sp>
         <p:nvSpPr>
-          <p:cNvPr id="11" name="TextBox 10"/>
+          <p:cNvPr id="13" name="TextBox 12"/>
           <p:cNvSpPr txBox="1"/>
           <p:nvPr/>
         </p:nvSpPr>
         <p:spPr>
           <a:xfrm>
-            <a:off x="1353312" y="2999232"/>
-            <a:ext cx="5029200" cy="530352"/>
+            <a:off x="7040880" y="2395728"/>
+            <a:ext cx="4206240" cy="786384"/>
           </a:xfrm>
           <a:prstGeom prst="rect">
             <a:avLst/>
@@ -8914,7 +10039,7 @@
               </a:spcAft>
             </a:pPr>
             <a:r>
-              <a:rPr sz="1200" b="0">
+              <a:rPr sz="1150" b="0">
                 <a:solidFill>
                   <a:srgbClr val="1A1A1A"/>
                 </a:solidFill>
@@ -8927,18 +10052,18 @@
       </p:sp>
       <p:sp>
         <p:nvSpPr>
-          <p:cNvPr id="12" name="Rounded Rectangle 11"/>
+          <p:cNvPr id="14" name="Rounded Rectangle 13"/>
           <p:cNvSpPr/>
           <p:nvPr/>
         </p:nvSpPr>
         <p:spPr>
           <a:xfrm>
-            <a:off x="841248" y="3602736"/>
-            <a:ext cx="5715000" cy="530352"/>
+            <a:off x="841248" y="3328416"/>
+            <a:ext cx="5138928" cy="786384"/>
           </a:xfrm>
           <a:prstGeom prst="roundRect">
             <a:avLst>
-              <a:gd name="adj" fmla="val 6000"/>
+              <a:gd name="adj" fmla="val 7000"/>
             </a:avLst>
           </a:prstGeom>
           <a:solidFill>
@@ -8973,9 +10098,55 @@
           </a:p>
         </p:txBody>
       </p:sp>
+      <p:sp>
+        <p:nvSpPr>
+          <p:cNvPr id="15" name="Rounded Rectangle 14"/>
+          <p:cNvSpPr/>
+          <p:nvPr/>
+        </p:nvSpPr>
+        <p:spPr>
+          <a:xfrm>
+            <a:off x="987552" y="3465576"/>
+            <a:ext cx="512064" cy="512064"/>
+          </a:xfrm>
+          <a:prstGeom prst="roundRect">
+            <a:avLst>
+              <a:gd name="adj" fmla="val 26000"/>
+            </a:avLst>
+          </a:prstGeom>
+          <a:solidFill>
+            <a:srgbClr val="EE0000"/>
+          </a:solidFill>
+          <a:ln>
+            <a:noFill/>
+          </a:ln>
+          <a:effectLst/>
+        </p:spPr>
+        <p:style>
+          <a:lnRef idx="1">
+            <a:schemeClr val="accent1"/>
+          </a:lnRef>
+          <a:fillRef idx="3">
+            <a:schemeClr val="accent1"/>
+          </a:fillRef>
+          <a:effectRef idx="2">
+            <a:schemeClr val="accent1"/>
+          </a:effectRef>
+          <a:fontRef idx="minor">
+            <a:schemeClr val="lt1"/>
+          </a:fontRef>
+        </p:style>
+        <p:txBody>
+          <a:bodyPr rtlCol="0" anchor="ctr"/>
+          <a:lstStyle/>
+          <a:p>
+            <a:pPr algn="ctr"/>
+          </a:p>
+        </p:txBody>
+      </p:sp>
       <p:pic>
         <p:nvPicPr>
-          <p:cNvPr id="13" name="Picture 12" descr="check_steel.png"/>
+          <p:cNvPr id="16" name="Picture 15" descr="check_white.png"/>
           <p:cNvPicPr>
             <a:picLocks noChangeAspect="1"/>
           </p:cNvPicPr>
@@ -8989,8 +10160,8 @@
         </p:blipFill>
         <p:spPr>
           <a:xfrm>
-            <a:off x="987552" y="3749040"/>
-            <a:ext cx="237744" cy="237744"/>
+            <a:off x="1110447" y="3588471"/>
+            <a:ext cx="266273" cy="266273"/>
           </a:xfrm>
           <a:prstGeom prst="rect">
             <a:avLst/>
@@ -8999,14 +10170,14 @@
       </p:pic>
       <p:sp>
         <p:nvSpPr>
-          <p:cNvPr id="14" name="TextBox 13"/>
+          <p:cNvPr id="17" name="TextBox 16"/>
           <p:cNvSpPr txBox="1"/>
           <p:nvPr/>
         </p:nvSpPr>
         <p:spPr>
           <a:xfrm>
-            <a:off x="1353312" y="3602736"/>
-            <a:ext cx="5029200" cy="530352"/>
+            <a:off x="1627632" y="3328416"/>
+            <a:ext cx="4206240" cy="786384"/>
           </a:xfrm>
           <a:prstGeom prst="rect">
             <a:avLst/>
@@ -9031,7 +10202,7 @@
               </a:spcAft>
             </a:pPr>
             <a:r>
-              <a:rPr sz="1200" b="0">
+              <a:rPr sz="1150" b="0">
                 <a:solidFill>
                   <a:srgbClr val="1A1A1A"/>
                 </a:solidFill>
@@ -9044,18 +10215,18 @@
       </p:sp>
       <p:sp>
         <p:nvSpPr>
-          <p:cNvPr id="15" name="Rounded Rectangle 14"/>
+          <p:cNvPr id="18" name="Rounded Rectangle 17"/>
           <p:cNvSpPr/>
           <p:nvPr/>
         </p:nvSpPr>
         <p:spPr>
           <a:xfrm>
-            <a:off x="841248" y="4206240"/>
-            <a:ext cx="5715000" cy="530352"/>
+            <a:off x="6254496" y="3328416"/>
+            <a:ext cx="5138928" cy="786384"/>
           </a:xfrm>
           <a:prstGeom prst="roundRect">
             <a:avLst>
-              <a:gd name="adj" fmla="val 6000"/>
+              <a:gd name="adj" fmla="val 7000"/>
             </a:avLst>
           </a:prstGeom>
           <a:solidFill>
@@ -9090,9 +10261,55 @@
           </a:p>
         </p:txBody>
       </p:sp>
+      <p:sp>
+        <p:nvSpPr>
+          <p:cNvPr id="19" name="Rounded Rectangle 18"/>
+          <p:cNvSpPr/>
+          <p:nvPr/>
+        </p:nvSpPr>
+        <p:spPr>
+          <a:xfrm>
+            <a:off x="6400800" y="3465576"/>
+            <a:ext cx="512064" cy="512064"/>
+          </a:xfrm>
+          <a:prstGeom prst="roundRect">
+            <a:avLst>
+              <a:gd name="adj" fmla="val 26000"/>
+            </a:avLst>
+          </a:prstGeom>
+          <a:solidFill>
+            <a:srgbClr val="EE0000"/>
+          </a:solidFill>
+          <a:ln>
+            <a:noFill/>
+          </a:ln>
+          <a:effectLst/>
+        </p:spPr>
+        <p:style>
+          <a:lnRef idx="1">
+            <a:schemeClr val="accent1"/>
+          </a:lnRef>
+          <a:fillRef idx="3">
+            <a:schemeClr val="accent1"/>
+          </a:fillRef>
+          <a:effectRef idx="2">
+            <a:schemeClr val="accent1"/>
+          </a:effectRef>
+          <a:fontRef idx="minor">
+            <a:schemeClr val="lt1"/>
+          </a:fontRef>
+        </p:style>
+        <p:txBody>
+          <a:bodyPr rtlCol="0" anchor="ctr"/>
+          <a:lstStyle/>
+          <a:p>
+            <a:pPr algn="ctr"/>
+          </a:p>
+        </p:txBody>
+      </p:sp>
       <p:pic>
         <p:nvPicPr>
-          <p:cNvPr id="16" name="Picture 15" descr="check_steel.png"/>
+          <p:cNvPr id="20" name="Picture 19" descr="check_white.png"/>
           <p:cNvPicPr>
             <a:picLocks noChangeAspect="1"/>
           </p:cNvPicPr>
@@ -9106,8 +10323,8 @@
         </p:blipFill>
         <p:spPr>
           <a:xfrm>
-            <a:off x="987552" y="4352544"/>
-            <a:ext cx="237744" cy="237744"/>
+            <a:off x="6523695" y="3588471"/>
+            <a:ext cx="266273" cy="266273"/>
           </a:xfrm>
           <a:prstGeom prst="rect">
             <a:avLst/>
@@ -9116,14 +10333,14 @@
       </p:pic>
       <p:sp>
         <p:nvSpPr>
-          <p:cNvPr id="17" name="TextBox 16"/>
+          <p:cNvPr id="21" name="TextBox 20"/>
           <p:cNvSpPr txBox="1"/>
           <p:nvPr/>
         </p:nvSpPr>
         <p:spPr>
           <a:xfrm>
-            <a:off x="1353312" y="4206240"/>
-            <a:ext cx="5029200" cy="530352"/>
+            <a:off x="7040880" y="3328416"/>
+            <a:ext cx="4206240" cy="786384"/>
           </a:xfrm>
           <a:prstGeom prst="rect">
             <a:avLst/>
@@ -9148,7 +10365,7 @@
               </a:spcAft>
             </a:pPr>
             <a:r>
-              <a:rPr sz="1200" b="0">
+              <a:rPr sz="1150" b="0">
                 <a:solidFill>
                   <a:srgbClr val="1A1A1A"/>
                 </a:solidFill>
@@ -9161,18 +10378,18 @@
       </p:sp>
       <p:sp>
         <p:nvSpPr>
-          <p:cNvPr id="18" name="Rounded Rectangle 17"/>
+          <p:cNvPr id="22" name="Rounded Rectangle 21"/>
           <p:cNvSpPr/>
           <p:nvPr/>
         </p:nvSpPr>
         <p:spPr>
           <a:xfrm>
-            <a:off x="841248" y="4809744"/>
-            <a:ext cx="5715000" cy="530352"/>
+            <a:off x="841248" y="4261104"/>
+            <a:ext cx="5138928" cy="786384"/>
           </a:xfrm>
           <a:prstGeom prst="roundRect">
             <a:avLst>
-              <a:gd name="adj" fmla="val 6000"/>
+              <a:gd name="adj" fmla="val 7000"/>
             </a:avLst>
           </a:prstGeom>
           <a:solidFill>
@@ -9207,9 +10424,55 @@
           </a:p>
         </p:txBody>
       </p:sp>
+      <p:sp>
+        <p:nvSpPr>
+          <p:cNvPr id="23" name="Rounded Rectangle 22"/>
+          <p:cNvSpPr/>
+          <p:nvPr/>
+        </p:nvSpPr>
+        <p:spPr>
+          <a:xfrm>
+            <a:off x="987552" y="4398264"/>
+            <a:ext cx="512064" cy="512064"/>
+          </a:xfrm>
+          <a:prstGeom prst="roundRect">
+            <a:avLst>
+              <a:gd name="adj" fmla="val 26000"/>
+            </a:avLst>
+          </a:prstGeom>
+          <a:solidFill>
+            <a:srgbClr val="EE0000"/>
+          </a:solidFill>
+          <a:ln>
+            <a:noFill/>
+          </a:ln>
+          <a:effectLst/>
+        </p:spPr>
+        <p:style>
+          <a:lnRef idx="1">
+            <a:schemeClr val="accent1"/>
+          </a:lnRef>
+          <a:fillRef idx="3">
+            <a:schemeClr val="accent1"/>
+          </a:fillRef>
+          <a:effectRef idx="2">
+            <a:schemeClr val="accent1"/>
+          </a:effectRef>
+          <a:fontRef idx="minor">
+            <a:schemeClr val="lt1"/>
+          </a:fontRef>
+        </p:style>
+        <p:txBody>
+          <a:bodyPr rtlCol="0" anchor="ctr"/>
+          <a:lstStyle/>
+          <a:p>
+            <a:pPr algn="ctr"/>
+          </a:p>
+        </p:txBody>
+      </p:sp>
       <p:pic>
         <p:nvPicPr>
-          <p:cNvPr id="19" name="Picture 18" descr="check_steel.png"/>
+          <p:cNvPr id="24" name="Picture 23" descr="check_white.png"/>
           <p:cNvPicPr>
             <a:picLocks noChangeAspect="1"/>
           </p:cNvPicPr>
@@ -9223,8 +10486,8 @@
         </p:blipFill>
         <p:spPr>
           <a:xfrm>
-            <a:off x="987552" y="4956048"/>
-            <a:ext cx="237744" cy="237744"/>
+            <a:off x="1110447" y="4521159"/>
+            <a:ext cx="266273" cy="266273"/>
           </a:xfrm>
           <a:prstGeom prst="rect">
             <a:avLst/>
@@ -9233,14 +10496,14 @@
       </p:pic>
       <p:sp>
         <p:nvSpPr>
-          <p:cNvPr id="20" name="TextBox 19"/>
+          <p:cNvPr id="25" name="TextBox 24"/>
           <p:cNvSpPr txBox="1"/>
           <p:nvPr/>
         </p:nvSpPr>
         <p:spPr>
           <a:xfrm>
-            <a:off x="1353312" y="4809744"/>
-            <a:ext cx="5029200" cy="530352"/>
+            <a:off x="1627632" y="4261104"/>
+            <a:ext cx="4206240" cy="786384"/>
           </a:xfrm>
           <a:prstGeom prst="rect">
             <a:avLst/>
@@ -9265,221 +10528,13 @@
               </a:spcAft>
             </a:pPr>
             <a:r>
-              <a:rPr sz="1200" b="0">
+              <a:rPr sz="1150" b="0">
                 <a:solidFill>
                   <a:srgbClr val="1A1A1A"/>
                 </a:solidFill>
                 <a:latin typeface="Red Hat Text"/>
               </a:rPr>
               <a:t>Same image everywhere — only config moves</a:t>
-            </a:r>
-          </a:p>
-        </p:txBody>
-      </p:sp>
-      <p:sp>
-        <p:nvSpPr>
-          <p:cNvPr id="21" name="Rounded Rectangle 20"/>
-          <p:cNvSpPr/>
-          <p:nvPr/>
-        </p:nvSpPr>
-        <p:spPr>
-          <a:xfrm>
-            <a:off x="6812280" y="2395728"/>
-            <a:ext cx="4538167" cy="2944368"/>
-          </a:xfrm>
-          <a:prstGeom prst="roundRect">
-            <a:avLst>
-              <a:gd name="adj" fmla="val 4000"/>
-            </a:avLst>
-          </a:prstGeom>
-          <a:solidFill>
-            <a:srgbClr val="FFFFFF"/>
-          </a:solidFill>
-          <a:ln w="15240">
-            <a:solidFill>
-              <a:srgbClr val="DDE1E6"/>
-            </a:solidFill>
-          </a:ln>
-          <a:effectLst/>
-        </p:spPr>
-        <p:style>
-          <a:lnRef idx="1">
-            <a:schemeClr val="accent1"/>
-          </a:lnRef>
-          <a:fillRef idx="3">
-            <a:schemeClr val="accent1"/>
-          </a:fillRef>
-          <a:effectRef idx="2">
-            <a:schemeClr val="accent1"/>
-          </a:effectRef>
-          <a:fontRef idx="minor">
-            <a:schemeClr val="lt1"/>
-          </a:fontRef>
-        </p:style>
-        <p:txBody>
-          <a:bodyPr rtlCol="0" anchor="ctr"/>
-          <a:lstStyle/>
-          <a:p>
-            <a:pPr algn="ctr"/>
-          </a:p>
-        </p:txBody>
-      </p:sp>
-      <p:sp>
-        <p:nvSpPr>
-          <p:cNvPr id="22" name="Rounded Rectangle 21"/>
-          <p:cNvSpPr/>
-          <p:nvPr/>
-        </p:nvSpPr>
-        <p:spPr>
-          <a:xfrm>
-            <a:off x="7013448" y="2596896"/>
-            <a:ext cx="1298448" cy="310896"/>
-          </a:xfrm>
-          <a:prstGeom prst="roundRect">
-            <a:avLst>
-              <a:gd name="adj" fmla="val 50000"/>
-            </a:avLst>
-          </a:prstGeom>
-          <a:solidFill>
-            <a:srgbClr val="FCECEC"/>
-          </a:solidFill>
-          <a:ln>
-            <a:noFill/>
-          </a:ln>
-          <a:effectLst/>
-        </p:spPr>
-        <p:style>
-          <a:lnRef idx="1">
-            <a:schemeClr val="accent1"/>
-          </a:lnRef>
-          <a:fillRef idx="3">
-            <a:schemeClr val="accent1"/>
-          </a:fillRef>
-          <a:effectRef idx="2">
-            <a:schemeClr val="accent1"/>
-          </a:effectRef>
-          <a:fontRef idx="minor">
-            <a:schemeClr val="lt1"/>
-          </a:fontRef>
-        </p:style>
-        <p:txBody>
-          <a:bodyPr rtlCol="0" anchor="ctr"/>
-          <a:lstStyle/>
-          <a:p>
-            <a:pPr algn="ctr"/>
-          </a:p>
-        </p:txBody>
-      </p:sp>
-      <p:sp>
-        <p:nvSpPr>
-          <p:cNvPr id="23" name="TextBox 22"/>
-          <p:cNvSpPr txBox="1"/>
-          <p:nvPr/>
-        </p:nvSpPr>
-        <p:spPr>
-          <a:xfrm>
-            <a:off x="7013448" y="2596896"/>
-            <a:ext cx="1298448" cy="310896"/>
-          </a:xfrm>
-          <a:prstGeom prst="rect">
-            <a:avLst/>
-          </a:prstGeom>
-          <a:noFill/>
-        </p:spPr>
-        <p:txBody>
-          <a:bodyPr wrap="none" anchor="ctr" lIns="0" rIns="0" tIns="0" bIns="0">
-            <a:spAutoFit/>
-          </a:bodyPr>
-          <a:lstStyle/>
-          <a:p>
-            <a:pPr algn="ctr">
-              <a:lnSpc>
-                <a:spcPct val="106000"/>
-              </a:lnSpc>
-              <a:spcBef>
-                <a:spcPts val="0"/>
-              </a:spcBef>
-              <a:spcAft>
-                <a:spcPts val="0"/>
-              </a:spcAft>
-            </a:pPr>
-            <a:r>
-              <a:rPr sz="850" b="1">
-                <a:solidFill>
-                  <a:srgbClr val="B80000"/>
-                </a:solidFill>
-                <a:latin typeface="Red Hat Display"/>
-              </a:rPr>
-              <a:t>MEDIA PASS</a:t>
-            </a:r>
-          </a:p>
-        </p:txBody>
-      </p:sp>
-      <p:pic>
-        <p:nvPicPr>
-          <p:cNvPr id="24" name="Picture 23" descr="eye_slate.png"/>
-          <p:cNvPicPr>
-            <a:picLocks noChangeAspect="1"/>
-          </p:cNvPicPr>
-          <p:nvPr/>
-        </p:nvPicPr>
-        <p:blipFill>
-          <a:blip r:embed="rId4"/>
-          <a:stretch>
-            <a:fillRect/>
-          </a:stretch>
-        </p:blipFill>
-        <p:spPr>
-          <a:xfrm>
-            <a:off x="8843619" y="3108960"/>
-            <a:ext cx="475488" cy="475488"/>
-          </a:xfrm>
-          <a:prstGeom prst="rect">
-            <a:avLst/>
-          </a:prstGeom>
-        </p:spPr>
-      </p:pic>
-      <p:sp>
-        <p:nvSpPr>
-          <p:cNvPr id="25" name="TextBox 24"/>
-          <p:cNvSpPr txBox="1"/>
-          <p:nvPr/>
-        </p:nvSpPr>
-        <p:spPr>
-          <a:xfrm>
-            <a:off x="7050024" y="3721608"/>
-            <a:ext cx="4062679" cy="1481328"/>
-          </a:xfrm>
-          <a:prstGeom prst="rect">
-            <a:avLst/>
-          </a:prstGeom>
-          <a:noFill/>
-        </p:spPr>
-        <p:txBody>
-          <a:bodyPr wrap="square" anchor="t" lIns="0" rIns="0" tIns="0" bIns="0">
-            <a:spAutoFit/>
-          </a:bodyPr>
-          <a:lstStyle/>
-          <a:p>
-            <a:pPr algn="l">
-              <a:lnSpc>
-                <a:spcPct val="120000"/>
-              </a:lnSpc>
-              <a:spcBef>
-                <a:spcPts val="0"/>
-              </a:spcBef>
-              <a:spcAft>
-                <a:spcPts val="0"/>
-              </a:spcAft>
-            </a:pPr>
-            <a:r>
-              <a:rPr sz="950" b="0">
-                <a:solidFill>
-                  <a:srgbClr val="8A9099"/>
-                </a:solidFill>
-                <a:latin typeface="Red Hat Text"/>
-              </a:rPr>
-              <a:t>One base card feeding three overlay cards (dev 1 / stage 2 / prod 3 replicas), all carrying the same image tag; a small "or Helm chart + values" alternative below the base.</a:t>
             </a:r>
           </a:p>
         </p:txBody>
@@ -9787,11 +10842,11 @@
         <p:spPr>
           <a:xfrm>
             <a:off x="841248" y="2395728"/>
-            <a:ext cx="5715000" cy="530352"/>
+            <a:ext cx="5138928" cy="786384"/>
           </a:xfrm>
           <a:prstGeom prst="roundRect">
             <a:avLst>
-              <a:gd name="adj" fmla="val 6000"/>
+              <a:gd name="adj" fmla="val 7000"/>
             </a:avLst>
           </a:prstGeom>
           <a:solidFill>
@@ -9826,9 +10881,55 @@
           </a:p>
         </p:txBody>
       </p:sp>
+      <p:sp>
+        <p:nvSpPr>
+          <p:cNvPr id="7" name="Rounded Rectangle 6"/>
+          <p:cNvSpPr/>
+          <p:nvPr/>
+        </p:nvSpPr>
+        <p:spPr>
+          <a:xfrm>
+            <a:off x="987552" y="2532888"/>
+            <a:ext cx="512064" cy="512064"/>
+          </a:xfrm>
+          <a:prstGeom prst="roundRect">
+            <a:avLst>
+              <a:gd name="adj" fmla="val 26000"/>
+            </a:avLst>
+          </a:prstGeom>
+          <a:solidFill>
+            <a:srgbClr val="EE0000"/>
+          </a:solidFill>
+          <a:ln>
+            <a:noFill/>
+          </a:ln>
+          <a:effectLst/>
+        </p:spPr>
+        <p:style>
+          <a:lnRef idx="1">
+            <a:schemeClr val="accent1"/>
+          </a:lnRef>
+          <a:fillRef idx="3">
+            <a:schemeClr val="accent1"/>
+          </a:fillRef>
+          <a:effectRef idx="2">
+            <a:schemeClr val="accent1"/>
+          </a:effectRef>
+          <a:fontRef idx="minor">
+            <a:schemeClr val="lt1"/>
+          </a:fontRef>
+        </p:style>
+        <p:txBody>
+          <a:bodyPr rtlCol="0" anchor="ctr"/>
+          <a:lstStyle/>
+          <a:p>
+            <a:pPr algn="ctr"/>
+          </a:p>
+        </p:txBody>
+      </p:sp>
       <p:pic>
         <p:nvPicPr>
-          <p:cNvPr id="7" name="Picture 6" descr="check_steel.png"/>
+          <p:cNvPr id="8" name="Picture 7" descr="check_white.png"/>
           <p:cNvPicPr>
             <a:picLocks noChangeAspect="1"/>
           </p:cNvPicPr>
@@ -9842,8 +10943,8 @@
         </p:blipFill>
         <p:spPr>
           <a:xfrm>
-            <a:off x="987552" y="2542032"/>
-            <a:ext cx="237744" cy="237744"/>
+            <a:off x="1110447" y="2655783"/>
+            <a:ext cx="266273" cy="266273"/>
           </a:xfrm>
           <a:prstGeom prst="rect">
             <a:avLst/>
@@ -9852,14 +10953,14 @@
       </p:pic>
       <p:sp>
         <p:nvSpPr>
-          <p:cNvPr id="8" name="TextBox 7"/>
+          <p:cNvPr id="9" name="TextBox 8"/>
           <p:cNvSpPr txBox="1"/>
           <p:nvPr/>
         </p:nvSpPr>
         <p:spPr>
           <a:xfrm>
-            <a:off x="1353312" y="2395728"/>
-            <a:ext cx="5029200" cy="530352"/>
+            <a:off x="1627632" y="2395728"/>
+            <a:ext cx="4206240" cy="786384"/>
           </a:xfrm>
           <a:prstGeom prst="rect">
             <a:avLst/>
@@ -9884,7 +10985,7 @@
               </a:spcAft>
             </a:pPr>
             <a:r>
-              <a:rPr sz="1200" b="0">
+              <a:rPr sz="1150" b="0">
                 <a:solidFill>
                   <a:srgbClr val="1A1A1A"/>
                 </a:solidFill>
@@ -9897,18 +10998,18 @@
       </p:sp>
       <p:sp>
         <p:nvSpPr>
-          <p:cNvPr id="9" name="Rounded Rectangle 8"/>
+          <p:cNvPr id="10" name="Rounded Rectangle 9"/>
           <p:cNvSpPr/>
           <p:nvPr/>
         </p:nvSpPr>
         <p:spPr>
           <a:xfrm>
-            <a:off x="841248" y="2999232"/>
-            <a:ext cx="5715000" cy="530352"/>
+            <a:off x="6254496" y="2395728"/>
+            <a:ext cx="5138928" cy="786384"/>
           </a:xfrm>
           <a:prstGeom prst="roundRect">
             <a:avLst>
-              <a:gd name="adj" fmla="val 6000"/>
+              <a:gd name="adj" fmla="val 7000"/>
             </a:avLst>
           </a:prstGeom>
           <a:solidFill>
@@ -9943,9 +11044,55 @@
           </a:p>
         </p:txBody>
       </p:sp>
+      <p:sp>
+        <p:nvSpPr>
+          <p:cNvPr id="11" name="Rounded Rectangle 10"/>
+          <p:cNvSpPr/>
+          <p:nvPr/>
+        </p:nvSpPr>
+        <p:spPr>
+          <a:xfrm>
+            <a:off x="6400800" y="2532888"/>
+            <a:ext cx="512064" cy="512064"/>
+          </a:xfrm>
+          <a:prstGeom prst="roundRect">
+            <a:avLst>
+              <a:gd name="adj" fmla="val 26000"/>
+            </a:avLst>
+          </a:prstGeom>
+          <a:solidFill>
+            <a:srgbClr val="EE0000"/>
+          </a:solidFill>
+          <a:ln>
+            <a:noFill/>
+          </a:ln>
+          <a:effectLst/>
+        </p:spPr>
+        <p:style>
+          <a:lnRef idx="1">
+            <a:schemeClr val="accent1"/>
+          </a:lnRef>
+          <a:fillRef idx="3">
+            <a:schemeClr val="accent1"/>
+          </a:fillRef>
+          <a:effectRef idx="2">
+            <a:schemeClr val="accent1"/>
+          </a:effectRef>
+          <a:fontRef idx="minor">
+            <a:schemeClr val="lt1"/>
+          </a:fontRef>
+        </p:style>
+        <p:txBody>
+          <a:bodyPr rtlCol="0" anchor="ctr"/>
+          <a:lstStyle/>
+          <a:p>
+            <a:pPr algn="ctr"/>
+          </a:p>
+        </p:txBody>
+      </p:sp>
       <p:pic>
         <p:nvPicPr>
-          <p:cNvPr id="10" name="Picture 9" descr="check_steel.png"/>
+          <p:cNvPr id="12" name="Picture 11" descr="check_white.png"/>
           <p:cNvPicPr>
             <a:picLocks noChangeAspect="1"/>
           </p:cNvPicPr>
@@ -9959,8 +11106,8 @@
         </p:blipFill>
         <p:spPr>
           <a:xfrm>
-            <a:off x="987552" y="3145536"/>
-            <a:ext cx="237744" cy="237744"/>
+            <a:off x="6523695" y="2655783"/>
+            <a:ext cx="266273" cy="266273"/>
           </a:xfrm>
           <a:prstGeom prst="rect">
             <a:avLst/>
@@ -9969,14 +11116,14 @@
       </p:pic>
       <p:sp>
         <p:nvSpPr>
-          <p:cNvPr id="11" name="TextBox 10"/>
+          <p:cNvPr id="13" name="TextBox 12"/>
           <p:cNvSpPr txBox="1"/>
           <p:nvPr/>
         </p:nvSpPr>
         <p:spPr>
           <a:xfrm>
-            <a:off x="1353312" y="2999232"/>
-            <a:ext cx="5029200" cy="530352"/>
+            <a:off x="7040880" y="2395728"/>
+            <a:ext cx="4206240" cy="786384"/>
           </a:xfrm>
           <a:prstGeom prst="rect">
             <a:avLst/>
@@ -10001,7 +11148,7 @@
               </a:spcAft>
             </a:pPr>
             <a:r>
-              <a:rPr sz="1200" b="0">
+              <a:rPr sz="1150" b="0">
                 <a:solidFill>
                   <a:srgbClr val="1A1A1A"/>
                 </a:solidFill>
@@ -10014,18 +11161,18 @@
       </p:sp>
       <p:sp>
         <p:nvSpPr>
-          <p:cNvPr id="12" name="Rounded Rectangle 11"/>
+          <p:cNvPr id="14" name="Rounded Rectangle 13"/>
           <p:cNvSpPr/>
           <p:nvPr/>
         </p:nvSpPr>
         <p:spPr>
           <a:xfrm>
-            <a:off x="841248" y="3602736"/>
-            <a:ext cx="5715000" cy="530352"/>
+            <a:off x="841248" y="3328416"/>
+            <a:ext cx="5138928" cy="786384"/>
           </a:xfrm>
           <a:prstGeom prst="roundRect">
             <a:avLst>
-              <a:gd name="adj" fmla="val 6000"/>
+              <a:gd name="adj" fmla="val 7000"/>
             </a:avLst>
           </a:prstGeom>
           <a:solidFill>
@@ -10060,9 +11207,55 @@
           </a:p>
         </p:txBody>
       </p:sp>
+      <p:sp>
+        <p:nvSpPr>
+          <p:cNvPr id="15" name="Rounded Rectangle 14"/>
+          <p:cNvSpPr/>
+          <p:nvPr/>
+        </p:nvSpPr>
+        <p:spPr>
+          <a:xfrm>
+            <a:off x="987552" y="3465576"/>
+            <a:ext cx="512064" cy="512064"/>
+          </a:xfrm>
+          <a:prstGeom prst="roundRect">
+            <a:avLst>
+              <a:gd name="adj" fmla="val 26000"/>
+            </a:avLst>
+          </a:prstGeom>
+          <a:solidFill>
+            <a:srgbClr val="EE0000"/>
+          </a:solidFill>
+          <a:ln>
+            <a:noFill/>
+          </a:ln>
+          <a:effectLst/>
+        </p:spPr>
+        <p:style>
+          <a:lnRef idx="1">
+            <a:schemeClr val="accent1"/>
+          </a:lnRef>
+          <a:fillRef idx="3">
+            <a:schemeClr val="accent1"/>
+          </a:fillRef>
+          <a:effectRef idx="2">
+            <a:schemeClr val="accent1"/>
+          </a:effectRef>
+          <a:fontRef idx="minor">
+            <a:schemeClr val="lt1"/>
+          </a:fontRef>
+        </p:style>
+        <p:txBody>
+          <a:bodyPr rtlCol="0" anchor="ctr"/>
+          <a:lstStyle/>
+          <a:p>
+            <a:pPr algn="ctr"/>
+          </a:p>
+        </p:txBody>
+      </p:sp>
       <p:pic>
         <p:nvPicPr>
-          <p:cNvPr id="13" name="Picture 12" descr="check_steel.png"/>
+          <p:cNvPr id="16" name="Picture 15" descr="check_white.png"/>
           <p:cNvPicPr>
             <a:picLocks noChangeAspect="1"/>
           </p:cNvPicPr>
@@ -10076,8 +11269,8 @@
         </p:blipFill>
         <p:spPr>
           <a:xfrm>
-            <a:off x="987552" y="3749040"/>
-            <a:ext cx="237744" cy="237744"/>
+            <a:off x="1110447" y="3588471"/>
+            <a:ext cx="266273" cy="266273"/>
           </a:xfrm>
           <a:prstGeom prst="rect">
             <a:avLst/>
@@ -10086,14 +11279,14 @@
       </p:pic>
       <p:sp>
         <p:nvSpPr>
-          <p:cNvPr id="14" name="TextBox 13"/>
+          <p:cNvPr id="17" name="TextBox 16"/>
           <p:cNvSpPr txBox="1"/>
           <p:nvPr/>
         </p:nvSpPr>
         <p:spPr>
           <a:xfrm>
-            <a:off x="1353312" y="3602736"/>
-            <a:ext cx="5029200" cy="530352"/>
+            <a:off x="1627632" y="3328416"/>
+            <a:ext cx="4206240" cy="786384"/>
           </a:xfrm>
           <a:prstGeom prst="rect">
             <a:avLst/>
@@ -10118,7 +11311,7 @@
               </a:spcAft>
             </a:pPr>
             <a:r>
-              <a:rPr sz="1200" b="0">
+              <a:rPr sz="1150" b="0">
                 <a:solidFill>
                   <a:srgbClr val="1A1A1A"/>
                 </a:solidFill>
@@ -10131,18 +11324,18 @@
       </p:sp>
       <p:sp>
         <p:nvSpPr>
-          <p:cNvPr id="15" name="Rounded Rectangle 14"/>
+          <p:cNvPr id="18" name="Rounded Rectangle 17"/>
           <p:cNvSpPr/>
           <p:nvPr/>
         </p:nvSpPr>
         <p:spPr>
           <a:xfrm>
-            <a:off x="841248" y="4206240"/>
-            <a:ext cx="5715000" cy="530352"/>
+            <a:off x="6254496" y="3328416"/>
+            <a:ext cx="5138928" cy="786384"/>
           </a:xfrm>
           <a:prstGeom prst="roundRect">
             <a:avLst>
-              <a:gd name="adj" fmla="val 6000"/>
+              <a:gd name="adj" fmla="val 7000"/>
             </a:avLst>
           </a:prstGeom>
           <a:solidFill>
@@ -10177,9 +11370,55 @@
           </a:p>
         </p:txBody>
       </p:sp>
+      <p:sp>
+        <p:nvSpPr>
+          <p:cNvPr id="19" name="Rounded Rectangle 18"/>
+          <p:cNvSpPr/>
+          <p:nvPr/>
+        </p:nvSpPr>
+        <p:spPr>
+          <a:xfrm>
+            <a:off x="6400800" y="3465576"/>
+            <a:ext cx="512064" cy="512064"/>
+          </a:xfrm>
+          <a:prstGeom prst="roundRect">
+            <a:avLst>
+              <a:gd name="adj" fmla="val 26000"/>
+            </a:avLst>
+          </a:prstGeom>
+          <a:solidFill>
+            <a:srgbClr val="EE0000"/>
+          </a:solidFill>
+          <a:ln>
+            <a:noFill/>
+          </a:ln>
+          <a:effectLst/>
+        </p:spPr>
+        <p:style>
+          <a:lnRef idx="1">
+            <a:schemeClr val="accent1"/>
+          </a:lnRef>
+          <a:fillRef idx="3">
+            <a:schemeClr val="accent1"/>
+          </a:fillRef>
+          <a:effectRef idx="2">
+            <a:schemeClr val="accent1"/>
+          </a:effectRef>
+          <a:fontRef idx="minor">
+            <a:schemeClr val="lt1"/>
+          </a:fontRef>
+        </p:style>
+        <p:txBody>
+          <a:bodyPr rtlCol="0" anchor="ctr"/>
+          <a:lstStyle/>
+          <a:p>
+            <a:pPr algn="ctr"/>
+          </a:p>
+        </p:txBody>
+      </p:sp>
       <p:pic>
         <p:nvPicPr>
-          <p:cNvPr id="16" name="Picture 15" descr="check_steel.png"/>
+          <p:cNvPr id="20" name="Picture 19" descr="check_white.png"/>
           <p:cNvPicPr>
             <a:picLocks noChangeAspect="1"/>
           </p:cNvPicPr>
@@ -10193,8 +11432,8 @@
         </p:blipFill>
         <p:spPr>
           <a:xfrm>
-            <a:off x="987552" y="4352544"/>
-            <a:ext cx="237744" cy="237744"/>
+            <a:off x="6523695" y="3588471"/>
+            <a:ext cx="266273" cy="266273"/>
           </a:xfrm>
           <a:prstGeom prst="rect">
             <a:avLst/>
@@ -10203,14 +11442,14 @@
       </p:pic>
       <p:sp>
         <p:nvSpPr>
-          <p:cNvPr id="17" name="TextBox 16"/>
+          <p:cNvPr id="21" name="TextBox 20"/>
           <p:cNvSpPr txBox="1"/>
           <p:nvPr/>
         </p:nvSpPr>
         <p:spPr>
           <a:xfrm>
-            <a:off x="1353312" y="4206240"/>
-            <a:ext cx="5029200" cy="530352"/>
+            <a:off x="7040880" y="3328416"/>
+            <a:ext cx="4206240" cy="786384"/>
           </a:xfrm>
           <a:prstGeom prst="rect">
             <a:avLst/>
@@ -10235,7 +11474,7 @@
               </a:spcAft>
             </a:pPr>
             <a:r>
-              <a:rPr sz="1200" b="0">
+              <a:rPr sz="1150" b="0">
                 <a:solidFill>
                   <a:srgbClr val="1A1A1A"/>
                 </a:solidFill>
@@ -10248,18 +11487,18 @@
       </p:sp>
       <p:sp>
         <p:nvSpPr>
-          <p:cNvPr id="18" name="Rounded Rectangle 17"/>
+          <p:cNvPr id="22" name="Rounded Rectangle 21"/>
           <p:cNvSpPr/>
           <p:nvPr/>
         </p:nvSpPr>
         <p:spPr>
           <a:xfrm>
-            <a:off x="841248" y="4809744"/>
-            <a:ext cx="5715000" cy="530352"/>
+            <a:off x="841248" y="4261104"/>
+            <a:ext cx="5138928" cy="786384"/>
           </a:xfrm>
           <a:prstGeom prst="roundRect">
             <a:avLst>
-              <a:gd name="adj" fmla="val 6000"/>
+              <a:gd name="adj" fmla="val 7000"/>
             </a:avLst>
           </a:prstGeom>
           <a:solidFill>
@@ -10294,9 +11533,55 @@
           </a:p>
         </p:txBody>
       </p:sp>
+      <p:sp>
+        <p:nvSpPr>
+          <p:cNvPr id="23" name="Rounded Rectangle 22"/>
+          <p:cNvSpPr/>
+          <p:nvPr/>
+        </p:nvSpPr>
+        <p:spPr>
+          <a:xfrm>
+            <a:off x="987552" y="4398264"/>
+            <a:ext cx="512064" cy="512064"/>
+          </a:xfrm>
+          <a:prstGeom prst="roundRect">
+            <a:avLst>
+              <a:gd name="adj" fmla="val 26000"/>
+            </a:avLst>
+          </a:prstGeom>
+          <a:solidFill>
+            <a:srgbClr val="EE0000"/>
+          </a:solidFill>
+          <a:ln>
+            <a:noFill/>
+          </a:ln>
+          <a:effectLst/>
+        </p:spPr>
+        <p:style>
+          <a:lnRef idx="1">
+            <a:schemeClr val="accent1"/>
+          </a:lnRef>
+          <a:fillRef idx="3">
+            <a:schemeClr val="accent1"/>
+          </a:fillRef>
+          <a:effectRef idx="2">
+            <a:schemeClr val="accent1"/>
+          </a:effectRef>
+          <a:fontRef idx="minor">
+            <a:schemeClr val="lt1"/>
+          </a:fontRef>
+        </p:style>
+        <p:txBody>
+          <a:bodyPr rtlCol="0" anchor="ctr"/>
+          <a:lstStyle/>
+          <a:p>
+            <a:pPr algn="ctr"/>
+          </a:p>
+        </p:txBody>
+      </p:sp>
       <p:pic>
         <p:nvPicPr>
-          <p:cNvPr id="19" name="Picture 18" descr="check_steel.png"/>
+          <p:cNvPr id="24" name="Picture 23" descr="check_white.png"/>
           <p:cNvPicPr>
             <a:picLocks noChangeAspect="1"/>
           </p:cNvPicPr>
@@ -10310,8 +11595,8 @@
         </p:blipFill>
         <p:spPr>
           <a:xfrm>
-            <a:off x="987552" y="4956048"/>
-            <a:ext cx="237744" cy="237744"/>
+            <a:off x="1110447" y="4521159"/>
+            <a:ext cx="266273" cy="266273"/>
           </a:xfrm>
           <a:prstGeom prst="rect">
             <a:avLst/>
@@ -10320,14 +11605,14 @@
       </p:pic>
       <p:sp>
         <p:nvSpPr>
-          <p:cNvPr id="20" name="TextBox 19"/>
+          <p:cNvPr id="25" name="TextBox 24"/>
           <p:cNvSpPr txBox="1"/>
           <p:nvPr/>
         </p:nvSpPr>
         <p:spPr>
           <a:xfrm>
-            <a:off x="1353312" y="4809744"/>
-            <a:ext cx="5029200" cy="530352"/>
+            <a:off x="1627632" y="4261104"/>
+            <a:ext cx="4206240" cy="786384"/>
           </a:xfrm>
           <a:prstGeom prst="rect">
             <a:avLst/>
@@ -10352,221 +11637,13 @@
               </a:spcAft>
             </a:pPr>
             <a:r>
-              <a:rPr sz="1200" b="0">
+              <a:rPr sz="1150" b="0">
                 <a:solidFill>
                   <a:srgbClr val="1A1A1A"/>
                 </a:solidFill>
                 <a:latin typeface="Red Hat Text"/>
               </a:rPr>
               <a:t>All in your own dev and stage namespaces</a:t>
-            </a:r>
-          </a:p>
-        </p:txBody>
-      </p:sp>
-      <p:sp>
-        <p:nvSpPr>
-          <p:cNvPr id="21" name="Rounded Rectangle 20"/>
-          <p:cNvSpPr/>
-          <p:nvPr/>
-        </p:nvSpPr>
-        <p:spPr>
-          <a:xfrm>
-            <a:off x="6812280" y="2395728"/>
-            <a:ext cx="4538167" cy="2944368"/>
-          </a:xfrm>
-          <a:prstGeom prst="roundRect">
-            <a:avLst>
-              <a:gd name="adj" fmla="val 4000"/>
-            </a:avLst>
-          </a:prstGeom>
-          <a:solidFill>
-            <a:srgbClr val="FFFFFF"/>
-          </a:solidFill>
-          <a:ln w="15240">
-            <a:solidFill>
-              <a:srgbClr val="DDE1E6"/>
-            </a:solidFill>
-          </a:ln>
-          <a:effectLst/>
-        </p:spPr>
-        <p:style>
-          <a:lnRef idx="1">
-            <a:schemeClr val="accent1"/>
-          </a:lnRef>
-          <a:fillRef idx="3">
-            <a:schemeClr val="accent1"/>
-          </a:fillRef>
-          <a:effectRef idx="2">
-            <a:schemeClr val="accent1"/>
-          </a:effectRef>
-          <a:fontRef idx="minor">
-            <a:schemeClr val="lt1"/>
-          </a:fontRef>
-        </p:style>
-        <p:txBody>
-          <a:bodyPr rtlCol="0" anchor="ctr"/>
-          <a:lstStyle/>
-          <a:p>
-            <a:pPr algn="ctr"/>
-          </a:p>
-        </p:txBody>
-      </p:sp>
-      <p:sp>
-        <p:nvSpPr>
-          <p:cNvPr id="22" name="Rounded Rectangle 21"/>
-          <p:cNvSpPr/>
-          <p:nvPr/>
-        </p:nvSpPr>
-        <p:spPr>
-          <a:xfrm>
-            <a:off x="7013448" y="2596896"/>
-            <a:ext cx="1298448" cy="310896"/>
-          </a:xfrm>
-          <a:prstGeom prst="roundRect">
-            <a:avLst>
-              <a:gd name="adj" fmla="val 50000"/>
-            </a:avLst>
-          </a:prstGeom>
-          <a:solidFill>
-            <a:srgbClr val="FCECEC"/>
-          </a:solidFill>
-          <a:ln>
-            <a:noFill/>
-          </a:ln>
-          <a:effectLst/>
-        </p:spPr>
-        <p:style>
-          <a:lnRef idx="1">
-            <a:schemeClr val="accent1"/>
-          </a:lnRef>
-          <a:fillRef idx="3">
-            <a:schemeClr val="accent1"/>
-          </a:fillRef>
-          <a:effectRef idx="2">
-            <a:schemeClr val="accent1"/>
-          </a:effectRef>
-          <a:fontRef idx="minor">
-            <a:schemeClr val="lt1"/>
-          </a:fontRef>
-        </p:style>
-        <p:txBody>
-          <a:bodyPr rtlCol="0" anchor="ctr"/>
-          <a:lstStyle/>
-          <a:p>
-            <a:pPr algn="ctr"/>
-          </a:p>
-        </p:txBody>
-      </p:sp>
-      <p:sp>
-        <p:nvSpPr>
-          <p:cNvPr id="23" name="TextBox 22"/>
-          <p:cNvSpPr txBox="1"/>
-          <p:nvPr/>
-        </p:nvSpPr>
-        <p:spPr>
-          <a:xfrm>
-            <a:off x="7013448" y="2596896"/>
-            <a:ext cx="1298448" cy="310896"/>
-          </a:xfrm>
-          <a:prstGeom prst="rect">
-            <a:avLst/>
-          </a:prstGeom>
-          <a:noFill/>
-        </p:spPr>
-        <p:txBody>
-          <a:bodyPr wrap="none" anchor="ctr" lIns="0" rIns="0" tIns="0" bIns="0">
-            <a:spAutoFit/>
-          </a:bodyPr>
-          <a:lstStyle/>
-          <a:p>
-            <a:pPr algn="ctr">
-              <a:lnSpc>
-                <a:spcPct val="106000"/>
-              </a:lnSpc>
-              <a:spcBef>
-                <a:spcPts val="0"/>
-              </a:spcBef>
-              <a:spcAft>
-                <a:spcPts val="0"/>
-              </a:spcAft>
-            </a:pPr>
-            <a:r>
-              <a:rPr sz="850" b="1">
-                <a:solidFill>
-                  <a:srgbClr val="B80000"/>
-                </a:solidFill>
-                <a:latin typeface="Red Hat Display"/>
-              </a:rPr>
-              <a:t>MEDIA PASS</a:t>
-            </a:r>
-          </a:p>
-        </p:txBody>
-      </p:sp>
-      <p:pic>
-        <p:nvPicPr>
-          <p:cNvPr id="24" name="Picture 23" descr="eye_slate.png"/>
-          <p:cNvPicPr>
-            <a:picLocks noChangeAspect="1"/>
-          </p:cNvPicPr>
-          <p:nvPr/>
-        </p:nvPicPr>
-        <p:blipFill>
-          <a:blip r:embed="rId4"/>
-          <a:stretch>
-            <a:fillRect/>
-          </a:stretch>
-        </p:blipFill>
-        <p:spPr>
-          <a:xfrm>
-            <a:off x="8843619" y="3108960"/>
-            <a:ext cx="475488" cy="475488"/>
-          </a:xfrm>
-          <a:prstGeom prst="rect">
-            <a:avLst/>
-          </a:prstGeom>
-        </p:spPr>
-      </p:pic>
-      <p:sp>
-        <p:nvSpPr>
-          <p:cNvPr id="25" name="TextBox 24"/>
-          <p:cNvSpPr txBox="1"/>
-          <p:nvPr/>
-        </p:nvSpPr>
-        <p:spPr>
-          <a:xfrm>
-            <a:off x="7050024" y="3721608"/>
-            <a:ext cx="4062679" cy="1481328"/>
-          </a:xfrm>
-          <a:prstGeom prst="rect">
-            <a:avLst/>
-          </a:prstGeom>
-          <a:noFill/>
-        </p:spPr>
-        <p:txBody>
-          <a:bodyPr wrap="square" anchor="t" lIns="0" rIns="0" tIns="0" bIns="0">
-            <a:spAutoFit/>
-          </a:bodyPr>
-          <a:lstStyle/>
-          <a:p>
-            <a:pPr algn="l">
-              <a:lnSpc>
-                <a:spcPct val="120000"/>
-              </a:lnSpc>
-              <a:spcBef>
-                <a:spcPts val="0"/>
-              </a:spcBef>
-              <a:spcAft>
-                <a:spcPts val="0"/>
-              </a:spcAft>
-            </a:pPr>
-            <a:r>
-              <a:rPr sz="950" b="0">
-                <a:solidFill>
-                  <a:srgbClr val="8A9099"/>
-                </a:solidFill>
-                <a:latin typeface="Red Hat Text"/>
-              </a:rPr>
-              <a:t>Numbered arc strip: tour repo → create + sync app → drift + revert → git-driven change to stage.</a:t>
             </a:r>
           </a:p>
         </p:txBody>
@@ -10874,11 +11951,11 @@
         <p:spPr>
           <a:xfrm>
             <a:off x="841248" y="2395728"/>
-            <a:ext cx="5715000" cy="530352"/>
+            <a:ext cx="5138928" cy="786384"/>
           </a:xfrm>
           <a:prstGeom prst="roundRect">
             <a:avLst>
-              <a:gd name="adj" fmla="val 6000"/>
+              <a:gd name="adj" fmla="val 7000"/>
             </a:avLst>
           </a:prstGeom>
           <a:solidFill>
@@ -10913,9 +11990,55 @@
           </a:p>
         </p:txBody>
       </p:sp>
+      <p:sp>
+        <p:nvSpPr>
+          <p:cNvPr id="7" name="Rounded Rectangle 6"/>
+          <p:cNvSpPr/>
+          <p:nvPr/>
+        </p:nvSpPr>
+        <p:spPr>
+          <a:xfrm>
+            <a:off x="987552" y="2532888"/>
+            <a:ext cx="512064" cy="512064"/>
+          </a:xfrm>
+          <a:prstGeom prst="roundRect">
+            <a:avLst>
+              <a:gd name="adj" fmla="val 26000"/>
+            </a:avLst>
+          </a:prstGeom>
+          <a:solidFill>
+            <a:srgbClr val="EE0000"/>
+          </a:solidFill>
+          <a:ln>
+            <a:noFill/>
+          </a:ln>
+          <a:effectLst/>
+        </p:spPr>
+        <p:style>
+          <a:lnRef idx="1">
+            <a:schemeClr val="accent1"/>
+          </a:lnRef>
+          <a:fillRef idx="3">
+            <a:schemeClr val="accent1"/>
+          </a:fillRef>
+          <a:effectRef idx="2">
+            <a:schemeClr val="accent1"/>
+          </a:effectRef>
+          <a:fontRef idx="minor">
+            <a:schemeClr val="lt1"/>
+          </a:fontRef>
+        </p:style>
+        <p:txBody>
+          <a:bodyPr rtlCol="0" anchor="ctr"/>
+          <a:lstStyle/>
+          <a:p>
+            <a:pPr algn="ctr"/>
+          </a:p>
+        </p:txBody>
+      </p:sp>
       <p:pic>
         <p:nvPicPr>
-          <p:cNvPr id="7" name="Picture 6" descr="check_steel.png"/>
+          <p:cNvPr id="8" name="Picture 7" descr="check_white.png"/>
           <p:cNvPicPr>
             <a:picLocks noChangeAspect="1"/>
           </p:cNvPicPr>
@@ -10929,8 +12052,8 @@
         </p:blipFill>
         <p:spPr>
           <a:xfrm>
-            <a:off x="987552" y="2542032"/>
-            <a:ext cx="237744" cy="237744"/>
+            <a:off x="1110447" y="2655783"/>
+            <a:ext cx="266273" cy="266273"/>
           </a:xfrm>
           <a:prstGeom prst="rect">
             <a:avLst/>
@@ -10939,14 +12062,14 @@
       </p:pic>
       <p:sp>
         <p:nvSpPr>
-          <p:cNvPr id="8" name="TextBox 7"/>
+          <p:cNvPr id="9" name="TextBox 8"/>
           <p:cNvSpPr txBox="1"/>
           <p:nvPr/>
         </p:nvSpPr>
         <p:spPr>
           <a:xfrm>
-            <a:off x="1353312" y="2395728"/>
-            <a:ext cx="5029200" cy="530352"/>
+            <a:off x="1627632" y="2395728"/>
+            <a:ext cx="4206240" cy="786384"/>
           </a:xfrm>
           <a:prstGeom prst="rect">
             <a:avLst/>
@@ -10971,7 +12094,7 @@
               </a:spcAft>
             </a:pPr>
             <a:r>
-              <a:rPr sz="1200" b="0">
+              <a:rPr sz="1150" b="0">
                 <a:solidFill>
                   <a:srgbClr val="1A1A1A"/>
                 </a:solidFill>
@@ -10984,18 +12107,18 @@
       </p:sp>
       <p:sp>
         <p:nvSpPr>
-          <p:cNvPr id="9" name="Rounded Rectangle 8"/>
+          <p:cNvPr id="10" name="Rounded Rectangle 9"/>
           <p:cNvSpPr/>
           <p:nvPr/>
         </p:nvSpPr>
         <p:spPr>
           <a:xfrm>
-            <a:off x="841248" y="2999232"/>
-            <a:ext cx="5715000" cy="530352"/>
+            <a:off x="6254496" y="2395728"/>
+            <a:ext cx="5138928" cy="786384"/>
           </a:xfrm>
           <a:prstGeom prst="roundRect">
             <a:avLst>
-              <a:gd name="adj" fmla="val 6000"/>
+              <a:gd name="adj" fmla="val 7000"/>
             </a:avLst>
           </a:prstGeom>
           <a:solidFill>
@@ -11030,9 +12153,55 @@
           </a:p>
         </p:txBody>
       </p:sp>
+      <p:sp>
+        <p:nvSpPr>
+          <p:cNvPr id="11" name="Rounded Rectangle 10"/>
+          <p:cNvSpPr/>
+          <p:nvPr/>
+        </p:nvSpPr>
+        <p:spPr>
+          <a:xfrm>
+            <a:off x="6400800" y="2532888"/>
+            <a:ext cx="512064" cy="512064"/>
+          </a:xfrm>
+          <a:prstGeom prst="roundRect">
+            <a:avLst>
+              <a:gd name="adj" fmla="val 26000"/>
+            </a:avLst>
+          </a:prstGeom>
+          <a:solidFill>
+            <a:srgbClr val="EE0000"/>
+          </a:solidFill>
+          <a:ln>
+            <a:noFill/>
+          </a:ln>
+          <a:effectLst/>
+        </p:spPr>
+        <p:style>
+          <a:lnRef idx="1">
+            <a:schemeClr val="accent1"/>
+          </a:lnRef>
+          <a:fillRef idx="3">
+            <a:schemeClr val="accent1"/>
+          </a:fillRef>
+          <a:effectRef idx="2">
+            <a:schemeClr val="accent1"/>
+          </a:effectRef>
+          <a:fontRef idx="minor">
+            <a:schemeClr val="lt1"/>
+          </a:fontRef>
+        </p:style>
+        <p:txBody>
+          <a:bodyPr rtlCol="0" anchor="ctr"/>
+          <a:lstStyle/>
+          <a:p>
+            <a:pPr algn="ctr"/>
+          </a:p>
+        </p:txBody>
+      </p:sp>
       <p:pic>
         <p:nvPicPr>
-          <p:cNvPr id="10" name="Picture 9" descr="check_steel.png"/>
+          <p:cNvPr id="12" name="Picture 11" descr="check_white.png"/>
           <p:cNvPicPr>
             <a:picLocks noChangeAspect="1"/>
           </p:cNvPicPr>
@@ -11046,8 +12215,8 @@
         </p:blipFill>
         <p:spPr>
           <a:xfrm>
-            <a:off x="987552" y="3145536"/>
-            <a:ext cx="237744" cy="237744"/>
+            <a:off x="6523695" y="2655783"/>
+            <a:ext cx="266273" cy="266273"/>
           </a:xfrm>
           <a:prstGeom prst="rect">
             <a:avLst/>
@@ -11056,14 +12225,14 @@
       </p:pic>
       <p:sp>
         <p:nvSpPr>
-          <p:cNvPr id="11" name="TextBox 10"/>
+          <p:cNvPr id="13" name="TextBox 12"/>
           <p:cNvSpPr txBox="1"/>
           <p:nvPr/>
         </p:nvSpPr>
         <p:spPr>
           <a:xfrm>
-            <a:off x="1353312" y="2999232"/>
-            <a:ext cx="5029200" cy="530352"/>
+            <a:off x="7040880" y="2395728"/>
+            <a:ext cx="4206240" cy="786384"/>
           </a:xfrm>
           <a:prstGeom prst="rect">
             <a:avLst/>
@@ -11088,7 +12257,7 @@
               </a:spcAft>
             </a:pPr>
             <a:r>
-              <a:rPr sz="1200" b="0">
+              <a:rPr sz="1150" b="0">
                 <a:solidFill>
                   <a:srgbClr val="1A1A1A"/>
                 </a:solidFill>
@@ -11101,18 +12270,18 @@
       </p:sp>
       <p:sp>
         <p:nvSpPr>
-          <p:cNvPr id="12" name="Rounded Rectangle 11"/>
+          <p:cNvPr id="14" name="Rounded Rectangle 13"/>
           <p:cNvSpPr/>
           <p:nvPr/>
         </p:nvSpPr>
         <p:spPr>
           <a:xfrm>
-            <a:off x="841248" y="3602736"/>
-            <a:ext cx="5715000" cy="530352"/>
+            <a:off x="841248" y="3328416"/>
+            <a:ext cx="5138928" cy="786384"/>
           </a:xfrm>
           <a:prstGeom prst="roundRect">
             <a:avLst>
-              <a:gd name="adj" fmla="val 6000"/>
+              <a:gd name="adj" fmla="val 7000"/>
             </a:avLst>
           </a:prstGeom>
           <a:solidFill>
@@ -11147,9 +12316,55 @@
           </a:p>
         </p:txBody>
       </p:sp>
+      <p:sp>
+        <p:nvSpPr>
+          <p:cNvPr id="15" name="Rounded Rectangle 14"/>
+          <p:cNvSpPr/>
+          <p:nvPr/>
+        </p:nvSpPr>
+        <p:spPr>
+          <a:xfrm>
+            <a:off x="987552" y="3465576"/>
+            <a:ext cx="512064" cy="512064"/>
+          </a:xfrm>
+          <a:prstGeom prst="roundRect">
+            <a:avLst>
+              <a:gd name="adj" fmla="val 26000"/>
+            </a:avLst>
+          </a:prstGeom>
+          <a:solidFill>
+            <a:srgbClr val="EE0000"/>
+          </a:solidFill>
+          <a:ln>
+            <a:noFill/>
+          </a:ln>
+          <a:effectLst/>
+        </p:spPr>
+        <p:style>
+          <a:lnRef idx="1">
+            <a:schemeClr val="accent1"/>
+          </a:lnRef>
+          <a:fillRef idx="3">
+            <a:schemeClr val="accent1"/>
+          </a:fillRef>
+          <a:effectRef idx="2">
+            <a:schemeClr val="accent1"/>
+          </a:effectRef>
+          <a:fontRef idx="minor">
+            <a:schemeClr val="lt1"/>
+          </a:fontRef>
+        </p:style>
+        <p:txBody>
+          <a:bodyPr rtlCol="0" anchor="ctr"/>
+          <a:lstStyle/>
+          <a:p>
+            <a:pPr algn="ctr"/>
+          </a:p>
+        </p:txBody>
+      </p:sp>
       <p:pic>
         <p:nvPicPr>
-          <p:cNvPr id="13" name="Picture 12" descr="check_steel.png"/>
+          <p:cNvPr id="16" name="Picture 15" descr="check_white.png"/>
           <p:cNvPicPr>
             <a:picLocks noChangeAspect="1"/>
           </p:cNvPicPr>
@@ -11163,8 +12378,8 @@
         </p:blipFill>
         <p:spPr>
           <a:xfrm>
-            <a:off x="987552" y="3749040"/>
-            <a:ext cx="237744" cy="237744"/>
+            <a:off x="1110447" y="3588471"/>
+            <a:ext cx="266273" cy="266273"/>
           </a:xfrm>
           <a:prstGeom prst="rect">
             <a:avLst/>
@@ -11173,14 +12388,14 @@
       </p:pic>
       <p:sp>
         <p:nvSpPr>
-          <p:cNvPr id="14" name="TextBox 13"/>
+          <p:cNvPr id="17" name="TextBox 16"/>
           <p:cNvSpPr txBox="1"/>
           <p:nvPr/>
         </p:nvSpPr>
         <p:spPr>
           <a:xfrm>
-            <a:off x="1353312" y="3602736"/>
-            <a:ext cx="5029200" cy="530352"/>
+            <a:off x="1627632" y="3328416"/>
+            <a:ext cx="4206240" cy="786384"/>
           </a:xfrm>
           <a:prstGeom prst="rect">
             <a:avLst/>
@@ -11205,7 +12420,7 @@
               </a:spcAft>
             </a:pPr>
             <a:r>
-              <a:rPr sz="1200" b="0">
+              <a:rPr sz="1150" b="0">
                 <a:solidFill>
                   <a:srgbClr val="1A1A1A"/>
                 </a:solidFill>
@@ -11218,18 +12433,18 @@
       </p:sp>
       <p:sp>
         <p:nvSpPr>
-          <p:cNvPr id="15" name="Rounded Rectangle 14"/>
+          <p:cNvPr id="18" name="Rounded Rectangle 17"/>
           <p:cNvSpPr/>
           <p:nvPr/>
         </p:nvSpPr>
         <p:spPr>
           <a:xfrm>
-            <a:off x="841248" y="4206240"/>
-            <a:ext cx="5715000" cy="530352"/>
+            <a:off x="6254496" y="3328416"/>
+            <a:ext cx="5138928" cy="786384"/>
           </a:xfrm>
           <a:prstGeom prst="roundRect">
             <a:avLst>
-              <a:gd name="adj" fmla="val 6000"/>
+              <a:gd name="adj" fmla="val 7000"/>
             </a:avLst>
           </a:prstGeom>
           <a:solidFill>
@@ -11264,9 +12479,55 @@
           </a:p>
         </p:txBody>
       </p:sp>
+      <p:sp>
+        <p:nvSpPr>
+          <p:cNvPr id="19" name="Rounded Rectangle 18"/>
+          <p:cNvSpPr/>
+          <p:nvPr/>
+        </p:nvSpPr>
+        <p:spPr>
+          <a:xfrm>
+            <a:off x="6400800" y="3465576"/>
+            <a:ext cx="512064" cy="512064"/>
+          </a:xfrm>
+          <a:prstGeom prst="roundRect">
+            <a:avLst>
+              <a:gd name="adj" fmla="val 26000"/>
+            </a:avLst>
+          </a:prstGeom>
+          <a:solidFill>
+            <a:srgbClr val="EE0000"/>
+          </a:solidFill>
+          <a:ln>
+            <a:noFill/>
+          </a:ln>
+          <a:effectLst/>
+        </p:spPr>
+        <p:style>
+          <a:lnRef idx="1">
+            <a:schemeClr val="accent1"/>
+          </a:lnRef>
+          <a:fillRef idx="3">
+            <a:schemeClr val="accent1"/>
+          </a:fillRef>
+          <a:effectRef idx="2">
+            <a:schemeClr val="accent1"/>
+          </a:effectRef>
+          <a:fontRef idx="minor">
+            <a:schemeClr val="lt1"/>
+          </a:fontRef>
+        </p:style>
+        <p:txBody>
+          <a:bodyPr rtlCol="0" anchor="ctr"/>
+          <a:lstStyle/>
+          <a:p>
+            <a:pPr algn="ctr"/>
+          </a:p>
+        </p:txBody>
+      </p:sp>
       <p:pic>
         <p:nvPicPr>
-          <p:cNvPr id="16" name="Picture 15" descr="check_steel.png"/>
+          <p:cNvPr id="20" name="Picture 19" descr="check_white.png"/>
           <p:cNvPicPr>
             <a:picLocks noChangeAspect="1"/>
           </p:cNvPicPr>
@@ -11280,8 +12541,8 @@
         </p:blipFill>
         <p:spPr>
           <a:xfrm>
-            <a:off x="987552" y="4352544"/>
-            <a:ext cx="237744" cy="237744"/>
+            <a:off x="6523695" y="3588471"/>
+            <a:ext cx="266273" cy="266273"/>
           </a:xfrm>
           <a:prstGeom prst="rect">
             <a:avLst/>
@@ -11290,14 +12551,14 @@
       </p:pic>
       <p:sp>
         <p:nvSpPr>
-          <p:cNvPr id="17" name="TextBox 16"/>
+          <p:cNvPr id="21" name="TextBox 20"/>
           <p:cNvSpPr txBox="1"/>
           <p:nvPr/>
         </p:nvSpPr>
         <p:spPr>
           <a:xfrm>
-            <a:off x="1353312" y="4206240"/>
-            <a:ext cx="5029200" cy="530352"/>
+            <a:off x="7040880" y="3328416"/>
+            <a:ext cx="4206240" cy="786384"/>
           </a:xfrm>
           <a:prstGeom prst="rect">
             <a:avLst/>
@@ -11322,7 +12583,7 @@
               </a:spcAft>
             </a:pPr>
             <a:r>
-              <a:rPr sz="1200" b="0">
+              <a:rPr sz="1150" b="0">
                 <a:solidFill>
                   <a:srgbClr val="1A1A1A"/>
                 </a:solidFill>
@@ -11335,18 +12596,18 @@
       </p:sp>
       <p:sp>
         <p:nvSpPr>
-          <p:cNvPr id="18" name="Rounded Rectangle 17"/>
+          <p:cNvPr id="22" name="Rounded Rectangle 21"/>
           <p:cNvSpPr/>
           <p:nvPr/>
         </p:nvSpPr>
         <p:spPr>
           <a:xfrm>
-            <a:off x="841248" y="4809744"/>
-            <a:ext cx="5715000" cy="530352"/>
+            <a:off x="841248" y="4261104"/>
+            <a:ext cx="5138928" cy="786384"/>
           </a:xfrm>
           <a:prstGeom prst="roundRect">
             <a:avLst>
-              <a:gd name="adj" fmla="val 6000"/>
+              <a:gd name="adj" fmla="val 7000"/>
             </a:avLst>
           </a:prstGeom>
           <a:solidFill>
@@ -11381,9 +12642,55 @@
           </a:p>
         </p:txBody>
       </p:sp>
+      <p:sp>
+        <p:nvSpPr>
+          <p:cNvPr id="23" name="Rounded Rectangle 22"/>
+          <p:cNvSpPr/>
+          <p:nvPr/>
+        </p:nvSpPr>
+        <p:spPr>
+          <a:xfrm>
+            <a:off x="987552" y="4398264"/>
+            <a:ext cx="512064" cy="512064"/>
+          </a:xfrm>
+          <a:prstGeom prst="roundRect">
+            <a:avLst>
+              <a:gd name="adj" fmla="val 26000"/>
+            </a:avLst>
+          </a:prstGeom>
+          <a:solidFill>
+            <a:srgbClr val="EE0000"/>
+          </a:solidFill>
+          <a:ln>
+            <a:noFill/>
+          </a:ln>
+          <a:effectLst/>
+        </p:spPr>
+        <p:style>
+          <a:lnRef idx="1">
+            <a:schemeClr val="accent1"/>
+          </a:lnRef>
+          <a:fillRef idx="3">
+            <a:schemeClr val="accent1"/>
+          </a:fillRef>
+          <a:effectRef idx="2">
+            <a:schemeClr val="accent1"/>
+          </a:effectRef>
+          <a:fontRef idx="minor">
+            <a:schemeClr val="lt1"/>
+          </a:fontRef>
+        </p:style>
+        <p:txBody>
+          <a:bodyPr rtlCol="0" anchor="ctr"/>
+          <a:lstStyle/>
+          <a:p>
+            <a:pPr algn="ctr"/>
+          </a:p>
+        </p:txBody>
+      </p:sp>
       <p:pic>
         <p:nvPicPr>
-          <p:cNvPr id="19" name="Picture 18" descr="check_steel.png"/>
+          <p:cNvPr id="24" name="Picture 23" descr="check_white.png"/>
           <p:cNvPicPr>
             <a:picLocks noChangeAspect="1"/>
           </p:cNvPicPr>
@@ -11397,8 +12704,8 @@
         </p:blipFill>
         <p:spPr>
           <a:xfrm>
-            <a:off x="987552" y="4956048"/>
-            <a:ext cx="237744" cy="237744"/>
+            <a:off x="1110447" y="4521159"/>
+            <a:ext cx="266273" cy="266273"/>
           </a:xfrm>
           <a:prstGeom prst="rect">
             <a:avLst/>
@@ -11407,14 +12714,14 @@
       </p:pic>
       <p:sp>
         <p:nvSpPr>
-          <p:cNvPr id="20" name="TextBox 19"/>
+          <p:cNvPr id="25" name="TextBox 24"/>
           <p:cNvSpPr txBox="1"/>
           <p:nvPr/>
         </p:nvSpPr>
         <p:spPr>
           <a:xfrm>
-            <a:off x="1353312" y="4809744"/>
-            <a:ext cx="5029200" cy="530352"/>
+            <a:off x="1627632" y="4261104"/>
+            <a:ext cx="4206240" cy="786384"/>
           </a:xfrm>
           <a:prstGeom prst="rect">
             <a:avLst/>
@@ -11439,7 +12746,7 @@
               </a:spcAft>
             </a:pPr>
             <a:r>
-              <a:rPr sz="1200" b="0">
+              <a:rPr sz="1150" b="0">
                 <a:solidFill>
                   <a:srgbClr val="1A1A1A"/>
                 </a:solidFill>
@@ -11450,16 +12757,310 @@
           </a:p>
         </p:txBody>
       </p:sp>
-      <p:sp>
-        <p:nvSpPr>
-          <p:cNvPr id="21" name="Rounded Rectangle 20"/>
+      <p:cxnSp>
+        <p:nvCxnSpPr>
+          <p:cNvPr id="26" name="Connector 25"/>
+          <p:cNvCxnSpPr/>
+          <p:nvPr/>
+        </p:nvCxnSpPr>
+        <p:spPr>
+          <a:xfrm>
+            <a:off x="841248" y="6437376"/>
+            <a:ext cx="10509199" cy="0"/>
+          </a:xfrm>
+          <a:prstGeom prst="bentConnector3">
+            <a:avLst/>
+          </a:prstGeom>
+          <a:ln w="12700">
+            <a:solidFill>
+              <a:srgbClr val="DDE1E6"/>
+            </a:solidFill>
+          </a:ln>
+          <a:effectLst/>
+        </p:spPr>
+        <p:style>
+          <a:lnRef idx="2">
+            <a:schemeClr val="accent1"/>
+          </a:lnRef>
+          <a:fillRef idx="0">
+            <a:schemeClr val="accent1"/>
+          </a:fillRef>
+          <a:effectRef idx="1">
+            <a:schemeClr val="accent1"/>
+          </a:effectRef>
+          <a:fontRef idx="minor">
+            <a:schemeClr val="tx1"/>
+          </a:fontRef>
+        </p:style>
+      </p:cxnSp>
+      <p:sp>
+        <p:nvSpPr>
+          <p:cNvPr id="27" name="TextBox 26"/>
+          <p:cNvSpPr txBox="1"/>
+          <p:nvPr/>
+        </p:nvSpPr>
+        <p:spPr>
+          <a:xfrm>
+            <a:off x="841248" y="6473952"/>
+            <a:ext cx="7315200" cy="274320"/>
+          </a:xfrm>
+          <a:prstGeom prst="rect">
+            <a:avLst/>
+          </a:prstGeom>
+          <a:noFill/>
+        </p:spPr>
+        <p:txBody>
+          <a:bodyPr wrap="square" anchor="t" lIns="0" rIns="0" tIns="0" bIns="0">
+            <a:spAutoFit/>
+          </a:bodyPr>
+          <a:lstStyle/>
+          <a:p>
+            <a:pPr algn="l">
+              <a:lnSpc>
+                <a:spcPct val="106000"/>
+              </a:lnSpc>
+              <a:spcBef>
+                <a:spcPts val="0"/>
+              </a:spcBef>
+              <a:spcAft>
+                <a:spcPts val="0"/>
+              </a:spcAft>
+            </a:pPr>
+            <a:r>
+              <a:rPr sz="950" b="0">
+                <a:solidFill>
+                  <a:srgbClr val="8A9099"/>
+                </a:solidFill>
+                <a:latin typeface="Red Hat Text"/>
+              </a:rPr>
+              <a:t>CONFIDENTIAL</a:t>
+            </a:r>
+          </a:p>
+        </p:txBody>
+      </p:sp>
+      <p:sp>
+        <p:nvSpPr>
+          <p:cNvPr id="28" name="TextBox 27"/>
+          <p:cNvSpPr txBox="1"/>
+          <p:nvPr/>
+        </p:nvSpPr>
+        <p:spPr>
+          <a:xfrm>
+            <a:off x="10801807" y="6473952"/>
+            <a:ext cx="548640" cy="274320"/>
+          </a:xfrm>
+          <a:prstGeom prst="rect">
+            <a:avLst/>
+          </a:prstGeom>
+          <a:noFill/>
+        </p:spPr>
+        <p:txBody>
+          <a:bodyPr wrap="square" anchor="t" lIns="0" rIns="0" tIns="0" bIns="0">
+            <a:spAutoFit/>
+          </a:bodyPr>
+          <a:lstStyle/>
+          <a:p>
+            <a:pPr algn="r">
+              <a:lnSpc>
+                <a:spcPct val="106000"/>
+              </a:lnSpc>
+              <a:spcBef>
+                <a:spcPts val="0"/>
+              </a:spcBef>
+              <a:spcAft>
+                <a:spcPts val="0"/>
+              </a:spcAft>
+            </a:pPr>
+            <a:r>
+              <a:rPr sz="950" b="0">
+                <a:solidFill>
+                  <a:srgbClr val="8A9099"/>
+                </a:solidFill>
+                <a:latin typeface="Red Hat Text"/>
+              </a:rPr>
+              <a:t>7</a:t>
+            </a:r>
+          </a:p>
+        </p:txBody>
+      </p:sp>
+    </p:spTree>
+  </p:cSld>
+  <p:clrMapOvr>
+    <a:masterClrMapping/>
+  </p:clrMapOvr>
+</p:sld>
+</file>
+
+<file path=ppt/slides/slide9.xml><?xml version="1.0" encoding="utf-8"?>
+<p:sld xmlns:a="http://schemas.openxmlformats.org/drawingml/2006/main" xmlns:p="http://schemas.openxmlformats.org/presentationml/2006/main" xmlns:r="http://schemas.openxmlformats.org/officeDocument/2006/relationships">
+  <p:cSld>
+    <p:spTree>
+      <p:nvGrpSpPr>
+        <p:cNvPr id="1" name=""/>
+        <p:cNvGrpSpPr/>
+        <p:nvPr/>
+      </p:nvGrpSpPr>
+      <p:grpSpPr/>
+      <p:pic>
+        <p:nvPicPr>
+          <p:cNvPr id="2" name="Picture 1" descr="redhat_logo.jpg"/>
+          <p:cNvPicPr>
+            <a:picLocks noChangeAspect="1"/>
+          </p:cNvPicPr>
+          <p:nvPr/>
+        </p:nvPicPr>
+        <p:blipFill>
+          <a:blip r:embed="rId2"/>
+          <a:stretch>
+            <a:fillRect/>
+          </a:stretch>
+        </p:blipFill>
+        <p:spPr>
+          <a:xfrm>
+            <a:off x="10326319" y="475488"/>
+            <a:ext cx="1024128" cy="242248"/>
+          </a:xfrm>
+          <a:prstGeom prst="rect">
+            <a:avLst/>
+          </a:prstGeom>
+        </p:spPr>
+      </p:pic>
+      <p:sp>
+        <p:nvSpPr>
+          <p:cNvPr id="3" name="TextBox 2"/>
+          <p:cNvSpPr txBox="1"/>
+          <p:nvPr/>
+        </p:nvSpPr>
+        <p:spPr>
+          <a:xfrm>
+            <a:off x="841248" y="548640"/>
+            <a:ext cx="8595360" cy="274320"/>
+          </a:xfrm>
+          <a:prstGeom prst="rect">
+            <a:avLst/>
+          </a:prstGeom>
+          <a:noFill/>
+        </p:spPr>
+        <p:txBody>
+          <a:bodyPr wrap="square" anchor="t" lIns="0" rIns="0" tIns="0" bIns="0">
+            <a:spAutoFit/>
+          </a:bodyPr>
+          <a:lstStyle/>
+          <a:p>
+            <a:pPr algn="l">
+              <a:lnSpc>
+                <a:spcPct val="106000"/>
+              </a:lnSpc>
+              <a:spcBef>
+                <a:spcPts val="0"/>
+              </a:spcBef>
+              <a:spcAft>
+                <a:spcPts val="0"/>
+              </a:spcAft>
+            </a:pPr>
+            <a:r>
+              <a:rPr sz="1250" b="1" spc="220">
+                <a:solidFill>
+                  <a:srgbClr val="EE0000"/>
+                </a:solidFill>
+                <a:latin typeface="Red Hat Display"/>
+              </a:rPr>
+              <a:t>M10 · GITOPS FUNDAMENTALS</a:t>
+            </a:r>
+          </a:p>
+        </p:txBody>
+      </p:sp>
+      <p:sp>
+        <p:nvSpPr>
+          <p:cNvPr id="4" name="TextBox 3"/>
+          <p:cNvSpPr txBox="1"/>
+          <p:nvPr/>
+        </p:nvSpPr>
+        <p:spPr>
+          <a:xfrm>
+            <a:off x="841248" y="877824"/>
+            <a:ext cx="10515600" cy="548640"/>
+          </a:xfrm>
+          <a:prstGeom prst="rect">
+            <a:avLst/>
+          </a:prstGeom>
+          <a:noFill/>
+        </p:spPr>
+        <p:txBody>
+          <a:bodyPr wrap="none" anchor="t" lIns="0" rIns="0" tIns="0" bIns="0">
+            <a:spAutoFit/>
+          </a:bodyPr>
+          <a:lstStyle/>
+          <a:p>
+            <a:pPr algn="l">
+              <a:lnSpc>
+                <a:spcPct val="100000"/>
+              </a:lnSpc>
+              <a:spcBef>
+                <a:spcPts val="0"/>
+              </a:spcBef>
+              <a:spcAft>
+                <a:spcPts val="0"/>
+              </a:spcAft>
+            </a:pPr>
+            <a:r>
+              <a:rPr sz="2500" b="1">
+                <a:solidFill>
+                  <a:srgbClr val="1A1A1A"/>
+                </a:solidFill>
+                <a:latin typeface="Red Hat Display"/>
+              </a:rPr>
+              <a:t>Push vs pull</a:t>
+            </a:r>
+          </a:p>
+        </p:txBody>
+      </p:sp>
+      <p:cxnSp>
+        <p:nvCxnSpPr>
+          <p:cNvPr id="5" name="Connector 4"/>
+          <p:cNvCxnSpPr/>
+          <p:nvPr/>
+        </p:nvCxnSpPr>
+        <p:spPr>
+          <a:xfrm>
+            <a:off x="841248" y="1554480"/>
+            <a:ext cx="1371600" cy="0"/>
+          </a:xfrm>
+          <a:prstGeom prst="bentConnector3">
+            <a:avLst/>
+          </a:prstGeom>
+          <a:ln w="31750">
+            <a:solidFill>
+              <a:srgbClr val="EE0000"/>
+            </a:solidFill>
+          </a:ln>
+          <a:effectLst/>
+        </p:spPr>
+        <p:style>
+          <a:lnRef idx="2">
+            <a:schemeClr val="accent1"/>
+          </a:lnRef>
+          <a:fillRef idx="0">
+            <a:schemeClr val="accent1"/>
+          </a:fillRef>
+          <a:effectRef idx="1">
+            <a:schemeClr val="accent1"/>
+          </a:effectRef>
+          <a:fontRef idx="minor">
+            <a:schemeClr val="tx1"/>
+          </a:fontRef>
+        </p:style>
+      </p:cxnSp>
+      <p:sp>
+        <p:nvSpPr>
+          <p:cNvPr id="6" name="Rounded Rectangle 5"/>
           <p:cNvSpPr/>
           <p:nvPr/>
         </p:nvSpPr>
         <p:spPr>
           <a:xfrm>
-            <a:off x="6812280" y="2395728"/>
-            <a:ext cx="4538167" cy="2944368"/>
+            <a:off x="841248" y="2331720"/>
+            <a:ext cx="10509199" cy="3794760"/>
           </a:xfrm>
           <a:prstGeom prst="roundRect">
             <a:avLst>
@@ -11498,169 +13099,33 @@
           </a:p>
         </p:txBody>
       </p:sp>
-      <p:sp>
-        <p:nvSpPr>
-          <p:cNvPr id="22" name="Rounded Rectangle 21"/>
-          <p:cNvSpPr/>
-          <p:nvPr/>
-        </p:nvSpPr>
-        <p:spPr>
-          <a:xfrm>
-            <a:off x="7013448" y="2596896"/>
-            <a:ext cx="1298448" cy="310896"/>
-          </a:xfrm>
-          <a:prstGeom prst="roundRect">
-            <a:avLst>
-              <a:gd name="adj" fmla="val 50000"/>
-            </a:avLst>
-          </a:prstGeom>
-          <a:solidFill>
-            <a:srgbClr val="FCECEC"/>
-          </a:solidFill>
-          <a:ln>
-            <a:noFill/>
-          </a:ln>
-          <a:effectLst/>
-        </p:spPr>
-        <p:style>
-          <a:lnRef idx="1">
-            <a:schemeClr val="accent1"/>
-          </a:lnRef>
-          <a:fillRef idx="3">
-            <a:schemeClr val="accent1"/>
-          </a:fillRef>
-          <a:effectRef idx="2">
-            <a:schemeClr val="accent1"/>
-          </a:effectRef>
-          <a:fontRef idx="minor">
-            <a:schemeClr val="lt1"/>
-          </a:fontRef>
-        </p:style>
-        <p:txBody>
-          <a:bodyPr rtlCol="0" anchor="ctr"/>
-          <a:lstStyle/>
-          <a:p>
-            <a:pPr algn="ctr"/>
-          </a:p>
-        </p:txBody>
-      </p:sp>
-      <p:sp>
-        <p:nvSpPr>
-          <p:cNvPr id="23" name="TextBox 22"/>
-          <p:cNvSpPr txBox="1"/>
-          <p:nvPr/>
-        </p:nvSpPr>
-        <p:spPr>
-          <a:xfrm>
-            <a:off x="7013448" y="2596896"/>
-            <a:ext cx="1298448" cy="310896"/>
-          </a:xfrm>
-          <a:prstGeom prst="rect">
-            <a:avLst/>
-          </a:prstGeom>
-          <a:noFill/>
-        </p:spPr>
-        <p:txBody>
-          <a:bodyPr wrap="none" anchor="ctr" lIns="0" rIns="0" tIns="0" bIns="0">
-            <a:spAutoFit/>
-          </a:bodyPr>
-          <a:lstStyle/>
-          <a:p>
-            <a:pPr algn="ctr">
-              <a:lnSpc>
-                <a:spcPct val="106000"/>
-              </a:lnSpc>
-              <a:spcBef>
-                <a:spcPts val="0"/>
-              </a:spcBef>
-              <a:spcAft>
-                <a:spcPts val="0"/>
-              </a:spcAft>
-            </a:pPr>
-            <a:r>
-              <a:rPr sz="850" b="1">
-                <a:solidFill>
-                  <a:srgbClr val="B80000"/>
-                </a:solidFill>
-                <a:latin typeface="Red Hat Display"/>
-              </a:rPr>
-              <a:t>MEDIA PASS</a:t>
-            </a:r>
-          </a:p>
-        </p:txBody>
-      </p:sp>
       <p:pic>
         <p:nvPicPr>
-          <p:cNvPr id="24" name="Picture 23" descr="eye_slate.png"/>
+          <p:cNvPr id="7" name="Picture 6" descr="01-push-vs-pull.png"/>
           <p:cNvPicPr>
             <a:picLocks noChangeAspect="1"/>
           </p:cNvPicPr>
           <p:nvPr/>
         </p:nvPicPr>
         <p:blipFill>
-          <a:blip r:embed="rId4"/>
+          <a:blip r:embed="rId3"/>
           <a:stretch>
             <a:fillRect/>
           </a:stretch>
         </p:blipFill>
         <p:spPr>
           <a:xfrm>
-            <a:off x="8843619" y="3108960"/>
-            <a:ext cx="475488" cy="475488"/>
+            <a:off x="3063513" y="2532888"/>
+            <a:ext cx="6064668" cy="3392424"/>
           </a:xfrm>
           <a:prstGeom prst="rect">
             <a:avLst/>
           </a:prstGeom>
         </p:spPr>
       </p:pic>
-      <p:sp>
-        <p:nvSpPr>
-          <p:cNvPr id="25" name="TextBox 24"/>
-          <p:cNvSpPr txBox="1"/>
-          <p:nvPr/>
-        </p:nvSpPr>
-        <p:spPr>
-          <a:xfrm>
-            <a:off x="7050024" y="3721608"/>
-            <a:ext cx="4062679" cy="1481328"/>
-          </a:xfrm>
-          <a:prstGeom prst="rect">
-            <a:avLst/>
-          </a:prstGeom>
-          <a:noFill/>
-        </p:spPr>
-        <p:txBody>
-          <a:bodyPr wrap="square" anchor="t" lIns="0" rIns="0" tIns="0" bIns="0">
-            <a:spAutoFit/>
-          </a:bodyPr>
-          <a:lstStyle/>
-          <a:p>
-            <a:pPr algn="l">
-              <a:lnSpc>
-                <a:spcPct val="120000"/>
-              </a:lnSpc>
-              <a:spcBef>
-                <a:spcPts val="0"/>
-              </a:spcBef>
-              <a:spcAft>
-                <a:spcPts val="0"/>
-              </a:spcAft>
-            </a:pPr>
-            <a:r>
-              <a:rPr sz="950" b="0">
-                <a:solidFill>
-                  <a:srgbClr val="8A9099"/>
-                </a:solidFill>
-                <a:latin typeface="Red Hat Text"/>
-              </a:rPr>
-              <a:t>Two-column card "reach for GitOps / reach for a Job or the CLI", with a footnote pointer to the GitOps-at-Scale module and the External Secrets pattern.</a:t>
-            </a:r>
-          </a:p>
-        </p:txBody>
-      </p:sp>
       <p:cxnSp>
         <p:nvCxnSpPr>
-          <p:cNvPr id="26" name="Connector 25"/>
+          <p:cNvPr id="8" name="Connector 7"/>
           <p:cNvCxnSpPr/>
           <p:nvPr/>
         </p:nvCxnSpPr>
@@ -11696,7 +13161,7 @@
       </p:cxnSp>
       <p:sp>
         <p:nvSpPr>
-          <p:cNvPr id="27" name="TextBox 26"/>
+          <p:cNvPr id="9" name="TextBox 8"/>
           <p:cNvSpPr txBox="1"/>
           <p:nvPr/>
         </p:nvSpPr>
@@ -11741,7 +13206,7 @@
       </p:sp>
       <p:sp>
         <p:nvSpPr>
-          <p:cNvPr id="28" name="TextBox 27"/>
+          <p:cNvPr id="10" name="TextBox 9"/>
           <p:cNvSpPr txBox="1"/>
           <p:nvPr/>
         </p:nvSpPr>
@@ -11779,7 +13244,7 @@
                 </a:solidFill>
                 <a:latin typeface="Red Hat Text"/>
               </a:rPr>
-              <a:t>7</a:t>
+              <a:t>8</a:t>
             </a:r>
           </a:p>
         </p:txBody>
